--- a/slides/第05回_記憶階層とプロセッサの並列性.pptx
+++ b/slides/第05回_記憶階層とプロセッサの並列性.pptx
@@ -3718,7 +3718,7 @@
         <p:spPr>
           <a:xfrm>
             <a:off x="685800" y="1481328"/>
-            <a:ext cx="10789920" cy="621792"/>
+            <a:ext cx="10789920" cy="365760"/>
           </a:xfrm>
           <a:prstGeom prst="rect">
             <a:avLst/>
@@ -3766,7 +3766,7 @@
           </p:nvPr>
         </p:nvGraphicFramePr>
         <p:xfrm>
-          <a:off x="685800" y="2139696"/>
+          <a:off x="685800" y="1883664"/>
           <a:ext cx="10789920" cy="914400"/>
         </p:xfrm>
         <a:graphic>
@@ -5026,7 +5026,7 @@
         </p:nvSpPr>
         <p:spPr>
           <a:xfrm>
-            <a:off x="685800" y="4672584"/>
+            <a:off x="685800" y="4416552"/>
             <a:ext cx="10789920" cy="658368"/>
           </a:xfrm>
           <a:prstGeom prst="roundRect">
@@ -5053,7 +5053,7 @@
         </p:nvSpPr>
         <p:spPr>
           <a:xfrm>
-            <a:off x="914400" y="4818888"/>
+            <a:off x="914400" y="4562856"/>
             <a:ext cx="10332720" cy="365760"/>
           </a:xfrm>
           <a:prstGeom prst="rect">
@@ -5092,7 +5092,7 @@
         </p:nvSpPr>
         <p:spPr>
           <a:xfrm>
-            <a:off x="685800" y="5495544"/>
+            <a:off x="685800" y="5239512"/>
             <a:ext cx="10789920" cy="457200"/>
           </a:xfrm>
           <a:prstGeom prst="rect">
@@ -5369,45 +5369,6 @@
         </p:nvSpPr>
         <p:spPr>
           <a:xfrm>
-            <a:off x="685800" y="5687568"/>
-            <a:ext cx="10789920" cy="365760"/>
-          </a:xfrm>
-          <a:prstGeom prst="rect">
-            <a:avLst/>
-          </a:prstGeom>
-          <a:noFill/>
-          <a:ln/>
-        </p:spPr>
-        <p:txBody>
-          <a:bodyPr wrap="square" lIns="0" tIns="0" rIns="0" bIns="0" rtlCol="0" anchor="ctr"/>
-          <a:lstStyle/>
-          <a:p>
-            <a:pPr algn="ctr" indent="0" marL="0">
-              <a:buNone/>
-            </a:pPr>
-            <a:r>
-              <a:rPr lang="en-US" sz="1500" dirty="0">
-                <a:solidFill>
-                  <a:srgbClr val="16191D"/>
-                </a:solidFill>
-                <a:latin typeface="Yu Gothic" pitchFamily="34" charset="0"/>
-                <a:ea typeface="Yu Gothic" pitchFamily="34" charset="-122"/>
-                <a:cs typeface="Yu Gothic" pitchFamily="34" charset="-120"/>
-              </a:rPr>
-              <a:t>(a) と (b) は同じ結果を出し、同じ回数の加算をする。計算量はどちらも O(N²)。</a:t>
-            </a:r>
-            <a:endParaRPr lang="en-US" sz="1500" dirty="0"/>
-          </a:p>
-        </p:txBody>
-      </p:sp>
-      <p:sp>
-        <p:nvSpPr>
-          <p:cNvPr id="8" name="Text 5"/>
-          <p:cNvSpPr/>
-          <p:nvPr/>
-        </p:nvSpPr>
-        <p:spPr>
-          <a:xfrm>
             <a:off x="685800" y="6071616"/>
             <a:ext cx="10789920" cy="640080"/>
           </a:xfrm>
@@ -7684,7 +7645,7 @@
         <p:spPr>
           <a:xfrm>
             <a:off x="685800" y="1481328"/>
-            <a:ext cx="10789920" cy="621792"/>
+            <a:ext cx="10789920" cy="365760"/>
           </a:xfrm>
           <a:prstGeom prst="rect">
             <a:avLst/>
@@ -7733,53 +7694,14 @@
         </p:blipFill>
         <p:spPr>
           <a:xfrm>
-            <a:off x="2255955" y="2139696"/>
-            <a:ext cx="7649609" cy="3346704"/>
+            <a:off x="1963347" y="1883664"/>
+            <a:ext cx="8234825" cy="3602736"/>
           </a:xfrm>
           <a:prstGeom prst="rect">
             <a:avLst/>
           </a:prstGeom>
         </p:spPr>
       </p:pic>
-      <p:sp>
-        <p:nvSpPr>
-          <p:cNvPr id="7" name="Text 4"/>
-          <p:cNvSpPr/>
-          <p:nvPr/>
-        </p:nvSpPr>
-        <p:spPr>
-          <a:xfrm>
-            <a:off x="685800" y="5687568"/>
-            <a:ext cx="10789920" cy="365760"/>
-          </a:xfrm>
-          <a:prstGeom prst="rect">
-            <a:avLst/>
-          </a:prstGeom>
-          <a:noFill/>
-          <a:ln/>
-        </p:spPr>
-        <p:txBody>
-          <a:bodyPr wrap="square" lIns="0" tIns="0" rIns="0" bIns="0" rtlCol="0" anchor="ctr"/>
-          <a:lstStyle/>
-          <a:p>
-            <a:pPr algn="ctr" indent="0" marL="0">
-              <a:buNone/>
-            </a:pPr>
-            <a:r>
-              <a:rPr lang="en-US" sz="1500" dirty="0">
-                <a:solidFill>
-                  <a:srgbClr val="16191D"/>
-                </a:solidFill>
-                <a:latin typeface="Yu Gothic" pitchFamily="34" charset="0"/>
-                <a:ea typeface="Yu Gothic" pitchFamily="34" charset="-122"/>
-                <a:cs typeface="Yu Gothic" pitchFamily="34" charset="-120"/>
-              </a:rPr>
-              <a:t>1命令あたりの所要時間は変わらないが、単位時間あたりの完了数が5倍になる。</a:t>
-            </a:r>
-            <a:endParaRPr lang="en-US" sz="1500" dirty="0"/>
-          </a:p>
-        </p:txBody>
-      </p:sp>
     </p:spTree>
   </p:cSld>
   <p:clrMapOvr>
@@ -9139,7 +9061,7 @@
         <p:spPr>
           <a:xfrm>
             <a:off x="685800" y="1481328"/>
-            <a:ext cx="10789920" cy="621792"/>
+            <a:ext cx="10789920" cy="365760"/>
           </a:xfrm>
           <a:prstGeom prst="rect">
             <a:avLst/>
@@ -9188,8 +9110,8 @@
         </p:blipFill>
         <p:spPr>
           <a:xfrm>
-            <a:off x="3236062" y="2139696"/>
-            <a:ext cx="5689397" cy="3346704"/>
+            <a:off x="3018434" y="1883664"/>
+            <a:ext cx="6124651" cy="3602736"/>
           </a:xfrm>
           <a:prstGeom prst="rect">
             <a:avLst/>
@@ -13435,7 +13357,7 @@
         <p:spPr>
           <a:xfrm>
             <a:off x="685800" y="1481328"/>
-            <a:ext cx="10789920" cy="621792"/>
+            <a:ext cx="10789920" cy="365760"/>
           </a:xfrm>
           <a:prstGeom prst="rect">
             <a:avLst/>
@@ -13476,7 +13398,7 @@
         </p:nvSpPr>
         <p:spPr>
           <a:xfrm>
-            <a:off x="685800" y="2185416"/>
+            <a:off x="685800" y="1929384"/>
             <a:ext cx="10789920" cy="713232"/>
           </a:xfrm>
           <a:prstGeom prst="roundRect">
@@ -13503,7 +13425,7 @@
         </p:nvSpPr>
         <p:spPr>
           <a:xfrm>
-            <a:off x="914400" y="2340864"/>
+            <a:off x="914400" y="2084832"/>
             <a:ext cx="10332720" cy="402336"/>
           </a:xfrm>
           <a:prstGeom prst="rect">
@@ -13542,7 +13464,7 @@
         </p:nvSpPr>
         <p:spPr>
           <a:xfrm>
-            <a:off x="1188720" y="3145536"/>
+            <a:off x="1188720" y="2889504"/>
             <a:ext cx="4572000" cy="457200"/>
           </a:xfrm>
           <a:prstGeom prst="rect">
@@ -13581,7 +13503,7 @@
         </p:nvSpPr>
         <p:spPr>
           <a:xfrm>
-            <a:off x="5943600" y="3273552"/>
+            <a:off x="5943600" y="3017520"/>
             <a:ext cx="640080" cy="201168"/>
           </a:xfrm>
           <a:prstGeom prst="rightArrow">
@@ -13601,7 +13523,7 @@
         </p:nvSpPr>
         <p:spPr>
           <a:xfrm>
-            <a:off x="6766560" y="3145536"/>
+            <a:off x="6766560" y="2889504"/>
             <a:ext cx="4206240" cy="457200"/>
           </a:xfrm>
           <a:prstGeom prst="rect">
@@ -13640,7 +13562,7 @@
         </p:nvSpPr>
         <p:spPr>
           <a:xfrm>
-            <a:off x="1188720" y="3767328"/>
+            <a:off x="1188720" y="3511296"/>
             <a:ext cx="4572000" cy="457200"/>
           </a:xfrm>
           <a:prstGeom prst="rect">
@@ -13679,7 +13601,7 @@
         </p:nvSpPr>
         <p:spPr>
           <a:xfrm>
-            <a:off x="5943600" y="3895344"/>
+            <a:off x="5943600" y="3639312"/>
             <a:ext cx="640080" cy="201168"/>
           </a:xfrm>
           <a:prstGeom prst="rightArrow">
@@ -13699,7 +13621,7 @@
         </p:nvSpPr>
         <p:spPr>
           <a:xfrm>
-            <a:off x="6766560" y="3767328"/>
+            <a:off x="6766560" y="3511296"/>
             <a:ext cx="4206240" cy="457200"/>
           </a:xfrm>
           <a:prstGeom prst="rect">
@@ -13738,7 +13660,7 @@
         </p:nvSpPr>
         <p:spPr>
           <a:xfrm>
-            <a:off x="1188720" y="4389120"/>
+            <a:off x="1188720" y="4133088"/>
             <a:ext cx="4572000" cy="457200"/>
           </a:xfrm>
           <a:prstGeom prst="rect">
@@ -13777,7 +13699,7 @@
         </p:nvSpPr>
         <p:spPr>
           <a:xfrm>
-            <a:off x="5943600" y="4517136"/>
+            <a:off x="5943600" y="4261104"/>
             <a:ext cx="640080" cy="201168"/>
           </a:xfrm>
           <a:prstGeom prst="rightArrow">
@@ -13797,7 +13719,7 @@
         </p:nvSpPr>
         <p:spPr>
           <a:xfrm>
-            <a:off x="6766560" y="4389120"/>
+            <a:off x="6766560" y="4133088"/>
             <a:ext cx="4206240" cy="457200"/>
           </a:xfrm>
           <a:prstGeom prst="rect">
@@ -13836,7 +13758,7 @@
         </p:nvSpPr>
         <p:spPr>
           <a:xfrm>
-            <a:off x="685800" y="5102352"/>
+            <a:off x="685800" y="4846320"/>
             <a:ext cx="10789920" cy="457200"/>
           </a:xfrm>
           <a:prstGeom prst="rect">

--- a/slides/第05回_記憶階層とプロセッサの並列性.pptx
+++ b/slides/第05回_記憶階層とプロセッサの並列性.pptx
@@ -26,9 +26,12 @@
     <p:sldId id="274" r:id="rId20"/>
     <p:sldId id="275" r:id="rId21"/>
     <p:sldId id="276" r:id="rId22"/>
+    <p:sldId id="277" r:id="rId23"/>
+    <p:sldId id="278" r:id="rId24"/>
+    <p:sldId id="279" r:id="rId25"/>
   </p:sldIdLst>
   <p:notesMasterIdLst>
-    <p:notesMasterId r:id="rId23"/>
+    <p:notesMasterId r:id="rId26"/>
   </p:notesMasterIdLst>
   <p:sldSz cx="12192000" cy="6858000"/>
   <p:notesSz cx="6858000" cy="12192000"/>
@@ -1690,6 +1693,270 @@
             <a:fld id="{F7021451-1387-4CA6-816F-3879F97B5CBC}" type="slidenum">
               <a:rPr lang="en-US"/>
               <a:t>21</a:t>
+            </a:fld>
+            <a:endParaRPr lang="en-US"/>
+          </a:p>
+        </p:txBody>
+      </p:sp>
+    </p:spTree>
+    <p:extLst>
+      <p:ext uri="{BB962C8B-B14F-4D97-AF65-F5344CB8AC3E}">
+        <p14:creationId xmlns:p14="http://schemas.microsoft.com/office/powerpoint/2010/main" val="1024086991"/>
+      </p:ext>
+    </p:extLst>
+  </p:cSld>
+  <p:clrMapOvr>
+    <a:masterClrMapping/>
+  </p:clrMapOvr>
+</p:notes>
+</file>
+
+<file path=ppt/notesSlides/notesSlide22.xml><?xml version="1.0" encoding="utf-8"?>
+<p:notes xmlns:a="http://schemas.openxmlformats.org/drawingml/2006/main" xmlns:r="http://schemas.openxmlformats.org/officeDocument/2006/relationships" xmlns:p="http://schemas.openxmlformats.org/presentationml/2006/main">
+  <p:cSld>
+    <p:spTree>
+      <p:nvGrpSpPr>
+        <p:cNvPr id="1" name=""/>
+        <p:cNvGrpSpPr/>
+        <p:nvPr/>
+      </p:nvGrpSpPr>
+      <p:grpSpPr>
+        <a:xfrm>
+          <a:off x="0" y="0"/>
+          <a:ext cx="0" cy="0"/>
+          <a:chOff x="0" y="0"/>
+          <a:chExt cx="0" cy="0"/>
+        </a:xfrm>
+      </p:grpSpPr>
+      <p:sp>
+        <p:nvSpPr>
+          <p:cNvPr id="2" name="Slide Image Placeholder 1"/>
+          <p:cNvSpPr>
+            <a:spLocks noGrp="1" noRot="1" noChangeAspect="1"/>
+          </p:cNvSpPr>
+          <p:nvPr>
+            <p:ph type="sldImg"/>
+          </p:nvPr>
+        </p:nvSpPr>
+        <p:spPr/>
+      </p:sp>
+      <p:sp>
+        <p:nvSpPr>
+          <p:cNvPr id="3" name="Notes Placeholder 2"/>
+          <p:cNvSpPr>
+            <a:spLocks noGrp="1"/>
+          </p:cNvSpPr>
+          <p:nvPr>
+            <p:ph type="body" idx="1"/>
+          </p:nvPr>
+        </p:nvSpPr>
+        <p:spPr/>
+        <p:txBody>
+          <a:bodyPr/>
+          <a:lstStyle/>
+          <a:p>
+            <a:r>
+              <a:rPr lang="en-US" dirty="0"/>
+              <a:t/>
+            </a:r>
+            <a:endParaRPr lang="en-US" dirty="0"/>
+          </a:p>
+        </p:txBody>
+      </p:sp>
+      <p:sp>
+        <p:nvSpPr>
+          <p:cNvPr id="4" name="Slide Number Placeholder 3"/>
+          <p:cNvSpPr>
+            <a:spLocks noGrp="1"/>
+          </p:cNvSpPr>
+          <p:nvPr>
+            <p:ph type="sldNum" sz="quarter" idx="10"/>
+          </p:nvPr>
+        </p:nvSpPr>
+        <p:spPr/>
+        <p:txBody>
+          <a:bodyPr/>
+          <a:lstStyle/>
+          <a:p>
+            <a:fld id="{F7021451-1387-4CA6-816F-3879F97B5CBC}" type="slidenum">
+              <a:rPr lang="en-US"/>
+              <a:t>22</a:t>
+            </a:fld>
+            <a:endParaRPr lang="en-US"/>
+          </a:p>
+        </p:txBody>
+      </p:sp>
+    </p:spTree>
+    <p:extLst>
+      <p:ext uri="{BB962C8B-B14F-4D97-AF65-F5344CB8AC3E}">
+        <p14:creationId xmlns:p14="http://schemas.microsoft.com/office/powerpoint/2010/main" val="1024086991"/>
+      </p:ext>
+    </p:extLst>
+  </p:cSld>
+  <p:clrMapOvr>
+    <a:masterClrMapping/>
+  </p:clrMapOvr>
+</p:notes>
+</file>
+
+<file path=ppt/notesSlides/notesSlide23.xml><?xml version="1.0" encoding="utf-8"?>
+<p:notes xmlns:a="http://schemas.openxmlformats.org/drawingml/2006/main" xmlns:r="http://schemas.openxmlformats.org/officeDocument/2006/relationships" xmlns:p="http://schemas.openxmlformats.org/presentationml/2006/main">
+  <p:cSld>
+    <p:spTree>
+      <p:nvGrpSpPr>
+        <p:cNvPr id="1" name=""/>
+        <p:cNvGrpSpPr/>
+        <p:nvPr/>
+      </p:nvGrpSpPr>
+      <p:grpSpPr>
+        <a:xfrm>
+          <a:off x="0" y="0"/>
+          <a:ext cx="0" cy="0"/>
+          <a:chOff x="0" y="0"/>
+          <a:chExt cx="0" cy="0"/>
+        </a:xfrm>
+      </p:grpSpPr>
+      <p:sp>
+        <p:nvSpPr>
+          <p:cNvPr id="2" name="Slide Image Placeholder 1"/>
+          <p:cNvSpPr>
+            <a:spLocks noGrp="1" noRot="1" noChangeAspect="1"/>
+          </p:cNvSpPr>
+          <p:nvPr>
+            <p:ph type="sldImg"/>
+          </p:nvPr>
+        </p:nvSpPr>
+        <p:spPr/>
+      </p:sp>
+      <p:sp>
+        <p:nvSpPr>
+          <p:cNvPr id="3" name="Notes Placeholder 2"/>
+          <p:cNvSpPr>
+            <a:spLocks noGrp="1"/>
+          </p:cNvSpPr>
+          <p:nvPr>
+            <p:ph type="body" idx="1"/>
+          </p:nvPr>
+        </p:nvSpPr>
+        <p:spPr/>
+        <p:txBody>
+          <a:bodyPr/>
+          <a:lstStyle/>
+          <a:p>
+            <a:r>
+              <a:rPr lang="en-US" dirty="0"/>
+              <a:t/>
+            </a:r>
+            <a:endParaRPr lang="en-US" dirty="0"/>
+          </a:p>
+        </p:txBody>
+      </p:sp>
+      <p:sp>
+        <p:nvSpPr>
+          <p:cNvPr id="4" name="Slide Number Placeholder 3"/>
+          <p:cNvSpPr>
+            <a:spLocks noGrp="1"/>
+          </p:cNvSpPr>
+          <p:nvPr>
+            <p:ph type="sldNum" sz="quarter" idx="10"/>
+          </p:nvPr>
+        </p:nvSpPr>
+        <p:spPr/>
+        <p:txBody>
+          <a:bodyPr/>
+          <a:lstStyle/>
+          <a:p>
+            <a:fld id="{F7021451-1387-4CA6-816F-3879F97B5CBC}" type="slidenum">
+              <a:rPr lang="en-US"/>
+              <a:t>23</a:t>
+            </a:fld>
+            <a:endParaRPr lang="en-US"/>
+          </a:p>
+        </p:txBody>
+      </p:sp>
+    </p:spTree>
+    <p:extLst>
+      <p:ext uri="{BB962C8B-B14F-4D97-AF65-F5344CB8AC3E}">
+        <p14:creationId xmlns:p14="http://schemas.microsoft.com/office/powerpoint/2010/main" val="1024086991"/>
+      </p:ext>
+    </p:extLst>
+  </p:cSld>
+  <p:clrMapOvr>
+    <a:masterClrMapping/>
+  </p:clrMapOvr>
+</p:notes>
+</file>
+
+<file path=ppt/notesSlides/notesSlide24.xml><?xml version="1.0" encoding="utf-8"?>
+<p:notes xmlns:a="http://schemas.openxmlformats.org/drawingml/2006/main" xmlns:r="http://schemas.openxmlformats.org/officeDocument/2006/relationships" xmlns:p="http://schemas.openxmlformats.org/presentationml/2006/main">
+  <p:cSld>
+    <p:spTree>
+      <p:nvGrpSpPr>
+        <p:cNvPr id="1" name=""/>
+        <p:cNvGrpSpPr/>
+        <p:nvPr/>
+      </p:nvGrpSpPr>
+      <p:grpSpPr>
+        <a:xfrm>
+          <a:off x="0" y="0"/>
+          <a:ext cx="0" cy="0"/>
+          <a:chOff x="0" y="0"/>
+          <a:chExt cx="0" cy="0"/>
+        </a:xfrm>
+      </p:grpSpPr>
+      <p:sp>
+        <p:nvSpPr>
+          <p:cNvPr id="2" name="Slide Image Placeholder 1"/>
+          <p:cNvSpPr>
+            <a:spLocks noGrp="1" noRot="1" noChangeAspect="1"/>
+          </p:cNvSpPr>
+          <p:nvPr>
+            <p:ph type="sldImg"/>
+          </p:nvPr>
+        </p:nvSpPr>
+        <p:spPr/>
+      </p:sp>
+      <p:sp>
+        <p:nvSpPr>
+          <p:cNvPr id="3" name="Notes Placeholder 2"/>
+          <p:cNvSpPr>
+            <a:spLocks noGrp="1"/>
+          </p:cNvSpPr>
+          <p:nvPr>
+            <p:ph type="body" idx="1"/>
+          </p:nvPr>
+        </p:nvSpPr>
+        <p:spPr/>
+        <p:txBody>
+          <a:bodyPr/>
+          <a:lstStyle/>
+          <a:p>
+            <a:r>
+              <a:rPr lang="en-US" dirty="0"/>
+              <a:t/>
+            </a:r>
+            <a:endParaRPr lang="en-US" dirty="0"/>
+          </a:p>
+        </p:txBody>
+      </p:sp>
+      <p:sp>
+        <p:nvSpPr>
+          <p:cNvPr id="4" name="Slide Number Placeholder 3"/>
+          <p:cNvSpPr>
+            <a:spLocks noGrp="1"/>
+          </p:cNvSpPr>
+          <p:nvPr>
+            <p:ph type="sldNum" sz="quarter" idx="10"/>
+          </p:nvPr>
+        </p:nvSpPr>
+        <p:spPr/>
+        <p:txBody>
+          <a:bodyPr/>
+          <a:lstStyle/>
+          <a:p>
+            <a:fld id="{F7021451-1387-4CA6-816F-3879F97B5CBC}" type="slidenum">
+              <a:rPr lang="en-US"/>
+              <a:t>24</a:t>
             </a:fld>
             <a:endParaRPr lang="en-US"/>
           </a:p>
@@ -8345,7 +8612,7 @@
                 <a:ea typeface="Yu Gothic" pitchFamily="34" charset="-122"/>
                 <a:cs typeface="Yu Gothic" pitchFamily="34" charset="-120"/>
               </a:rPr>
-              <a:t>5.4　並列性</a:t>
+              <a:t>5.4　投機実行</a:t>
             </a:r>
             <a:endParaRPr lang="en-US" sz="1200" dirty="0"/>
           </a:p>
@@ -8384,7 +8651,7 @@
                 <a:ea typeface="Yu Gothic" pitchFamily="34" charset="-122"/>
                 <a:cs typeface="Yu Gothic" pitchFamily="34" charset="-120"/>
               </a:rPr>
-              <a:t>並列性の階層</a:t>
+              <a:t>取り消せるのは結果だけ、痕跡は残る</a:t>
             </a:r>
             <a:endParaRPr lang="en-US" sz="3000" dirty="0"/>
           </a:p>
@@ -8431,26 +8698,68 @@
       </p:sp>
       <p:sp>
         <p:nvSpPr>
-          <p:cNvPr id="5" name="Shape 3"/>
+          <p:cNvPr id="5" name="Text 3"/>
           <p:cNvSpPr/>
           <p:nvPr/>
         </p:nvSpPr>
         <p:spPr>
           <a:xfrm>
             <a:off x="685800" y="1481328"/>
-            <a:ext cx="5280660" cy="1371600"/>
+            <a:ext cx="10789920" cy="566928"/>
+          </a:xfrm>
+          <a:prstGeom prst="rect">
+            <a:avLst/>
+          </a:prstGeom>
+          <a:noFill/>
+          <a:ln/>
+        </p:spPr>
+        <p:txBody>
+          <a:bodyPr wrap="square" lIns="0" tIns="0" rIns="0" bIns="0" rtlCol="0" anchor="ctr"/>
+          <a:lstStyle/>
+          <a:p>
+            <a:pPr indent="0" marL="0">
+              <a:lnSpc>
+                <a:spcPts val="2200"/>
+              </a:lnSpc>
+              <a:buNone/>
+            </a:pPr>
+            <a:r>
+              <a:rPr lang="en-US" sz="1500" dirty="0">
+                <a:solidFill>
+                  <a:srgbClr val="16191D"/>
+                </a:solidFill>
+                <a:latin typeface="Yu Gothic" pitchFamily="34" charset="0"/>
+                <a:ea typeface="Yu Gothic" pitchFamily="34" charset="-122"/>
+                <a:cs typeface="Yu Gothic" pitchFamily="34" charset="-120"/>
+              </a:rPr>
+              <a:t>分岐予測の次の一手が投機実行である。予測した方向の命令を、予測が正しいと分かる前に実行してしまう。外れたら結果を捨てる。</a:t>
+            </a:r>
+            <a:endParaRPr lang="en-US" sz="1500" dirty="0"/>
+          </a:p>
+        </p:txBody>
+      </p:sp>
+      <p:sp>
+        <p:nvSpPr>
+          <p:cNvPr id="6" name="Shape 4"/>
+          <p:cNvSpPr/>
+          <p:nvPr/>
+        </p:nvSpPr>
+        <p:spPr>
+          <a:xfrm>
+            <a:off x="685800" y="2130552"/>
+            <a:ext cx="10789920" cy="713232"/>
           </a:xfrm>
           <a:prstGeom prst="roundRect">
             <a:avLst>
-              <a:gd name="adj" fmla="val 4000"/>
+              <a:gd name="adj" fmla="val 7692"/>
             </a:avLst>
           </a:prstGeom>
           <a:solidFill>
-            <a:srgbClr val="EEF1F5"/>
-          </a:solidFill>
-          <a:ln w="12700">
+            <a:srgbClr val="D9E6F4"/>
+          </a:solidFill>
+          <a:ln w="19050">
             <a:solidFill>
-              <a:srgbClr val="DDE4EC"/>
+              <a:srgbClr val="0B5CAD"/>
             </a:solidFill>
             <a:prstDash val="solid"/>
           </a:ln>
@@ -8458,14 +8767,14 @@
       </p:sp>
       <p:sp>
         <p:nvSpPr>
-          <p:cNvPr id="6" name="Text 4"/>
-          <p:cNvSpPr/>
-          <p:nvPr/>
-        </p:nvSpPr>
-        <p:spPr>
-          <a:xfrm>
-            <a:off x="868680" y="1618488"/>
-            <a:ext cx="4914900" cy="310896"/>
+          <p:cNvPr id="7" name="Text 5"/>
+          <p:cNvSpPr/>
+          <p:nvPr/>
+        </p:nvSpPr>
+        <p:spPr>
+          <a:xfrm>
+            <a:off x="914400" y="2286000"/>
+            <a:ext cx="10332720" cy="402336"/>
           </a:xfrm>
           <a:prstGeom prst="rect">
             <a:avLst/>
@@ -8481,30 +8790,30 @@
               <a:buNone/>
             </a:pPr>
             <a:r>
-              <a:rPr lang="en-US" sz="1400" b="1" dirty="0">
-                <a:solidFill>
-                  <a:srgbClr val="16191D"/>
+              <a:rPr lang="en-US" sz="1700" b="1" dirty="0">
+                <a:solidFill>
+                  <a:srgbClr val="0B5CAD"/>
                 </a:solidFill>
                 <a:latin typeface="Yu Gothic" pitchFamily="34" charset="0"/>
                 <a:ea typeface="Yu Gothic" pitchFamily="34" charset="-122"/>
                 <a:cs typeface="Yu Gothic" pitchFamily="34" charset="-120"/>
               </a:rPr>
-              <a:t>スーパースカラ</a:t>
-            </a:r>
-            <a:endParaRPr lang="en-US" sz="1400" dirty="0"/>
-          </a:p>
-        </p:txBody>
-      </p:sp>
-      <p:sp>
-        <p:nvSpPr>
-          <p:cNvPr id="7" name="Text 5"/>
-          <p:cNvSpPr/>
-          <p:nvPr/>
-        </p:nvSpPr>
-        <p:spPr>
-          <a:xfrm>
-            <a:off x="868680" y="1965960"/>
-            <a:ext cx="4914900" cy="731520"/>
+              <a:t>捨てられるのは計算結果だけ。キャッシュの状態は元に戻らない</a:t>
+            </a:r>
+            <a:endParaRPr lang="en-US" sz="1700" dirty="0"/>
+          </a:p>
+        </p:txBody>
+      </p:sp>
+      <p:sp>
+        <p:nvSpPr>
+          <p:cNvPr id="8" name="Text 6"/>
+          <p:cNvSpPr/>
+          <p:nvPr/>
+        </p:nvSpPr>
+        <p:spPr>
+          <a:xfrm>
+            <a:off x="1188720" y="3090672"/>
+            <a:ext cx="4572000" cy="457200"/>
           </a:xfrm>
           <a:prstGeom prst="rect">
             <a:avLst/>
@@ -8513,67 +8822,57 @@
           <a:ln/>
         </p:spPr>
         <p:txBody>
-          <a:bodyPr wrap="square" lIns="0" tIns="0" rIns="0" bIns="0" rtlCol="0" anchor="t"/>
-          <a:lstStyle/>
-          <a:p>
-            <a:pPr indent="0" marL="0">
-              <a:lnSpc>
-                <a:spcPts val="1600"/>
-              </a:lnSpc>
-              <a:buNone/>
-            </a:pPr>
-            <a:r>
-              <a:rPr lang="en-US" sz="1200" dirty="0">
-                <a:solidFill>
-                  <a:srgbClr val="5F6672"/>
+          <a:bodyPr wrap="square" lIns="0" tIns="0" rIns="0" bIns="0" rtlCol="0" anchor="ctr"/>
+          <a:lstStyle/>
+          <a:p>
+            <a:pPr algn="r" indent="0" marL="0">
+              <a:buNone/>
+            </a:pPr>
+            <a:r>
+              <a:rPr lang="en-US" sz="1500" dirty="0">
+                <a:solidFill>
+                  <a:srgbClr val="16191D"/>
                 </a:solidFill>
                 <a:latin typeface="Yu Gothic" pitchFamily="34" charset="0"/>
                 <a:ea typeface="Yu Gothic" pitchFamily="34" charset="-122"/>
                 <a:cs typeface="Yu Gothic" pitchFamily="34" charset="-120"/>
               </a:rPr>
-              <a:t>演算器を複数持ち、依存関係のない命令を同時に発行する。アウトオブオーダ実行では順序も入れ替える</a:t>
-            </a:r>
-            <a:endParaRPr lang="en-US" sz="1200" dirty="0"/>
-          </a:p>
-        </p:txBody>
-      </p:sp>
-      <p:sp>
-        <p:nvSpPr>
-          <p:cNvPr id="8" name="Shape 6"/>
-          <p:cNvSpPr/>
-          <p:nvPr/>
-        </p:nvSpPr>
-        <p:spPr>
-          <a:xfrm>
-            <a:off x="6195060" y="1481328"/>
-            <a:ext cx="5280660" cy="1371600"/>
-          </a:xfrm>
-          <a:prstGeom prst="roundRect">
-            <a:avLst>
-              <a:gd name="adj" fmla="val 4000"/>
-            </a:avLst>
-          </a:prstGeom>
-          <a:solidFill>
-            <a:srgbClr val="EEF1F5"/>
-          </a:solidFill>
-          <a:ln w="12700">
-            <a:solidFill>
-              <a:srgbClr val="DDE4EC"/>
-            </a:solidFill>
-            <a:prstDash val="solid"/>
-          </a:ln>
-        </p:spPr>
-      </p:sp>
-      <p:sp>
-        <p:nvSpPr>
-          <p:cNvPr id="9" name="Text 7"/>
-          <p:cNvSpPr/>
-          <p:nvPr/>
-        </p:nvSpPr>
-        <p:spPr>
-          <a:xfrm>
-            <a:off x="6377940" y="1618488"/>
-            <a:ext cx="4914900" cy="310896"/>
+              <a:t>キャッシュに当たる</a:t>
+            </a:r>
+            <a:endParaRPr lang="en-US" sz="1500" dirty="0"/>
+          </a:p>
+        </p:txBody>
+      </p:sp>
+      <p:sp>
+        <p:nvSpPr>
+          <p:cNvPr id="9" name="Shape 7"/>
+          <p:cNvSpPr/>
+          <p:nvPr/>
+        </p:nvSpPr>
+        <p:spPr>
+          <a:xfrm>
+            <a:off x="5943600" y="3218688"/>
+            <a:ext cx="640080" cy="201168"/>
+          </a:xfrm>
+          <a:prstGeom prst="rightArrow">
+            <a:avLst/>
+          </a:prstGeom>
+          <a:solidFill>
+            <a:srgbClr val="0B5CAD"/>
+          </a:solidFill>
+          <a:ln/>
+        </p:spPr>
+      </p:sp>
+      <p:sp>
+        <p:nvSpPr>
+          <p:cNvPr id="10" name="Text 8"/>
+          <p:cNvSpPr/>
+          <p:nvPr/>
+        </p:nvSpPr>
+        <p:spPr>
+          <a:xfrm>
+            <a:off x="6766560" y="3090672"/>
+            <a:ext cx="4206240" cy="457200"/>
           </a:xfrm>
           <a:prstGeom prst="rect">
             <a:avLst/>
@@ -8589,30 +8888,30 @@
               <a:buNone/>
             </a:pPr>
             <a:r>
-              <a:rPr lang="en-US" sz="1400" b="1" dirty="0">
-                <a:solidFill>
-                  <a:srgbClr val="16191D"/>
+              <a:rPr lang="en-US" sz="1600" b="1" dirty="0">
+                <a:solidFill>
+                  <a:srgbClr val="0B5CAD"/>
                 </a:solidFill>
                 <a:latin typeface="Yu Gothic" pitchFamily="34" charset="0"/>
                 <a:ea typeface="Yu Gothic" pitchFamily="34" charset="-122"/>
                 <a:cs typeface="Yu Gothic" pitchFamily="34" charset="-120"/>
               </a:rPr>
-              <a:t>SIMD</a:t>
-            </a:r>
-            <a:endParaRPr lang="en-US" sz="1400" dirty="0"/>
-          </a:p>
-        </p:txBody>
-      </p:sp>
-      <p:sp>
-        <p:nvSpPr>
-          <p:cNvPr id="10" name="Text 8"/>
-          <p:cNvSpPr/>
-          <p:nvPr/>
-        </p:nvSpPr>
-        <p:spPr>
-          <a:xfrm>
-            <a:off x="6377940" y="1965960"/>
-            <a:ext cx="4914900" cy="731520"/>
+              <a:t>1 ns</a:t>
+            </a:r>
+            <a:endParaRPr lang="en-US" sz="1600" dirty="0"/>
+          </a:p>
+        </p:txBody>
+      </p:sp>
+      <p:sp>
+        <p:nvSpPr>
+          <p:cNvPr id="11" name="Text 9"/>
+          <p:cNvSpPr/>
+          <p:nvPr/>
+        </p:nvSpPr>
+        <p:spPr>
+          <a:xfrm>
+            <a:off x="1188720" y="3712464"/>
+            <a:ext cx="4572000" cy="457200"/>
           </a:xfrm>
           <a:prstGeom prst="rect">
             <a:avLst/>
@@ -8621,67 +8920,57 @@
           <a:ln/>
         </p:spPr>
         <p:txBody>
-          <a:bodyPr wrap="square" lIns="0" tIns="0" rIns="0" bIns="0" rtlCol="0" anchor="t"/>
-          <a:lstStyle/>
-          <a:p>
-            <a:pPr indent="0" marL="0">
-              <a:lnSpc>
-                <a:spcPts val="1600"/>
-              </a:lnSpc>
-              <a:buNone/>
-            </a:pPr>
-            <a:r>
-              <a:rPr lang="en-US" sz="1200" dirty="0">
-                <a:solidFill>
-                  <a:srgbClr val="5F6672"/>
+          <a:bodyPr wrap="square" lIns="0" tIns="0" rIns="0" bIns="0" rtlCol="0" anchor="ctr"/>
+          <a:lstStyle/>
+          <a:p>
+            <a:pPr algn="r" indent="0" marL="0">
+              <a:buNone/>
+            </a:pPr>
+            <a:r>
+              <a:rPr lang="en-US" sz="1500" dirty="0">
+                <a:solidFill>
+                  <a:srgbClr val="16191D"/>
                 </a:solidFill>
                 <a:latin typeface="Yu Gothic" pitchFamily="34" charset="0"/>
                 <a:ea typeface="Yu Gothic" pitchFamily="34" charset="-122"/>
                 <a:cs typeface="Yu Gothic" pitchFamily="34" charset="-120"/>
               </a:rPr>
-              <a:t>1つの命令で複数のデータに同じ演算をする。画像・音声・行列演算で効く</a:t>
-            </a:r>
-            <a:endParaRPr lang="en-US" sz="1200" dirty="0"/>
-          </a:p>
-        </p:txBody>
-      </p:sp>
-      <p:sp>
-        <p:nvSpPr>
-          <p:cNvPr id="11" name="Shape 9"/>
-          <p:cNvSpPr/>
-          <p:nvPr/>
-        </p:nvSpPr>
-        <p:spPr>
-          <a:xfrm>
-            <a:off x="685800" y="3054096"/>
-            <a:ext cx="5280660" cy="1371600"/>
-          </a:xfrm>
-          <a:prstGeom prst="roundRect">
-            <a:avLst>
-              <a:gd name="adj" fmla="val 4000"/>
-            </a:avLst>
-          </a:prstGeom>
-          <a:solidFill>
-            <a:srgbClr val="EEF1F5"/>
-          </a:solidFill>
-          <a:ln w="12700">
-            <a:solidFill>
-              <a:srgbClr val="DDE4EC"/>
-            </a:solidFill>
-            <a:prstDash val="solid"/>
-          </a:ln>
-        </p:spPr>
-      </p:sp>
-      <p:sp>
-        <p:nvSpPr>
-          <p:cNvPr id="12" name="Text 10"/>
-          <p:cNvSpPr/>
-          <p:nvPr/>
-        </p:nvSpPr>
-        <p:spPr>
-          <a:xfrm>
-            <a:off x="868680" y="3191256"/>
-            <a:ext cx="4914900" cy="310896"/>
+              <a:t>外れる</a:t>
+            </a:r>
+            <a:endParaRPr lang="en-US" sz="1500" dirty="0"/>
+          </a:p>
+        </p:txBody>
+      </p:sp>
+      <p:sp>
+        <p:nvSpPr>
+          <p:cNvPr id="12" name="Shape 10"/>
+          <p:cNvSpPr/>
+          <p:nvPr/>
+        </p:nvSpPr>
+        <p:spPr>
+          <a:xfrm>
+            <a:off x="5943600" y="3840480"/>
+            <a:ext cx="640080" cy="201168"/>
+          </a:xfrm>
+          <a:prstGeom prst="rightArrow">
+            <a:avLst/>
+          </a:prstGeom>
+          <a:solidFill>
+            <a:srgbClr val="0B5CAD"/>
+          </a:solidFill>
+          <a:ln/>
+        </p:spPr>
+      </p:sp>
+      <p:sp>
+        <p:nvSpPr>
+          <p:cNvPr id="13" name="Text 11"/>
+          <p:cNvSpPr/>
+          <p:nvPr/>
+        </p:nvSpPr>
+        <p:spPr>
+          <a:xfrm>
+            <a:off x="6766560" y="3712464"/>
+            <a:ext cx="4206240" cy="457200"/>
           </a:xfrm>
           <a:prstGeom prst="rect">
             <a:avLst/>
@@ -8697,30 +8986,30 @@
               <a:buNone/>
             </a:pPr>
             <a:r>
-              <a:rPr lang="en-US" sz="1400" b="1" dirty="0">
-                <a:solidFill>
-                  <a:srgbClr val="16191D"/>
+              <a:rPr lang="en-US" sz="1600" b="1" dirty="0">
+                <a:solidFill>
+                  <a:srgbClr val="0B5CAD"/>
                 </a:solidFill>
                 <a:latin typeface="Yu Gothic" pitchFamily="34" charset="0"/>
                 <a:ea typeface="Yu Gothic" pitchFamily="34" charset="-122"/>
                 <a:cs typeface="Yu Gothic" pitchFamily="34" charset="-120"/>
               </a:rPr>
-              <a:t>GPU</a:t>
-            </a:r>
-            <a:endParaRPr lang="en-US" sz="1400" dirty="0"/>
-          </a:p>
-        </p:txBody>
-      </p:sp>
-      <p:sp>
-        <p:nvSpPr>
-          <p:cNvPr id="13" name="Text 11"/>
-          <p:cNvSpPr/>
-          <p:nvPr/>
-        </p:nvSpPr>
-        <p:spPr>
-          <a:xfrm>
-            <a:off x="868680" y="3538728"/>
-            <a:ext cx="4914900" cy="731520"/>
+              <a:t>80 ns</a:t>
+            </a:r>
+            <a:endParaRPr lang="en-US" sz="1600" dirty="0"/>
+          </a:p>
+        </p:txBody>
+      </p:sp>
+      <p:sp>
+        <p:nvSpPr>
+          <p:cNvPr id="14" name="Text 12"/>
+          <p:cNvSpPr/>
+          <p:nvPr/>
+        </p:nvSpPr>
+        <p:spPr>
+          <a:xfrm>
+            <a:off x="685800" y="4425696"/>
+            <a:ext cx="10789920" cy="457200"/>
           </a:xfrm>
           <a:prstGeom prst="rect">
             <a:avLst/>
@@ -8729,17 +9018,17 @@
           <a:ln/>
         </p:spPr>
         <p:txBody>
-          <a:bodyPr wrap="square" lIns="0" tIns="0" rIns="0" bIns="0" rtlCol="0" anchor="t"/>
+          <a:bodyPr wrap="square" lIns="0" tIns="0" rIns="0" bIns="0" rtlCol="0" anchor="ctr"/>
           <a:lstStyle/>
           <a:p>
             <a:pPr indent="0" marL="0">
               <a:lnSpc>
-                <a:spcPts val="1600"/>
+                <a:spcPts val="2000"/>
               </a:lnSpc>
               <a:buNone/>
             </a:pPr>
             <a:r>
-              <a:rPr lang="en-US" sz="1200" dirty="0">
+              <a:rPr lang="en-US" sz="1300" dirty="0">
                 <a:solidFill>
                   <a:srgbClr val="5F6672"/>
                 </a:solidFill>
@@ -8747,129 +9036,41 @@
                 <a:ea typeface="Yu Gothic" pitchFamily="34" charset="-122"/>
                 <a:cs typeface="Yu Gothic" pitchFamily="34" charset="-120"/>
               </a:rPr>
-              <a:t>SIMD を極端に推し進めたもの。単純なコアを数千〜数万。深層学習が使うのはこのため</a:t>
-            </a:r>
-            <a:endParaRPr lang="en-US" sz="1200" dirty="0"/>
-          </a:p>
-        </p:txBody>
-      </p:sp>
-      <p:sp>
-        <p:nvSpPr>
-          <p:cNvPr id="14" name="Shape 12"/>
-          <p:cNvSpPr/>
-          <p:nvPr/>
-        </p:nvSpPr>
-        <p:spPr>
-          <a:xfrm>
-            <a:off x="6195060" y="3054096"/>
-            <a:ext cx="5280660" cy="1371600"/>
-          </a:xfrm>
-          <a:prstGeom prst="roundRect">
-            <a:avLst>
-              <a:gd name="adj" fmla="val 4000"/>
-            </a:avLst>
-          </a:prstGeom>
-          <a:solidFill>
-            <a:srgbClr val="EEF1F5"/>
-          </a:solidFill>
-          <a:ln w="12700">
-            <a:solidFill>
-              <a:srgbClr val="DDE4EC"/>
-            </a:solidFill>
-            <a:prstDash val="solid"/>
-          </a:ln>
-        </p:spPr>
-      </p:sp>
-      <p:sp>
-        <p:nvSpPr>
-          <p:cNvPr id="15" name="Text 13"/>
-          <p:cNvSpPr/>
-          <p:nvPr/>
-        </p:nvSpPr>
-        <p:spPr>
-          <a:xfrm>
-            <a:off x="6377940" y="3191256"/>
-            <a:ext cx="4914900" cy="310896"/>
-          </a:xfrm>
-          <a:prstGeom prst="rect">
-            <a:avLst/>
-          </a:prstGeom>
-          <a:noFill/>
-          <a:ln/>
-        </p:spPr>
-        <p:txBody>
-          <a:bodyPr wrap="square" lIns="0" tIns="0" rIns="0" bIns="0" rtlCol="0" anchor="ctr"/>
-          <a:lstStyle/>
+              <a:t>5.2 で見たとおり、当たるか外れるかでアクセス時間は桁で違う。ということは —— アクセス時間を測れば、</a:t>
+            </a:r>
+            <a:endParaRPr lang="en-US" sz="1300" dirty="0"/>
+          </a:p>
           <a:p>
             <a:pPr indent="0" marL="0">
-              <a:buNone/>
-            </a:pPr>
-            <a:r>
-              <a:rPr lang="en-US" sz="1400" b="1" dirty="0">
-                <a:solidFill>
-                  <a:srgbClr val="16191D"/>
+              <a:lnSpc>
+                <a:spcPts val="2000"/>
+              </a:lnSpc>
+              <a:buNone/>
+            </a:pPr>
+            <a:r>
+              <a:rPr lang="en-US" sz="1300" dirty="0">
+                <a:solidFill>
+                  <a:srgbClr val="5F6672"/>
                 </a:solidFill>
                 <a:latin typeface="Yu Gothic" pitchFamily="34" charset="0"/>
                 <a:ea typeface="Yu Gothic" pitchFamily="34" charset="-122"/>
                 <a:cs typeface="Yu Gothic" pitchFamily="34" charset="-120"/>
               </a:rPr>
-              <a:t>マルチコア</a:t>
-            </a:r>
-            <a:endParaRPr lang="en-US" sz="1400" dirty="0"/>
-          </a:p>
-        </p:txBody>
-      </p:sp>
-      <p:sp>
-        <p:nvSpPr>
-          <p:cNvPr id="16" name="Text 14"/>
-          <p:cNvSpPr/>
-          <p:nvPr/>
-        </p:nvSpPr>
-        <p:spPr>
-          <a:xfrm>
-            <a:off x="6377940" y="3538728"/>
-            <a:ext cx="4914900" cy="731520"/>
-          </a:xfrm>
-          <a:prstGeom prst="rect">
-            <a:avLst/>
-          </a:prstGeom>
-          <a:noFill/>
-          <a:ln/>
-        </p:spPr>
-        <p:txBody>
-          <a:bodyPr wrap="square" lIns="0" tIns="0" rIns="0" bIns="0" rtlCol="0" anchor="t"/>
-          <a:lstStyle/>
-          <a:p>
-            <a:pPr indent="0" marL="0">
-              <a:lnSpc>
-                <a:spcPts val="1600"/>
-              </a:lnSpc>
-              <a:buNone/>
-            </a:pPr>
-            <a:r>
-              <a:rPr lang="en-US" sz="1200" dirty="0">
-                <a:solidFill>
-                  <a:srgbClr val="5F6672"/>
-                </a:solidFill>
-                <a:latin typeface="Yu Gothic" pitchFamily="34" charset="0"/>
-                <a:ea typeface="Yu Gothic" pitchFamily="34" charset="-122"/>
-                <a:cs typeface="Yu Gothic" pitchFamily="34" charset="-120"/>
-              </a:rPr>
-              <a:t>別々のスレッドを同時に実行する。ハードウェア任せにできず、プログラム側の対応が要る</a:t>
-            </a:r>
-            <a:endParaRPr lang="en-US" sz="1200" dirty="0"/>
-          </a:p>
-        </p:txBody>
-      </p:sp>
-      <p:sp>
-        <p:nvSpPr>
-          <p:cNvPr id="17" name="Text 15"/>
-          <p:cNvSpPr/>
-          <p:nvPr/>
-        </p:nvSpPr>
-        <p:spPr>
-          <a:xfrm>
-            <a:off x="685800" y="5029200"/>
+              <a:t>そのデータがキャッシュにあったかどうかが分かる。計算の結果ではなく、副作用から情報を取る。</a:t>
+            </a:r>
+            <a:endParaRPr lang="en-US" sz="1300" dirty="0"/>
+          </a:p>
+        </p:txBody>
+      </p:sp>
+      <p:sp>
+        <p:nvSpPr>
+          <p:cNvPr id="15" name="Text 13"/>
+          <p:cNvSpPr/>
+          <p:nvPr/>
+        </p:nvSpPr>
+        <p:spPr>
+          <a:xfrm>
+            <a:off x="685800" y="5852160"/>
             <a:ext cx="10789920" cy="512064"/>
           </a:xfrm>
           <a:prstGeom prst="rect">
@@ -8897,7 +9098,7 @@
                 <a:ea typeface="Yu Gothic" pitchFamily="34" charset="-122"/>
                 <a:cs typeface="Yu Gothic" pitchFamily="34" charset="-120"/>
               </a:rPr>
-              <a:t>(1)〜(3) はハードウェアが勝手にやってくれる。マルチコアだけは、1スレッドのプログラムだとコアが100個あっても1個しか使わない。</a:t>
+              <a:t>これをサイドチャネル攻撃という。2018年に公表された Spectre / Meltdown は、ここを突いた。</a:t>
             </a:r>
             <a:endParaRPr lang="en-US" sz="1300" dirty="0"/>
           </a:p>
@@ -8968,7 +9169,7 @@
                 <a:ea typeface="Yu Gothic" pitchFamily="34" charset="-122"/>
                 <a:cs typeface="Yu Gothic" pitchFamily="34" charset="-120"/>
               </a:rPr>
-              <a:t>5.4　並列性</a:t>
+              <a:t>5.4　投機実行</a:t>
             </a:r>
             <a:endParaRPr lang="en-US" sz="1200" dirty="0"/>
           </a:p>
@@ -9007,7 +9208,7 @@
                 <a:ea typeface="Yu Gothic" pitchFamily="34" charset="-122"/>
                 <a:cs typeface="Yu Gothic" pitchFamily="34" charset="-120"/>
               </a:rPr>
-              <a:t>アムダールの法則</a:t>
+              <a:t>Spectre の骨格</a:t>
             </a:r>
             <a:endParaRPr lang="en-US" sz="3000" dirty="0"/>
           </a:p>
@@ -9088,46 +9289,49 @@
                 <a:ea typeface="Yu Gothic" pitchFamily="34" charset="-122"/>
                 <a:cs typeface="Yu Gothic" pitchFamily="34" charset="-120"/>
               </a:rPr>
-              <a:t>並列化できる割合を p、コア数を n とすると、高速化率は S = 1 / ((1 − p) + p/n)。</a:t>
+              <a:t>境界検査を、分岐予測に飛び越えさせる。範囲内の i で何度も呼び、「真」に予測が偏るよう訓練しておく。</a:t>
             </a:r>
             <a:endParaRPr lang="en-US" sz="1500" dirty="0"/>
           </a:p>
         </p:txBody>
       </p:sp>
-      <p:pic>
-        <p:nvPicPr>
-          <p:cNvPr id="6" name="Image 0" descr="/Users/koide/Documents/Playground/CompOutline/slides/png/fig-05-06.png">    </p:cNvPr>
-          <p:cNvPicPr>
-            <a:picLocks noChangeAspect="1"/>
-          </p:cNvPicPr>
-          <p:nvPr/>
-        </p:nvPicPr>
-        <p:blipFill>
-          <a:blip r:embed="rId1"/>
-          <a:stretch>
-            <a:fillRect/>
-          </a:stretch>
-        </p:blipFill>
-        <p:spPr>
-          <a:xfrm>
-            <a:off x="3018434" y="1883664"/>
-            <a:ext cx="6124651" cy="3602736"/>
-          </a:xfrm>
-          <a:prstGeom prst="rect">
-            <a:avLst/>
-          </a:prstGeom>
-        </p:spPr>
-      </p:pic>
-      <p:sp>
-        <p:nvSpPr>
-          <p:cNvPr id="7" name="Text 4"/>
-          <p:cNvSpPr/>
-          <p:nvPr/>
-        </p:nvSpPr>
-        <p:spPr>
-          <a:xfrm>
-            <a:off x="685800" y="5687568"/>
-            <a:ext cx="10789920" cy="365760"/>
+      <p:sp>
+        <p:nvSpPr>
+          <p:cNvPr id="6" name="Shape 4"/>
+          <p:cNvSpPr/>
+          <p:nvPr/>
+        </p:nvSpPr>
+        <p:spPr>
+          <a:xfrm>
+            <a:off x="685800" y="1883664"/>
+            <a:ext cx="10789920" cy="3017520"/>
+          </a:xfrm>
+          <a:prstGeom prst="roundRect">
+            <a:avLst>
+              <a:gd name="adj" fmla="val 1212"/>
+            </a:avLst>
+          </a:prstGeom>
+          <a:solidFill>
+            <a:srgbClr val="F5F7FA"/>
+          </a:solidFill>
+          <a:ln w="12700">
+            <a:solidFill>
+              <a:srgbClr val="DDE4EC"/>
+            </a:solidFill>
+            <a:prstDash val="solid"/>
+          </a:ln>
+        </p:spPr>
+      </p:sp>
+      <p:sp>
+        <p:nvSpPr>
+          <p:cNvPr id="7" name="Text 5"/>
+          <p:cNvSpPr/>
+          <p:nvPr/>
+        </p:nvSpPr>
+        <p:spPr>
+          <a:xfrm>
+            <a:off x="886968" y="2029968"/>
+            <a:ext cx="10387584" cy="2724912"/>
           </a:xfrm>
           <a:prstGeom prst="rect">
             <a:avLst/>
@@ -9136,24 +9340,289 @@
           <a:ln/>
         </p:spPr>
         <p:txBody>
+          <a:bodyPr wrap="square" lIns="0" tIns="0" rIns="0" bIns="0" rtlCol="0" anchor="t"/>
+          <a:lstStyle/>
+          <a:p>
+            <a:pPr indent="0" marL="0">
+              <a:lnSpc>
+                <a:spcPts val="1725"/>
+              </a:lnSpc>
+              <a:buNone/>
+            </a:pPr>
+            <a:r>
+              <a:rPr lang="en-US" sz="1150" dirty="0">
+                <a:solidFill>
+                  <a:srgbClr val="16191D"/>
+                </a:solidFill>
+                <a:latin typeface="Courier New" pitchFamily="34" charset="0"/>
+                <a:ea typeface="Courier New" pitchFamily="34" charset="-122"/>
+                <a:cs typeface="Courier New" pitchFamily="34" charset="-120"/>
+              </a:rPr>
+              <a:t>if (i &lt; array1_size)              /* 予測は「真」に偏っている */</a:t>
+            </a:r>
+            <a:endParaRPr lang="en-US" sz="1150" dirty="0"/>
+          </a:p>
+          <a:p>
+            <a:pPr indent="0" marL="0">
+              <a:lnSpc>
+                <a:spcPts val="1725"/>
+              </a:lnSpc>
+              <a:buNone/>
+            </a:pPr>
+            <a:r>
+              <a:rPr lang="en-US" sz="1150" dirty="0">
+                <a:solidFill>
+                  <a:srgbClr val="16191D"/>
+                </a:solidFill>
+                <a:latin typeface="Courier New" pitchFamily="34" charset="0"/>
+                <a:ea typeface="Courier New" pitchFamily="34" charset="-122"/>
+                <a:cs typeface="Courier New" pitchFamily="34" charset="-120"/>
+              </a:rPr>
+              <a:t>    y = array2[array1[i] * 512];  /* 検査を待たずに実行される  */</a:t>
+            </a:r>
+            <a:endParaRPr lang="en-US" sz="1150" dirty="0"/>
+          </a:p>
+          <a:p>
+            <a:pPr indent="0" marL="0">
+              <a:lnSpc>
+                <a:spcPts val="1725"/>
+              </a:lnSpc>
+              <a:buNone/>
+            </a:pPr>
+            <a:endParaRPr lang="en-US" sz="1150" dirty="0"/>
+          </a:p>
+          <a:p>
+            <a:pPr indent="0" marL="0">
+              <a:lnSpc>
+                <a:spcPts val="1725"/>
+              </a:lnSpc>
+              <a:buNone/>
+            </a:pPr>
+            <a:r>
+              <a:rPr lang="en-US" sz="1150" dirty="0">
+                <a:solidFill>
+                  <a:srgbClr val="16191D"/>
+                </a:solidFill>
+                <a:latin typeface="Courier New" pitchFamily="34" charset="0"/>
+                <a:ea typeface="Courier New" pitchFamily="34" charset="-122"/>
+                <a:cs typeface="Courier New" pitchFamily="34" charset="-120"/>
+              </a:rPr>
+              <a:t>  ここで範囲外の i を渡すと</a:t>
+            </a:r>
+            <a:endParaRPr lang="en-US" sz="1150" dirty="0"/>
+          </a:p>
+          <a:p>
+            <a:pPr indent="0" marL="0">
+              <a:lnSpc>
+                <a:spcPts val="1725"/>
+              </a:lnSpc>
+              <a:buNone/>
+            </a:pPr>
+            <a:endParaRPr lang="en-US" sz="1150" dirty="0"/>
+          </a:p>
+          <a:p>
+            <a:pPr indent="0" marL="0">
+              <a:lnSpc>
+                <a:spcPts val="1725"/>
+              </a:lnSpc>
+              <a:buNone/>
+            </a:pPr>
+            <a:r>
+              <a:rPr lang="en-US" sz="1150" dirty="0">
+                <a:solidFill>
+                  <a:srgbClr val="16191D"/>
+                </a:solidFill>
+                <a:latin typeface="Courier New" pitchFamily="34" charset="0"/>
+                <a:ea typeface="Courier New" pitchFamily="34" charset="-122"/>
+                <a:cs typeface="Courier New" pitchFamily="34" charset="-120"/>
+              </a:rPr>
+              <a:t>  1. 検査の結果を待たず、array1[i]（読めないはずの値）を読む</a:t>
+            </a:r>
+            <a:endParaRPr lang="en-US" sz="1150" dirty="0"/>
+          </a:p>
+          <a:p>
+            <a:pPr indent="0" marL="0">
+              <a:lnSpc>
+                <a:spcPts val="1725"/>
+              </a:lnSpc>
+              <a:buNone/>
+            </a:pPr>
+            <a:r>
+              <a:rPr lang="en-US" sz="1150" dirty="0">
+                <a:solidFill>
+                  <a:srgbClr val="16191D"/>
+                </a:solidFill>
+                <a:latin typeface="Courier New" pitchFamily="34" charset="0"/>
+                <a:ea typeface="Courier New" pitchFamily="34" charset="-122"/>
+                <a:cs typeface="Courier New" pitchFamily="34" charset="-120"/>
+              </a:rPr>
+              <a:t>  2. その値でアドレスを作り、array2 を読む</a:t>
+            </a:r>
+            <a:endParaRPr lang="en-US" sz="1150" dirty="0"/>
+          </a:p>
+          <a:p>
+            <a:pPr indent="0" marL="0">
+              <a:lnSpc>
+                <a:spcPts val="1725"/>
+              </a:lnSpc>
+              <a:buNone/>
+            </a:pPr>
+            <a:r>
+              <a:rPr lang="en-US" sz="1150" dirty="0">
+                <a:solidFill>
+                  <a:srgbClr val="16191D"/>
+                </a:solidFill>
+                <a:latin typeface="Courier New" pitchFamily="34" charset="0"/>
+                <a:ea typeface="Courier New" pitchFamily="34" charset="-122"/>
+                <a:cs typeface="Courier New" pitchFamily="34" charset="-120"/>
+              </a:rPr>
+              <a:t>  3. 予測が外れたと判明。結果は取り消される</a:t>
+            </a:r>
+            <a:endParaRPr lang="en-US" sz="1150" dirty="0"/>
+          </a:p>
+          <a:p>
+            <a:pPr indent="0" marL="0">
+              <a:lnSpc>
+                <a:spcPts val="1725"/>
+              </a:lnSpc>
+              <a:buNone/>
+            </a:pPr>
+            <a:r>
+              <a:rPr lang="en-US" sz="1150" dirty="0">
+                <a:solidFill>
+                  <a:srgbClr val="16191D"/>
+                </a:solidFill>
+                <a:latin typeface="Courier New" pitchFamily="34" charset="0"/>
+                <a:ea typeface="Courier New" pitchFamily="34" charset="-122"/>
+                <a:cs typeface="Courier New" pitchFamily="34" charset="-120"/>
+              </a:rPr>
+              <a:t>  4. しかし array2 のその位置だけがキャッシュに残る</a:t>
+            </a:r>
+            <a:endParaRPr lang="en-US" sz="1150" dirty="0"/>
+          </a:p>
+          <a:p>
+            <a:pPr indent="0" marL="0">
+              <a:lnSpc>
+                <a:spcPts val="1725"/>
+              </a:lnSpc>
+              <a:buNone/>
+            </a:pPr>
+            <a:r>
+              <a:rPr lang="en-US" sz="1150" dirty="0">
+                <a:solidFill>
+                  <a:srgbClr val="16191D"/>
+                </a:solidFill>
+                <a:latin typeface="Courier New" pitchFamily="34" charset="0"/>
+                <a:ea typeface="Courier New" pitchFamily="34" charset="-122"/>
+                <a:cs typeface="Courier New" pitchFamily="34" charset="-120"/>
+              </a:rPr>
+              <a:t>  5. array2 を順に読んで時間を測れば、載った位置＝秘密の値</a:t>
+            </a:r>
+            <a:endParaRPr lang="en-US" sz="1150" dirty="0"/>
+          </a:p>
+        </p:txBody>
+      </p:sp>
+      <p:sp>
+        <p:nvSpPr>
+          <p:cNvPr id="8" name="Text 6"/>
+          <p:cNvSpPr/>
+          <p:nvPr/>
+        </p:nvSpPr>
+        <p:spPr>
+          <a:xfrm>
+            <a:off x="685800" y="5175504"/>
+            <a:ext cx="10789920" cy="457200"/>
+          </a:xfrm>
+          <a:prstGeom prst="rect">
+            <a:avLst/>
+          </a:prstGeom>
+          <a:noFill/>
+          <a:ln/>
+        </p:spPr>
+        <p:txBody>
           <a:bodyPr wrap="square" lIns="0" tIns="0" rIns="0" bIns="0" rtlCol="0" anchor="ctr"/>
           <a:lstStyle/>
           <a:p>
-            <a:pPr algn="ctr" indent="0" marL="0">
-              <a:buNone/>
-            </a:pPr>
-            <a:r>
-              <a:rPr lang="en-US" sz="1500" dirty="0">
-                <a:solidFill>
-                  <a:srgbClr val="16191D"/>
+            <a:pPr indent="0" marL="0">
+              <a:lnSpc>
+                <a:spcPts val="2000"/>
+              </a:lnSpc>
+              <a:buNone/>
+            </a:pPr>
+            <a:r>
+              <a:rPr lang="en-US" sz="1300" dirty="0">
+                <a:solidFill>
+                  <a:srgbClr val="5F6672"/>
                 </a:solidFill>
                 <a:latin typeface="Yu Gothic" pitchFamily="34" charset="0"/>
                 <a:ea typeface="Yu Gothic" pitchFamily="34" charset="-122"/>
                 <a:cs typeface="Yu Gothic" pitchFamily="34" charset="-120"/>
               </a:rPr>
-              <a:t>n を無限に大きくしても、S は 1/(1−p) を超えない。</a:t>
-            </a:r>
-            <a:endParaRPr lang="en-US" sz="1500" dirty="0"/>
+              <a:t>Meltdown はもう一段深い。Spectre が同一プロセス内の境界検査を飛び越えるのに対し、</a:t>
+            </a:r>
+            <a:endParaRPr lang="en-US" sz="1300" dirty="0"/>
+          </a:p>
+          <a:p>
+            <a:pPr indent="0" marL="0">
+              <a:lnSpc>
+                <a:spcPts val="2000"/>
+              </a:lnSpc>
+              <a:buNone/>
+            </a:pPr>
+            <a:r>
+              <a:rPr lang="en-US" sz="1300" dirty="0">
+                <a:solidFill>
+                  <a:srgbClr val="5F6672"/>
+                </a:solidFill>
+                <a:latin typeface="Yu Gothic" pitchFamily="34" charset="0"/>
+                <a:ea typeface="Yu Gothic" pitchFamily="34" charset="-122"/>
+                <a:cs typeface="Yu Gothic" pitchFamily="34" charset="-120"/>
+              </a:rPr>
+              <a:t>Meltdown は特権の境界を越えてカーネルのメモリを読む。影響が大きく、OS 側の対策が要った。</a:t>
+            </a:r>
+            <a:endParaRPr lang="en-US" sz="1300" dirty="0"/>
+          </a:p>
+        </p:txBody>
+      </p:sp>
+      <p:sp>
+        <p:nvSpPr>
+          <p:cNvPr id="9" name="Text 7"/>
+          <p:cNvSpPr/>
+          <p:nvPr/>
+        </p:nvSpPr>
+        <p:spPr>
+          <a:xfrm>
+            <a:off x="685800" y="5943600"/>
+            <a:ext cx="10789920" cy="512064"/>
+          </a:xfrm>
+          <a:prstGeom prst="rect">
+            <a:avLst/>
+          </a:prstGeom>
+          <a:noFill/>
+          <a:ln/>
+        </p:spPr>
+        <p:txBody>
+          <a:bodyPr wrap="square" lIns="0" tIns="0" rIns="0" bIns="0" rtlCol="0" anchor="ctr"/>
+          <a:lstStyle/>
+          <a:p>
+            <a:pPr indent="0" marL="0">
+              <a:lnSpc>
+                <a:spcPts val="1900"/>
+              </a:lnSpc>
+              <a:buNone/>
+            </a:pPr>
+            <a:r>
+              <a:rPr lang="en-US" sz="1300" b="1" dirty="0">
+                <a:solidFill>
+                  <a:srgbClr val="0B5CAD"/>
+                </a:solidFill>
+                <a:latin typeface="Yu Gothic" pitchFamily="34" charset="0"/>
+                <a:ea typeface="Yu Gothic" pitchFamily="34" charset="-122"/>
+                <a:cs typeface="Yu Gothic" pitchFamily="34" charset="-120"/>
+              </a:rPr>
+              <a:t>手口は Flush+Reload —— 追い出す → 被害者を動かす → もう一度読んで時間を測る。速ければ触った。</a:t>
+            </a:r>
+            <a:endParaRPr lang="en-US" sz="1300" dirty="0"/>
           </a:p>
         </p:txBody>
       </p:sp>
@@ -9222,7 +9691,7 @@
                 <a:ea typeface="Yu Gothic" pitchFamily="34" charset="-122"/>
                 <a:cs typeface="Yu Gothic" pitchFamily="34" charset="-120"/>
               </a:rPr>
-              <a:t>5.4　並列性</a:t>
+              <a:t>5.4　投機実行</a:t>
             </a:r>
             <a:endParaRPr lang="en-US" sz="1200" dirty="0"/>
           </a:p>
@@ -9261,7 +9730,7 @@
                 <a:ea typeface="Yu Gothic" pitchFamily="34" charset="-122"/>
                 <a:cs typeface="Yu Gothic" pitchFamily="34" charset="-120"/>
               </a:rPr>
-              <a:t>並列プログラムが難しい理由</a:t>
+              <a:t>なぜ直しにくいのか</a:t>
             </a:r>
             <a:endParaRPr lang="en-US" sz="3000" dirty="0"/>
           </a:p>
@@ -9314,8 +9783,8 @@
         </p:nvSpPr>
         <p:spPr>
           <a:xfrm>
-            <a:off x="822960" y="1481328"/>
-            <a:ext cx="10515600" cy="3090672"/>
+            <a:off x="685800" y="1481328"/>
+            <a:ext cx="10789920" cy="365760"/>
           </a:xfrm>
           <a:prstGeom prst="rect">
             <a:avLst/>
@@ -9324,18 +9793,17 @@
           <a:ln/>
         </p:spPr>
         <p:txBody>
-          <a:bodyPr wrap="square" lIns="0" tIns="0" rIns="0" bIns="0" rtlCol="0" anchor="t"/>
-          <a:lstStyle/>
-          <a:p>
-            <a:pPr marL="342900" indent="-342900">
-              <a:spcAft>
-                <a:spcPts val="1000"/>
-              </a:spcAft>
-              <a:buSzPct val="100000"/>
-              <a:buChar char="•"/>
-            </a:pPr>
-            <a:r>
-              <a:rPr lang="en-US" sz="1600" dirty="0">
+          <a:bodyPr wrap="square" lIns="0" tIns="0" rIns="0" bIns="0" rtlCol="0" anchor="ctr"/>
+          <a:lstStyle/>
+          <a:p>
+            <a:pPr indent="0" marL="0">
+              <a:lnSpc>
+                <a:spcPts val="2200"/>
+              </a:lnSpc>
+              <a:buNone/>
+            </a:pPr>
+            <a:r>
+              <a:rPr lang="en-US" sz="1500" dirty="0">
                 <a:solidFill>
                   <a:srgbClr val="16191D"/>
                 </a:solidFill>
@@ -9343,133 +9811,717 @@
                 <a:ea typeface="Yu Gothic" pitchFamily="34" charset="-122"/>
                 <a:cs typeface="Yu Gothic" pitchFamily="34" charset="-120"/>
               </a:rPr>
-              <a:t>依存関係 — どの計算がどの計算の結果を必要とするか</a:t>
-            </a:r>
-            <a:endParaRPr lang="en-US" sz="1600" dirty="0"/>
-          </a:p>
-          <a:p>
-            <a:pPr marL="342900" indent="-342900">
-              <a:spcAft>
-                <a:spcPts val="1000"/>
-              </a:spcAft>
-              <a:buSzPct val="100000"/>
-              <a:buChar char="•"/>
-            </a:pPr>
-            <a:r>
-              <a:rPr lang="en-US" sz="1600" dirty="0">
-                <a:solidFill>
-                  <a:srgbClr val="16191D"/>
+              <a:t>これは実装のバグではない。投機実行は性能のための設計そのもので、止めれば大きく遅くなる。</a:t>
+            </a:r>
+            <a:endParaRPr lang="en-US" sz="1500" dirty="0"/>
+          </a:p>
+        </p:txBody>
+      </p:sp>
+      <p:graphicFrame>
+        <p:nvGraphicFramePr>
+          <p:cNvPr id="20" name="Table 0"/>
+          <p:cNvGraphicFramePr>
+            <a:graphicFrameLocks noGrp="1"/>
+          </p:cNvGraphicFramePr>
+          <p:nvPr>
+            <p:extLst>
+              <p:ext uri="{D42A27DB-BD31-4B8C-83A1-F6EECF244321}">
+                <p14:modId xmlns:p14="http://schemas.microsoft.com/office/powerpoint/2010/main" val="1579011935"/>
+              </p:ext>
+            </p:extLst>
+          </p:nvPr>
+        </p:nvGraphicFramePr>
+        <p:xfrm>
+          <a:off x="685800" y="1883664"/>
+          <a:ext cx="10789920" cy="914400"/>
+        </p:xfrm>
+        <a:graphic>
+          <a:graphicData uri="http://schemas.openxmlformats.org/drawingml/2006/table">
+            <a:tbl>
+              <a:tblPr/>
+              <a:tblGrid>
+                <a:gridCol w="5669280"/>
+                <a:gridCol w="5120640"/>
+              </a:tblGrid>
+              <a:tr h="402336">
+                <a:tc>
+                  <a:txBody>
+                    <a:bodyPr/>
+                    <a:lstStyle/>
+                    <a:p>
+                      <a:pPr algn="l" indent="0" marL="0">
+                        <a:buNone/>
+                      </a:pPr>
+                      <a:r>
+                        <a:rPr lang="en-US" sz="1300" b="1" dirty="0">
+                          <a:solidFill>
+                            <a:srgbClr val="000000"/>
+                          </a:solidFill>
+                          <a:latin typeface="Yu Gothic" pitchFamily="34" charset="0"/>
+                          <a:ea typeface="Yu Gothic" pitchFamily="34" charset="-122"/>
+                          <a:cs typeface="Yu Gothic" pitchFamily="34" charset="-120"/>
+                        </a:rPr>
+                        <a:t>対策</a:t>
+                      </a:r>
+                      <a:endParaRPr lang="en-US" sz="1300" dirty="0">
+                        <a:latin typeface="Yu Gothic" charset="0"/>
+                        <a:ea typeface="Yu Gothic" charset="0"/>
+                        <a:cs typeface="Yu Gothic" charset="0"/>
+                      </a:endParaRPr>
+                    </a:p>
+                  </a:txBody>
+                  <a:tcPr marL="91440" marR="91440" marT="45720" marB="45720" anchor="ctr">
+                    <a:lnL w="12700" cap="flat" cmpd="sng" algn="ctr">
+                      <a:solidFill>
+                        <a:srgbClr val="DDE4EC"/>
+                      </a:solidFill>
+                      <a:prstDash val="solid"/>
+                      <a:round/>
+                      <a:headEnd type="none" w="med" len="med"/>
+                      <a:tailEnd type="none" w="med" len="med"/>
+                    </a:lnL>
+                    <a:lnR w="12700" cap="flat" cmpd="sng" algn="ctr">
+                      <a:solidFill>
+                        <a:srgbClr val="DDE4EC"/>
+                      </a:solidFill>
+                      <a:prstDash val="solid"/>
+                      <a:round/>
+                      <a:headEnd type="none" w="med" len="med"/>
+                      <a:tailEnd type="none" w="med" len="med"/>
+                    </a:lnR>
+                    <a:lnT w="12700" cap="flat" cmpd="sng" algn="ctr">
+                      <a:solidFill>
+                        <a:srgbClr val="DDE4EC"/>
+                      </a:solidFill>
+                      <a:prstDash val="solid"/>
+                      <a:round/>
+                      <a:headEnd type="none" w="med" len="med"/>
+                      <a:tailEnd type="none" w="med" len="med"/>
+                    </a:lnT>
+                    <a:lnB w="12700" cap="flat" cmpd="sng" algn="ctr">
+                      <a:solidFill>
+                        <a:srgbClr val="DDE4EC"/>
+                      </a:solidFill>
+                      <a:prstDash val="solid"/>
+                      <a:round/>
+                      <a:headEnd type="none" w="med" len="med"/>
+                      <a:tailEnd type="none" w="med" len="med"/>
+                    </a:lnB>
+                    <a:solidFill>
+                      <a:srgbClr val="EEF1F5"/>
+                    </a:solidFill>
+                  </a:tcPr>
+                </a:tc>
+                <a:tc>
+                  <a:txBody>
+                    <a:bodyPr/>
+                    <a:lstStyle/>
+                    <a:p>
+                      <a:pPr algn="l" indent="0" marL="0">
+                        <a:buNone/>
+                      </a:pPr>
+                      <a:r>
+                        <a:rPr lang="en-US" sz="1300" b="1" dirty="0">
+                          <a:solidFill>
+                            <a:srgbClr val="000000"/>
+                          </a:solidFill>
+                          <a:latin typeface="Yu Gothic" pitchFamily="34" charset="0"/>
+                          <a:ea typeface="Yu Gothic" pitchFamily="34" charset="-122"/>
+                          <a:cs typeface="Yu Gothic" pitchFamily="34" charset="-120"/>
+                        </a:rPr>
+                        <a:t>代償</a:t>
+                      </a:r>
+                      <a:endParaRPr lang="en-US" sz="1300" dirty="0">
+                        <a:latin typeface="Yu Gothic" charset="0"/>
+                        <a:ea typeface="Yu Gothic" charset="0"/>
+                        <a:cs typeface="Yu Gothic" charset="0"/>
+                      </a:endParaRPr>
+                    </a:p>
+                  </a:txBody>
+                  <a:tcPr marL="91440" marR="91440" marT="45720" marB="45720" anchor="ctr">
+                    <a:lnL w="12700" cap="flat" cmpd="sng" algn="ctr">
+                      <a:solidFill>
+                        <a:srgbClr val="DDE4EC"/>
+                      </a:solidFill>
+                      <a:prstDash val="solid"/>
+                      <a:round/>
+                      <a:headEnd type="none" w="med" len="med"/>
+                      <a:tailEnd type="none" w="med" len="med"/>
+                    </a:lnL>
+                    <a:lnR w="12700" cap="flat" cmpd="sng" algn="ctr">
+                      <a:solidFill>
+                        <a:srgbClr val="DDE4EC"/>
+                      </a:solidFill>
+                      <a:prstDash val="solid"/>
+                      <a:round/>
+                      <a:headEnd type="none" w="med" len="med"/>
+                      <a:tailEnd type="none" w="med" len="med"/>
+                    </a:lnR>
+                    <a:lnT w="12700" cap="flat" cmpd="sng" algn="ctr">
+                      <a:solidFill>
+                        <a:srgbClr val="DDE4EC"/>
+                      </a:solidFill>
+                      <a:prstDash val="solid"/>
+                      <a:round/>
+                      <a:headEnd type="none" w="med" len="med"/>
+                      <a:tailEnd type="none" w="med" len="med"/>
+                    </a:lnT>
+                    <a:lnB w="12700" cap="flat" cmpd="sng" algn="ctr">
+                      <a:solidFill>
+                        <a:srgbClr val="DDE4EC"/>
+                      </a:solidFill>
+                      <a:prstDash val="solid"/>
+                      <a:round/>
+                      <a:headEnd type="none" w="med" len="med"/>
+                      <a:tailEnd type="none" w="med" len="med"/>
+                    </a:lnB>
+                    <a:solidFill>
+                      <a:srgbClr val="EEF1F5"/>
+                    </a:solidFill>
+                  </a:tcPr>
+                </a:tc>
+              </a:tr>
+              <a:tr h="402336">
+                <a:tc>
+                  <a:txBody>
+                    <a:bodyPr/>
+                    <a:lstStyle/>
+                    <a:p>
+                      <a:pPr algn="l" indent="0" marL="0">
+                        <a:buNone/>
+                      </a:pPr>
+                      <a:r>
+                        <a:rPr lang="en-US" sz="1300" dirty="0">
+                          <a:solidFill>
+                            <a:srgbClr val="000000"/>
+                          </a:solidFill>
+                          <a:latin typeface="Yu Gothic" pitchFamily="34" charset="0"/>
+                          <a:ea typeface="Yu Gothic" pitchFamily="34" charset="-122"/>
+                          <a:cs typeface="Yu Gothic" pitchFamily="34" charset="-120"/>
+                        </a:rPr>
+                        <a:t>投機を抑える命令を要所に挟む</a:t>
+                      </a:r>
+                      <a:endParaRPr lang="en-US" sz="1300" dirty="0">
+                        <a:latin typeface="Yu Gothic" charset="0"/>
+                        <a:ea typeface="Yu Gothic" charset="0"/>
+                        <a:cs typeface="Yu Gothic" charset="0"/>
+                      </a:endParaRPr>
+                    </a:p>
+                  </a:txBody>
+                  <a:tcPr marL="91440" marR="91440" marT="45720" marB="45720" anchor="ctr">
+                    <a:lnL w="12700" cap="flat" cmpd="sng" algn="ctr">
+                      <a:solidFill>
+                        <a:srgbClr val="DDE4EC"/>
+                      </a:solidFill>
+                      <a:prstDash val="solid"/>
+                      <a:round/>
+                      <a:headEnd type="none" w="med" len="med"/>
+                      <a:tailEnd type="none" w="med" len="med"/>
+                    </a:lnL>
+                    <a:lnR w="12700" cap="flat" cmpd="sng" algn="ctr">
+                      <a:solidFill>
+                        <a:srgbClr val="DDE4EC"/>
+                      </a:solidFill>
+                      <a:prstDash val="solid"/>
+                      <a:round/>
+                      <a:headEnd type="none" w="med" len="med"/>
+                      <a:tailEnd type="none" w="med" len="med"/>
+                    </a:lnR>
+                    <a:lnT w="12700" cap="flat" cmpd="sng" algn="ctr">
+                      <a:solidFill>
+                        <a:srgbClr val="DDE4EC"/>
+                      </a:solidFill>
+                      <a:prstDash val="solid"/>
+                      <a:round/>
+                      <a:headEnd type="none" w="med" len="med"/>
+                      <a:tailEnd type="none" w="med" len="med"/>
+                    </a:lnT>
+                    <a:lnB w="12700" cap="flat" cmpd="sng" algn="ctr">
+                      <a:solidFill>
+                        <a:srgbClr val="DDE4EC"/>
+                      </a:solidFill>
+                      <a:prstDash val="solid"/>
+                      <a:round/>
+                      <a:headEnd type="none" w="med" len="med"/>
+                      <a:tailEnd type="none" w="med" len="med"/>
+                    </a:lnB>
+                    <a:solidFill>
+                      <a:srgbClr val="FFFFFF"/>
+                    </a:solidFill>
+                  </a:tcPr>
+                </a:tc>
+                <a:tc>
+                  <a:txBody>
+                    <a:bodyPr/>
+                    <a:lstStyle/>
+                    <a:p>
+                      <a:pPr algn="l" indent="0" marL="0">
+                        <a:buNone/>
+                      </a:pPr>
+                      <a:r>
+                        <a:rPr lang="en-US" sz="1300" dirty="0">
+                          <a:solidFill>
+                            <a:srgbClr val="000000"/>
+                          </a:solidFill>
+                          <a:latin typeface="Yu Gothic" pitchFamily="34" charset="0"/>
+                          <a:ea typeface="Yu Gothic" pitchFamily="34" charset="-122"/>
+                          <a:cs typeface="Yu Gothic" pitchFamily="34" charset="-120"/>
+                        </a:rPr>
+                        <a:t>その箇所が遅くなる</a:t>
+                      </a:r>
+                      <a:endParaRPr lang="en-US" sz="1300" dirty="0">
+                        <a:latin typeface="Yu Gothic" charset="0"/>
+                        <a:ea typeface="Yu Gothic" charset="0"/>
+                        <a:cs typeface="Yu Gothic" charset="0"/>
+                      </a:endParaRPr>
+                    </a:p>
+                  </a:txBody>
+                  <a:tcPr marL="91440" marR="91440" marT="45720" marB="45720" anchor="ctr">
+                    <a:lnL w="12700" cap="flat" cmpd="sng" algn="ctr">
+                      <a:solidFill>
+                        <a:srgbClr val="DDE4EC"/>
+                      </a:solidFill>
+                      <a:prstDash val="solid"/>
+                      <a:round/>
+                      <a:headEnd type="none" w="med" len="med"/>
+                      <a:tailEnd type="none" w="med" len="med"/>
+                    </a:lnL>
+                    <a:lnR w="12700" cap="flat" cmpd="sng" algn="ctr">
+                      <a:solidFill>
+                        <a:srgbClr val="DDE4EC"/>
+                      </a:solidFill>
+                      <a:prstDash val="solid"/>
+                      <a:round/>
+                      <a:headEnd type="none" w="med" len="med"/>
+                      <a:tailEnd type="none" w="med" len="med"/>
+                    </a:lnR>
+                    <a:lnT w="12700" cap="flat" cmpd="sng" algn="ctr">
+                      <a:solidFill>
+                        <a:srgbClr val="DDE4EC"/>
+                      </a:solidFill>
+                      <a:prstDash val="solid"/>
+                      <a:round/>
+                      <a:headEnd type="none" w="med" len="med"/>
+                      <a:tailEnd type="none" w="med" len="med"/>
+                    </a:lnT>
+                    <a:lnB w="12700" cap="flat" cmpd="sng" algn="ctr">
+                      <a:solidFill>
+                        <a:srgbClr val="DDE4EC"/>
+                      </a:solidFill>
+                      <a:prstDash val="solid"/>
+                      <a:round/>
+                      <a:headEnd type="none" w="med" len="med"/>
+                      <a:tailEnd type="none" w="med" len="med"/>
+                    </a:lnB>
+                    <a:solidFill>
+                      <a:srgbClr val="FFFFFF"/>
+                    </a:solidFill>
+                  </a:tcPr>
+                </a:tc>
+              </a:tr>
+              <a:tr h="402336">
+                <a:tc>
+                  <a:txBody>
+                    <a:bodyPr/>
+                    <a:lstStyle/>
+                    <a:p>
+                      <a:pPr algn="l" indent="0" marL="0">
+                        <a:buNone/>
+                      </a:pPr>
+                      <a:r>
+                        <a:rPr lang="en-US" sz="1300" dirty="0">
+                          <a:solidFill>
+                            <a:srgbClr val="000000"/>
+                          </a:solidFill>
+                          <a:latin typeface="Yu Gothic" pitchFamily="34" charset="0"/>
+                          <a:ea typeface="Yu Gothic" pitchFamily="34" charset="-122"/>
+                          <a:cs typeface="Yu Gothic" pitchFamily="34" charset="-120"/>
+                        </a:rPr>
+                        <a:t>カーネルとユーザのページテーブルを分ける（KPTI）</a:t>
+                      </a:r>
+                      <a:endParaRPr lang="en-US" sz="1300" dirty="0">
+                        <a:latin typeface="Yu Gothic" charset="0"/>
+                        <a:ea typeface="Yu Gothic" charset="0"/>
+                        <a:cs typeface="Yu Gothic" charset="0"/>
+                      </a:endParaRPr>
+                    </a:p>
+                  </a:txBody>
+                  <a:tcPr marL="91440" marR="91440" marT="45720" marB="45720" anchor="ctr">
+                    <a:lnL w="12700" cap="flat" cmpd="sng" algn="ctr">
+                      <a:solidFill>
+                        <a:srgbClr val="DDE4EC"/>
+                      </a:solidFill>
+                      <a:prstDash val="solid"/>
+                      <a:round/>
+                      <a:headEnd type="none" w="med" len="med"/>
+                      <a:tailEnd type="none" w="med" len="med"/>
+                    </a:lnL>
+                    <a:lnR w="12700" cap="flat" cmpd="sng" algn="ctr">
+                      <a:solidFill>
+                        <a:srgbClr val="DDE4EC"/>
+                      </a:solidFill>
+                      <a:prstDash val="solid"/>
+                      <a:round/>
+                      <a:headEnd type="none" w="med" len="med"/>
+                      <a:tailEnd type="none" w="med" len="med"/>
+                    </a:lnR>
+                    <a:lnT w="12700" cap="flat" cmpd="sng" algn="ctr">
+                      <a:solidFill>
+                        <a:srgbClr val="DDE4EC"/>
+                      </a:solidFill>
+                      <a:prstDash val="solid"/>
+                      <a:round/>
+                      <a:headEnd type="none" w="med" len="med"/>
+                      <a:tailEnd type="none" w="med" len="med"/>
+                    </a:lnT>
+                    <a:lnB w="12700" cap="flat" cmpd="sng" algn="ctr">
+                      <a:solidFill>
+                        <a:srgbClr val="DDE4EC"/>
+                      </a:solidFill>
+                      <a:prstDash val="solid"/>
+                      <a:round/>
+                      <a:headEnd type="none" w="med" len="med"/>
+                      <a:tailEnd type="none" w="med" len="med"/>
+                    </a:lnB>
+                    <a:solidFill>
+                      <a:srgbClr val="FFFFFF"/>
+                    </a:solidFill>
+                  </a:tcPr>
+                </a:tc>
+                <a:tc>
+                  <a:txBody>
+                    <a:bodyPr/>
+                    <a:lstStyle/>
+                    <a:p>
+                      <a:pPr algn="l" indent="0" marL="0">
+                        <a:buNone/>
+                      </a:pPr>
+                      <a:r>
+                        <a:rPr lang="en-US" sz="1300" dirty="0">
+                          <a:solidFill>
+                            <a:srgbClr val="000000"/>
+                          </a:solidFill>
+                          <a:latin typeface="Yu Gothic" pitchFamily="34" charset="0"/>
+                          <a:ea typeface="Yu Gothic" pitchFamily="34" charset="-122"/>
+                          <a:cs typeface="Yu Gothic" pitchFamily="34" charset="-120"/>
+                        </a:rPr>
+                        <a:t>システムコールが重くなる</a:t>
+                      </a:r>
+                      <a:endParaRPr lang="en-US" sz="1300" dirty="0">
+                        <a:latin typeface="Yu Gothic" charset="0"/>
+                        <a:ea typeface="Yu Gothic" charset="0"/>
+                        <a:cs typeface="Yu Gothic" charset="0"/>
+                      </a:endParaRPr>
+                    </a:p>
+                  </a:txBody>
+                  <a:tcPr marL="91440" marR="91440" marT="45720" marB="45720" anchor="ctr">
+                    <a:lnL w="12700" cap="flat" cmpd="sng" algn="ctr">
+                      <a:solidFill>
+                        <a:srgbClr val="DDE4EC"/>
+                      </a:solidFill>
+                      <a:prstDash val="solid"/>
+                      <a:round/>
+                      <a:headEnd type="none" w="med" len="med"/>
+                      <a:tailEnd type="none" w="med" len="med"/>
+                    </a:lnL>
+                    <a:lnR w="12700" cap="flat" cmpd="sng" algn="ctr">
+                      <a:solidFill>
+                        <a:srgbClr val="DDE4EC"/>
+                      </a:solidFill>
+                      <a:prstDash val="solid"/>
+                      <a:round/>
+                      <a:headEnd type="none" w="med" len="med"/>
+                      <a:tailEnd type="none" w="med" len="med"/>
+                    </a:lnR>
+                    <a:lnT w="12700" cap="flat" cmpd="sng" algn="ctr">
+                      <a:solidFill>
+                        <a:srgbClr val="DDE4EC"/>
+                      </a:solidFill>
+                      <a:prstDash val="solid"/>
+                      <a:round/>
+                      <a:headEnd type="none" w="med" len="med"/>
+                      <a:tailEnd type="none" w="med" len="med"/>
+                    </a:lnT>
+                    <a:lnB w="12700" cap="flat" cmpd="sng" algn="ctr">
+                      <a:solidFill>
+                        <a:srgbClr val="DDE4EC"/>
+                      </a:solidFill>
+                      <a:prstDash val="solid"/>
+                      <a:round/>
+                      <a:headEnd type="none" w="med" len="med"/>
+                      <a:tailEnd type="none" w="med" len="med"/>
+                    </a:lnB>
+                    <a:solidFill>
+                      <a:srgbClr val="FFFFFF"/>
+                    </a:solidFill>
+                  </a:tcPr>
+                </a:tc>
+              </a:tr>
+              <a:tr h="402336">
+                <a:tc>
+                  <a:txBody>
+                    <a:bodyPr/>
+                    <a:lstStyle/>
+                    <a:p>
+                      <a:pPr algn="l" indent="0" marL="0">
+                        <a:buNone/>
+                      </a:pPr>
+                      <a:r>
+                        <a:rPr lang="en-US" sz="1300" dirty="0">
+                          <a:solidFill>
+                            <a:srgbClr val="000000"/>
+                          </a:solidFill>
+                          <a:latin typeface="Yu Gothic" pitchFamily="34" charset="0"/>
+                          <a:ea typeface="Yu Gothic" pitchFamily="34" charset="-122"/>
+                          <a:cs typeface="Yu Gothic" pitchFamily="34" charset="-120"/>
+                        </a:rPr>
+                        <a:t>コンパイラが危ない形を避ける</a:t>
+                      </a:r>
+                      <a:endParaRPr lang="en-US" sz="1300" dirty="0">
+                        <a:latin typeface="Yu Gothic" charset="0"/>
+                        <a:ea typeface="Yu Gothic" charset="0"/>
+                        <a:cs typeface="Yu Gothic" charset="0"/>
+                      </a:endParaRPr>
+                    </a:p>
+                  </a:txBody>
+                  <a:tcPr marL="91440" marR="91440" marT="45720" marB="45720" anchor="ctr">
+                    <a:lnL w="12700" cap="flat" cmpd="sng" algn="ctr">
+                      <a:solidFill>
+                        <a:srgbClr val="DDE4EC"/>
+                      </a:solidFill>
+                      <a:prstDash val="solid"/>
+                      <a:round/>
+                      <a:headEnd type="none" w="med" len="med"/>
+                      <a:tailEnd type="none" w="med" len="med"/>
+                    </a:lnL>
+                    <a:lnR w="12700" cap="flat" cmpd="sng" algn="ctr">
+                      <a:solidFill>
+                        <a:srgbClr val="DDE4EC"/>
+                      </a:solidFill>
+                      <a:prstDash val="solid"/>
+                      <a:round/>
+                      <a:headEnd type="none" w="med" len="med"/>
+                      <a:tailEnd type="none" w="med" len="med"/>
+                    </a:lnR>
+                    <a:lnT w="12700" cap="flat" cmpd="sng" algn="ctr">
+                      <a:solidFill>
+                        <a:srgbClr val="DDE4EC"/>
+                      </a:solidFill>
+                      <a:prstDash val="solid"/>
+                      <a:round/>
+                      <a:headEnd type="none" w="med" len="med"/>
+                      <a:tailEnd type="none" w="med" len="med"/>
+                    </a:lnT>
+                    <a:lnB w="12700" cap="flat" cmpd="sng" algn="ctr">
+                      <a:solidFill>
+                        <a:srgbClr val="DDE4EC"/>
+                      </a:solidFill>
+                      <a:prstDash val="solid"/>
+                      <a:round/>
+                      <a:headEnd type="none" w="med" len="med"/>
+                      <a:tailEnd type="none" w="med" len="med"/>
+                    </a:lnB>
+                    <a:solidFill>
+                      <a:srgbClr val="FFFFFF"/>
+                    </a:solidFill>
+                  </a:tcPr>
+                </a:tc>
+                <a:tc>
+                  <a:txBody>
+                    <a:bodyPr/>
+                    <a:lstStyle/>
+                    <a:p>
+                      <a:pPr algn="l" indent="0" marL="0">
+                        <a:buNone/>
+                      </a:pPr>
+                      <a:r>
+                        <a:rPr lang="en-US" sz="1300" dirty="0">
+                          <a:solidFill>
+                            <a:srgbClr val="000000"/>
+                          </a:solidFill>
+                          <a:latin typeface="Yu Gothic" pitchFamily="34" charset="0"/>
+                          <a:ea typeface="Yu Gothic" pitchFamily="34" charset="-122"/>
+                          <a:cs typeface="Yu Gothic" pitchFamily="34" charset="-120"/>
+                        </a:rPr>
+                        <a:t>最適化の余地が減る</a:t>
+                      </a:r>
+                      <a:endParaRPr lang="en-US" sz="1300" dirty="0">
+                        <a:latin typeface="Yu Gothic" charset="0"/>
+                        <a:ea typeface="Yu Gothic" charset="0"/>
+                        <a:cs typeface="Yu Gothic" charset="0"/>
+                      </a:endParaRPr>
+                    </a:p>
+                  </a:txBody>
+                  <a:tcPr marL="91440" marR="91440" marT="45720" marB="45720" anchor="ctr">
+                    <a:lnL w="12700" cap="flat" cmpd="sng" algn="ctr">
+                      <a:solidFill>
+                        <a:srgbClr val="DDE4EC"/>
+                      </a:solidFill>
+                      <a:prstDash val="solid"/>
+                      <a:round/>
+                      <a:headEnd type="none" w="med" len="med"/>
+                      <a:tailEnd type="none" w="med" len="med"/>
+                    </a:lnL>
+                    <a:lnR w="12700" cap="flat" cmpd="sng" algn="ctr">
+                      <a:solidFill>
+                        <a:srgbClr val="DDE4EC"/>
+                      </a:solidFill>
+                      <a:prstDash val="solid"/>
+                      <a:round/>
+                      <a:headEnd type="none" w="med" len="med"/>
+                      <a:tailEnd type="none" w="med" len="med"/>
+                    </a:lnR>
+                    <a:lnT w="12700" cap="flat" cmpd="sng" algn="ctr">
+                      <a:solidFill>
+                        <a:srgbClr val="DDE4EC"/>
+                      </a:solidFill>
+                      <a:prstDash val="solid"/>
+                      <a:round/>
+                      <a:headEnd type="none" w="med" len="med"/>
+                      <a:tailEnd type="none" w="med" len="med"/>
+                    </a:lnT>
+                    <a:lnB w="12700" cap="flat" cmpd="sng" algn="ctr">
+                      <a:solidFill>
+                        <a:srgbClr val="DDE4EC"/>
+                      </a:solidFill>
+                      <a:prstDash val="solid"/>
+                      <a:round/>
+                      <a:headEnd type="none" w="med" len="med"/>
+                      <a:tailEnd type="none" w="med" len="med"/>
+                    </a:lnB>
+                    <a:solidFill>
+                      <a:srgbClr val="FFFFFF"/>
+                    </a:solidFill>
+                  </a:tcPr>
+                </a:tc>
+              </a:tr>
+            </a:tbl>
+          </a:graphicData>
+        </a:graphic>
+      </p:graphicFrame>
+      <p:sp>
+        <p:nvSpPr>
+          <p:cNvPr id="7" name="Shape 4"/>
+          <p:cNvSpPr/>
+          <p:nvPr/>
+        </p:nvSpPr>
+        <p:spPr>
+          <a:xfrm>
+            <a:off x="685800" y="3721608"/>
+            <a:ext cx="10789920" cy="658368"/>
+          </a:xfrm>
+          <a:prstGeom prst="roundRect">
+            <a:avLst>
+              <a:gd name="adj" fmla="val 8333"/>
+            </a:avLst>
+          </a:prstGeom>
+          <a:solidFill>
+            <a:srgbClr val="D9E6F4"/>
+          </a:solidFill>
+          <a:ln w="19050">
+            <a:solidFill>
+              <a:srgbClr val="0B5CAD"/>
+            </a:solidFill>
+            <a:prstDash val="solid"/>
+          </a:ln>
+        </p:spPr>
+      </p:sp>
+      <p:sp>
+        <p:nvSpPr>
+          <p:cNvPr id="8" name="Text 5"/>
+          <p:cNvSpPr/>
+          <p:nvPr/>
+        </p:nvSpPr>
+        <p:spPr>
+          <a:xfrm>
+            <a:off x="914400" y="3867912"/>
+            <a:ext cx="10332720" cy="365760"/>
+          </a:xfrm>
+          <a:prstGeom prst="rect">
+            <a:avLst/>
+          </a:prstGeom>
+          <a:noFill/>
+          <a:ln/>
+        </p:spPr>
+        <p:txBody>
+          <a:bodyPr wrap="square" lIns="0" tIns="0" rIns="0" bIns="0" rtlCol="0" anchor="ctr"/>
+          <a:lstStyle/>
+          <a:p>
+            <a:pPr indent="0" marL="0">
+              <a:buNone/>
+            </a:pPr>
+            <a:r>
+              <a:rPr lang="en-US" sz="1500" b="1" dirty="0">
+                <a:solidFill>
+                  <a:srgbClr val="0B5CAD"/>
                 </a:solidFill>
                 <a:latin typeface="Yu Gothic" pitchFamily="34" charset="0"/>
                 <a:ea typeface="Yu Gothic" pitchFamily="34" charset="-122"/>
                 <a:cs typeface="Yu Gothic" pitchFamily="34" charset="-120"/>
               </a:rPr>
-              <a:t>データの共有と競合 — 2つのスレッドが同じ変数を同時に書き換えると壊れる</a:t>
-            </a:r>
-            <a:endParaRPr lang="en-US" sz="1600" dirty="0"/>
-          </a:p>
-          <a:p>
-            <a:pPr marL="342900" indent="-342900">
-              <a:spcAft>
-                <a:spcPts val="1000"/>
-              </a:spcAft>
-              <a:buSzPct val="100000"/>
-              <a:buChar char="•"/>
-            </a:pPr>
-            <a:r>
-              <a:rPr lang="en-US" sz="1600" dirty="0">
-                <a:solidFill>
-                  <a:srgbClr val="16191D"/>
+              <a:t>抽象化は、性能のために下の層の事情を漏らすことがある。その漏れが情報の漏洩になりうる</a:t>
+            </a:r>
+            <a:endParaRPr lang="en-US" sz="1500" dirty="0"/>
+          </a:p>
+        </p:txBody>
+      </p:sp>
+      <p:sp>
+        <p:nvSpPr>
+          <p:cNvPr id="9" name="Text 6"/>
+          <p:cNvSpPr/>
+          <p:nvPr/>
+        </p:nvSpPr>
+        <p:spPr>
+          <a:xfrm>
+            <a:off x="685800" y="4544568"/>
+            <a:ext cx="10789920" cy="457200"/>
+          </a:xfrm>
+          <a:prstGeom prst="rect">
+            <a:avLst/>
+          </a:prstGeom>
+          <a:noFill/>
+          <a:ln/>
+        </p:spPr>
+        <p:txBody>
+          <a:bodyPr wrap="square" lIns="0" tIns="0" rIns="0" bIns="0" rtlCol="0" anchor="ctr"/>
+          <a:lstStyle/>
+          <a:p>
+            <a:pPr indent="0" marL="0">
+              <a:lnSpc>
+                <a:spcPts val="2000"/>
+              </a:lnSpc>
+              <a:buNone/>
+            </a:pPr>
+            <a:r>
+              <a:rPr lang="en-US" sz="1300" dirty="0">
+                <a:solidFill>
+                  <a:srgbClr val="5F6672"/>
                 </a:solidFill>
                 <a:latin typeface="Yu Gothic" pitchFamily="34" charset="0"/>
                 <a:ea typeface="Yu Gothic" pitchFamily="34" charset="-122"/>
                 <a:cs typeface="Yu Gothic" pitchFamily="34" charset="-120"/>
               </a:rPr>
-              <a:t>同期のコスト — 待ち合わせそのものに時間がかかる</a:t>
-            </a:r>
-            <a:endParaRPr lang="en-US" sz="1600" dirty="0"/>
-          </a:p>
-          <a:p>
-            <a:pPr marL="342900" indent="-342900">
-              <a:spcAft>
-                <a:spcPts val="1000"/>
-              </a:spcAft>
-              <a:buSzPct val="100000"/>
-              <a:buChar char="•"/>
-            </a:pPr>
-            <a:r>
-              <a:rPr lang="en-US" sz="1600" dirty="0">
-                <a:solidFill>
-                  <a:srgbClr val="16191D"/>
+              <a:t>プログラムから見れば「取り消された実行」は存在しないはずだった。しかし下の層（キャッシュ）には痕跡が残っていた。</a:t>
+            </a:r>
+            <a:endParaRPr lang="en-US" sz="1300" dirty="0"/>
+          </a:p>
+          <a:p>
+            <a:pPr indent="0" marL="0">
+              <a:lnSpc>
+                <a:spcPts val="2000"/>
+              </a:lnSpc>
+              <a:buNone/>
+            </a:pPr>
+            <a:r>
+              <a:rPr lang="en-US" sz="1300" dirty="0">
+                <a:solidFill>
+                  <a:srgbClr val="5F6672"/>
                 </a:solidFill>
                 <a:latin typeface="Yu Gothic" pitchFamily="34" charset="0"/>
                 <a:ea typeface="Yu Gothic" pitchFamily="34" charset="-122"/>
                 <a:cs typeface="Yu Gothic" pitchFamily="34" charset="-120"/>
               </a:rPr>
-              <a:t>デッドロック — 互いに相手の資源を待って永久に止まる</a:t>
-            </a:r>
-            <a:endParaRPr lang="en-US" sz="1600" dirty="0"/>
-          </a:p>
-          <a:p>
-            <a:pPr marL="342900" indent="-342900">
-              <a:spcAft>
-                <a:spcPts val="1000"/>
-              </a:spcAft>
-              <a:buSzPct val="100000"/>
-              <a:buChar char="•"/>
-            </a:pPr>
-            <a:r>
-              <a:rPr lang="en-US" sz="1600" dirty="0">
-                <a:solidFill>
-                  <a:srgbClr val="16191D"/>
-                </a:solidFill>
-                <a:latin typeface="Yu Gothic" pitchFamily="34" charset="0"/>
-                <a:ea typeface="Yu Gothic" pitchFamily="34" charset="-122"/>
-                <a:cs typeface="Yu Gothic" pitchFamily="34" charset="-120"/>
-              </a:rPr>
-              <a:t>再現しないバグ — タイミング依存の不具合は、実行するたびに現れたり消えたりする</a:t>
-            </a:r>
-            <a:endParaRPr lang="en-US" sz="1600" dirty="0"/>
-          </a:p>
-        </p:txBody>
-      </p:sp>
-      <p:sp>
-        <p:nvSpPr>
-          <p:cNvPr id="6" name="Text 4"/>
-          <p:cNvSpPr/>
-          <p:nvPr/>
-        </p:nvSpPr>
-        <p:spPr>
-          <a:xfrm>
-            <a:off x="685800" y="4754880"/>
-            <a:ext cx="10789920" cy="512064"/>
-          </a:xfrm>
-          <a:prstGeom prst="rect">
-            <a:avLst/>
-          </a:prstGeom>
-          <a:noFill/>
-          <a:ln/>
-        </p:spPr>
-        <p:txBody>
-          <a:bodyPr wrap="square" lIns="0" tIns="0" rIns="0" bIns="0" rtlCol="0" anchor="ctr"/>
-          <a:lstStyle/>
-          <a:p>
-            <a:pPr indent="0" marL="0">
-              <a:lnSpc>
-                <a:spcPts val="1900"/>
-              </a:lnSpc>
-              <a:buNone/>
-            </a:pPr>
-            <a:r>
-              <a:rPr lang="en-US" sz="1300" b="1" dirty="0">
-                <a:solidFill>
-                  <a:srgbClr val="0B5CAD"/>
-                </a:solidFill>
-                <a:latin typeface="Yu Gothic" pitchFamily="34" charset="0"/>
-                <a:ea typeface="Yu Gothic" pitchFamily="34" charset="-122"/>
-                <a:cs typeface="Yu Gothic" pitchFamily="34" charset="-120"/>
-              </a:rPr>
-              <a:t>これらへの対処は第7回（プロセスとスレッド）で扱う。</a:t>
+              <a:t>時間から秘密を推測する攻撃は他にもある。暗号ライブラリが定数時間で書かれるのはこのためである（第12回）。</a:t>
             </a:r>
             <a:endParaRPr lang="en-US" sz="1300" dirty="0"/>
           </a:p>
@@ -10458,7 +11510,7 @@
                 <a:ea typeface="Yu Gothic" pitchFamily="34" charset="-122"/>
                 <a:cs typeface="Yu Gothic" pitchFamily="34" charset="-120"/>
               </a:rPr>
-              <a:t>第5回</a:t>
+              <a:t>5.4　並列性</a:t>
             </a:r>
             <a:endParaRPr lang="en-US" sz="1200" dirty="0"/>
           </a:p>
@@ -10497,7 +11549,7 @@
                 <a:ea typeface="Yu Gothic" pitchFamily="34" charset="-122"/>
                 <a:cs typeface="Yu Gothic" pitchFamily="34" charset="-120"/>
               </a:rPr>
-              <a:t>演習</a:t>
+              <a:t>並列性の階層</a:t>
             </a:r>
             <a:endParaRPr lang="en-US" sz="3000" dirty="0"/>
           </a:p>
@@ -10550,20 +11602,20 @@
         </p:nvSpPr>
         <p:spPr>
           <a:xfrm>
-            <a:off x="685800" y="1691640"/>
-            <a:ext cx="868680" cy="402336"/>
+            <a:off x="685800" y="1481328"/>
+            <a:ext cx="5280660" cy="1371600"/>
           </a:xfrm>
           <a:prstGeom prst="roundRect">
             <a:avLst>
-              <a:gd name="adj" fmla="val 18182"/>
+              <a:gd name="adj" fmla="val 4000"/>
             </a:avLst>
           </a:prstGeom>
           <a:solidFill>
-            <a:srgbClr val="D9E6F4"/>
+            <a:srgbClr val="EEF1F5"/>
           </a:solidFill>
           <a:ln w="12700">
             <a:solidFill>
-              <a:srgbClr val="0B5CAD"/>
+              <a:srgbClr val="DDE4EC"/>
             </a:solidFill>
             <a:prstDash val="solid"/>
           </a:ln>
@@ -10577,8 +11629,8 @@
         </p:nvSpPr>
         <p:spPr>
           <a:xfrm>
-            <a:off x="685800" y="1691640"/>
-            <a:ext cx="868680" cy="402336"/>
+            <a:off x="868680" y="1618488"/>
+            <a:ext cx="4914900" cy="310896"/>
           </a:xfrm>
           <a:prstGeom prst="rect">
             <a:avLst/>
@@ -10590,53 +11642,11 @@
           <a:bodyPr wrap="square" lIns="0" tIns="0" rIns="0" bIns="0" rtlCol="0" anchor="ctr"/>
           <a:lstStyle/>
           <a:p>
-            <a:pPr algn="ctr" indent="0" marL="0">
-              <a:buNone/>
-            </a:pPr>
-            <a:r>
-              <a:rPr lang="en-US" sz="1300" b="1" dirty="0">
-                <a:solidFill>
-                  <a:srgbClr val="0B5CAD"/>
-                </a:solidFill>
-                <a:latin typeface="Courier New" pitchFamily="34" charset="0"/>
-                <a:ea typeface="Courier New" pitchFamily="34" charset="-122"/>
-                <a:cs typeface="Courier New" pitchFamily="34" charset="-120"/>
-              </a:rPr>
-              <a:t>5-1</a:t>
-            </a:r>
-            <a:endParaRPr lang="en-US" sz="1300" dirty="0"/>
-          </a:p>
-        </p:txBody>
-      </p:sp>
-      <p:sp>
-        <p:nvSpPr>
-          <p:cNvPr id="7" name="Text 5"/>
-          <p:cNvSpPr/>
-          <p:nvPr/>
-        </p:nvSpPr>
-        <p:spPr>
-          <a:xfrm>
-            <a:off x="1783080" y="1673352"/>
-            <a:ext cx="9692640" cy="932688"/>
-          </a:xfrm>
-          <a:prstGeom prst="rect">
-            <a:avLst/>
-          </a:prstGeom>
-          <a:noFill/>
-          <a:ln/>
-        </p:spPr>
-        <p:txBody>
-          <a:bodyPr wrap="square" lIns="0" tIns="0" rIns="0" bIns="0" rtlCol="0" anchor="t"/>
-          <a:lstStyle/>
-          <a:p>
             <a:pPr indent="0" marL="0">
-              <a:lnSpc>
-                <a:spcPts val="2100"/>
-              </a:lnSpc>
-              <a:buNone/>
-            </a:pPr>
-            <a:r>
-              <a:rPr lang="en-US" sz="1400" dirty="0">
+              <a:buNone/>
+            </a:pPr>
+            <a:r>
+              <a:rPr lang="en-US" sz="1400" b="1" dirty="0">
                 <a:solidFill>
                   <a:srgbClr val="16191D"/>
                 </a:solidFill>
@@ -10644,7 +11654,7 @@
                 <a:ea typeface="Yu Gothic" pitchFamily="34" charset="-122"/>
                 <a:cs typeface="Yu Gothic" pitchFamily="34" charset="-120"/>
               </a:rPr>
-              <a:t>キャッシュ参照時間 2ns、主記憶参照時間 100ns のシステムで、ヒット率が (a) 98% (b) 90% のとき実効アクセス時間をそれぞれ求めよ。</a:t>
+              <a:t>スーパースカラ</a:t>
             </a:r>
             <a:endParaRPr lang="en-US" sz="1400" dirty="0"/>
           </a:p>
@@ -10652,26 +11662,68 @@
       </p:sp>
       <p:sp>
         <p:nvSpPr>
+          <p:cNvPr id="7" name="Text 5"/>
+          <p:cNvSpPr/>
+          <p:nvPr/>
+        </p:nvSpPr>
+        <p:spPr>
+          <a:xfrm>
+            <a:off x="868680" y="1965960"/>
+            <a:ext cx="4914900" cy="731520"/>
+          </a:xfrm>
+          <a:prstGeom prst="rect">
+            <a:avLst/>
+          </a:prstGeom>
+          <a:noFill/>
+          <a:ln/>
+        </p:spPr>
+        <p:txBody>
+          <a:bodyPr wrap="square" lIns="0" tIns="0" rIns="0" bIns="0" rtlCol="0" anchor="t"/>
+          <a:lstStyle/>
+          <a:p>
+            <a:pPr indent="0" marL="0">
+              <a:lnSpc>
+                <a:spcPts val="1600"/>
+              </a:lnSpc>
+              <a:buNone/>
+            </a:pPr>
+            <a:r>
+              <a:rPr lang="en-US" sz="1200" dirty="0">
+                <a:solidFill>
+                  <a:srgbClr val="5F6672"/>
+                </a:solidFill>
+                <a:latin typeface="Yu Gothic" pitchFamily="34" charset="0"/>
+                <a:ea typeface="Yu Gothic" pitchFamily="34" charset="-122"/>
+                <a:cs typeface="Yu Gothic" pitchFamily="34" charset="-120"/>
+              </a:rPr>
+              <a:t>演算器を複数持ち、依存関係のない命令を同時に発行する。アウトオブオーダ実行では順序も入れ替える</a:t>
+            </a:r>
+            <a:endParaRPr lang="en-US" sz="1200" dirty="0"/>
+          </a:p>
+        </p:txBody>
+      </p:sp>
+      <p:sp>
+        <p:nvSpPr>
           <p:cNvPr id="8" name="Shape 6"/>
           <p:cNvSpPr/>
           <p:nvPr/>
         </p:nvSpPr>
         <p:spPr>
           <a:xfrm>
-            <a:off x="685800" y="2770632"/>
-            <a:ext cx="868680" cy="402336"/>
+            <a:off x="6195060" y="1481328"/>
+            <a:ext cx="5280660" cy="1371600"/>
           </a:xfrm>
           <a:prstGeom prst="roundRect">
             <a:avLst>
-              <a:gd name="adj" fmla="val 18182"/>
+              <a:gd name="adj" fmla="val 4000"/>
             </a:avLst>
           </a:prstGeom>
           <a:solidFill>
-            <a:srgbClr val="D9E6F4"/>
+            <a:srgbClr val="EEF1F5"/>
           </a:solidFill>
           <a:ln w="12700">
             <a:solidFill>
-              <a:srgbClr val="0B5CAD"/>
+              <a:srgbClr val="DDE4EC"/>
             </a:solidFill>
             <a:prstDash val="solid"/>
           </a:ln>
@@ -10685,8 +11737,8 @@
         </p:nvSpPr>
         <p:spPr>
           <a:xfrm>
-            <a:off x="685800" y="2770632"/>
-            <a:ext cx="868680" cy="402336"/>
+            <a:off x="6377940" y="1618488"/>
+            <a:ext cx="4914900" cy="310896"/>
           </a:xfrm>
           <a:prstGeom prst="rect">
             <a:avLst/>
@@ -10698,53 +11750,11 @@
           <a:bodyPr wrap="square" lIns="0" tIns="0" rIns="0" bIns="0" rtlCol="0" anchor="ctr"/>
           <a:lstStyle/>
           <a:p>
-            <a:pPr algn="ctr" indent="0" marL="0">
-              <a:buNone/>
-            </a:pPr>
-            <a:r>
-              <a:rPr lang="en-US" sz="1300" b="1" dirty="0">
-                <a:solidFill>
-                  <a:srgbClr val="0B5CAD"/>
-                </a:solidFill>
-                <a:latin typeface="Courier New" pitchFamily="34" charset="0"/>
-                <a:ea typeface="Courier New" pitchFamily="34" charset="-122"/>
-                <a:cs typeface="Courier New" pitchFamily="34" charset="-120"/>
-              </a:rPr>
-              <a:t>5-2</a:t>
-            </a:r>
-            <a:endParaRPr lang="en-US" sz="1300" dirty="0"/>
-          </a:p>
-        </p:txBody>
-      </p:sp>
-      <p:sp>
-        <p:nvSpPr>
-          <p:cNvPr id="10" name="Text 8"/>
-          <p:cNvSpPr/>
-          <p:nvPr/>
-        </p:nvSpPr>
-        <p:spPr>
-          <a:xfrm>
-            <a:off x="1783080" y="2752344"/>
-            <a:ext cx="9692640" cy="932688"/>
-          </a:xfrm>
-          <a:prstGeom prst="rect">
-            <a:avLst/>
-          </a:prstGeom>
-          <a:noFill/>
-          <a:ln/>
-        </p:spPr>
-        <p:txBody>
-          <a:bodyPr wrap="square" lIns="0" tIns="0" rIns="0" bIns="0" rtlCol="0" anchor="t"/>
-          <a:lstStyle/>
-          <a:p>
             <a:pPr indent="0" marL="0">
-              <a:lnSpc>
-                <a:spcPts val="2100"/>
-              </a:lnSpc>
-              <a:buNone/>
-            </a:pPr>
-            <a:r>
-              <a:rPr lang="en-US" sz="1400" dirty="0">
+              <a:buNone/>
+            </a:pPr>
+            <a:r>
+              <a:rPr lang="en-US" sz="1400" b="1" dirty="0">
                 <a:solidFill>
                   <a:srgbClr val="16191D"/>
                 </a:solidFill>
@@ -10752,7 +11762,7 @@
                 <a:ea typeface="Yu Gothic" pitchFamily="34" charset="-122"/>
                 <a:cs typeface="Yu Gothic" pitchFamily="34" charset="-120"/>
               </a:rPr>
-              <a:t>5.2 の (a)(b) 2つのループについて、N=1024、1要素8バイト、キャッシュライン64バイトとする。それぞれ何回のキャッシュミスが起きるか概算せよ。</a:t>
+              <a:t>SIMD</a:t>
             </a:r>
             <a:endParaRPr lang="en-US" sz="1400" dirty="0"/>
           </a:p>
@@ -10760,26 +11770,68 @@
       </p:sp>
       <p:sp>
         <p:nvSpPr>
+          <p:cNvPr id="10" name="Text 8"/>
+          <p:cNvSpPr/>
+          <p:nvPr/>
+        </p:nvSpPr>
+        <p:spPr>
+          <a:xfrm>
+            <a:off x="6377940" y="1965960"/>
+            <a:ext cx="4914900" cy="731520"/>
+          </a:xfrm>
+          <a:prstGeom prst="rect">
+            <a:avLst/>
+          </a:prstGeom>
+          <a:noFill/>
+          <a:ln/>
+        </p:spPr>
+        <p:txBody>
+          <a:bodyPr wrap="square" lIns="0" tIns="0" rIns="0" bIns="0" rtlCol="0" anchor="t"/>
+          <a:lstStyle/>
+          <a:p>
+            <a:pPr indent="0" marL="0">
+              <a:lnSpc>
+                <a:spcPts val="1600"/>
+              </a:lnSpc>
+              <a:buNone/>
+            </a:pPr>
+            <a:r>
+              <a:rPr lang="en-US" sz="1200" dirty="0">
+                <a:solidFill>
+                  <a:srgbClr val="5F6672"/>
+                </a:solidFill>
+                <a:latin typeface="Yu Gothic" pitchFamily="34" charset="0"/>
+                <a:ea typeface="Yu Gothic" pitchFamily="34" charset="-122"/>
+                <a:cs typeface="Yu Gothic" pitchFamily="34" charset="-120"/>
+              </a:rPr>
+              <a:t>1つの命令で複数のデータに同じ演算をする。画像・音声・行列演算で効く</a:t>
+            </a:r>
+            <a:endParaRPr lang="en-US" sz="1200" dirty="0"/>
+          </a:p>
+        </p:txBody>
+      </p:sp>
+      <p:sp>
+        <p:nvSpPr>
           <p:cNvPr id="11" name="Shape 9"/>
           <p:cNvSpPr/>
           <p:nvPr/>
         </p:nvSpPr>
         <p:spPr>
           <a:xfrm>
-            <a:off x="685800" y="3849624"/>
-            <a:ext cx="868680" cy="402336"/>
+            <a:off x="685800" y="3054096"/>
+            <a:ext cx="5280660" cy="1371600"/>
           </a:xfrm>
           <a:prstGeom prst="roundRect">
             <a:avLst>
-              <a:gd name="adj" fmla="val 18182"/>
+              <a:gd name="adj" fmla="val 4000"/>
             </a:avLst>
           </a:prstGeom>
           <a:solidFill>
-            <a:srgbClr val="D9E6F4"/>
+            <a:srgbClr val="EEF1F5"/>
           </a:solidFill>
           <a:ln w="12700">
             <a:solidFill>
-              <a:srgbClr val="0B5CAD"/>
+              <a:srgbClr val="DDE4EC"/>
             </a:solidFill>
             <a:prstDash val="solid"/>
           </a:ln>
@@ -10793,8 +11845,8 @@
         </p:nvSpPr>
         <p:spPr>
           <a:xfrm>
-            <a:off x="685800" y="3849624"/>
-            <a:ext cx="868680" cy="402336"/>
+            <a:off x="868680" y="3191256"/>
+            <a:ext cx="4914900" cy="310896"/>
           </a:xfrm>
           <a:prstGeom prst="rect">
             <a:avLst/>
@@ -10806,53 +11858,11 @@
           <a:bodyPr wrap="square" lIns="0" tIns="0" rIns="0" bIns="0" rtlCol="0" anchor="ctr"/>
           <a:lstStyle/>
           <a:p>
-            <a:pPr algn="ctr" indent="0" marL="0">
-              <a:buNone/>
-            </a:pPr>
-            <a:r>
-              <a:rPr lang="en-US" sz="1300" b="1" dirty="0">
-                <a:solidFill>
-                  <a:srgbClr val="0B5CAD"/>
-                </a:solidFill>
-                <a:latin typeface="Courier New" pitchFamily="34" charset="0"/>
-                <a:ea typeface="Courier New" pitchFamily="34" charset="-122"/>
-                <a:cs typeface="Courier New" pitchFamily="34" charset="-120"/>
-              </a:rPr>
-              <a:t>5-3</a:t>
-            </a:r>
-            <a:endParaRPr lang="en-US" sz="1300" dirty="0"/>
-          </a:p>
-        </p:txBody>
-      </p:sp>
-      <p:sp>
-        <p:nvSpPr>
-          <p:cNvPr id="13" name="Text 11"/>
-          <p:cNvSpPr/>
-          <p:nvPr/>
-        </p:nvSpPr>
-        <p:spPr>
-          <a:xfrm>
-            <a:off x="1783080" y="3831336"/>
-            <a:ext cx="9692640" cy="932688"/>
-          </a:xfrm>
-          <a:prstGeom prst="rect">
-            <a:avLst/>
-          </a:prstGeom>
-          <a:noFill/>
-          <a:ln/>
-        </p:spPr>
-        <p:txBody>
-          <a:bodyPr wrap="square" lIns="0" tIns="0" rIns="0" bIns="0" rtlCol="0" anchor="t"/>
-          <a:lstStyle/>
-          <a:p>
             <a:pPr indent="0" marL="0">
-              <a:lnSpc>
-                <a:spcPts val="2100"/>
-              </a:lnSpc>
-              <a:buNone/>
-            </a:pPr>
-            <a:r>
-              <a:rPr lang="en-US" sz="1400" dirty="0">
+              <a:buNone/>
+            </a:pPr>
+            <a:r>
+              <a:rPr lang="en-US" sz="1400" b="1" dirty="0">
                 <a:solidFill>
                   <a:srgbClr val="16191D"/>
                 </a:solidFill>
@@ -10860,7 +11870,7 @@
                 <a:ea typeface="Yu Gothic" pitchFamily="34" charset="-122"/>
                 <a:cs typeface="Yu Gothic" pitchFamily="34" charset="-120"/>
               </a:rPr>
-              <a:t>仮想記憶がもたらす利点を3つ挙げ、それぞれ「なかったら何が困るか」を述べよ。</a:t>
+              <a:t>GPU</a:t>
             </a:r>
             <a:endParaRPr lang="en-US" sz="1400" dirty="0"/>
           </a:p>
@@ -10868,26 +11878,68 @@
       </p:sp>
       <p:sp>
         <p:nvSpPr>
+          <p:cNvPr id="13" name="Text 11"/>
+          <p:cNvSpPr/>
+          <p:nvPr/>
+        </p:nvSpPr>
+        <p:spPr>
+          <a:xfrm>
+            <a:off x="868680" y="3538728"/>
+            <a:ext cx="4914900" cy="731520"/>
+          </a:xfrm>
+          <a:prstGeom prst="rect">
+            <a:avLst/>
+          </a:prstGeom>
+          <a:noFill/>
+          <a:ln/>
+        </p:spPr>
+        <p:txBody>
+          <a:bodyPr wrap="square" lIns="0" tIns="0" rIns="0" bIns="0" rtlCol="0" anchor="t"/>
+          <a:lstStyle/>
+          <a:p>
+            <a:pPr indent="0" marL="0">
+              <a:lnSpc>
+                <a:spcPts val="1600"/>
+              </a:lnSpc>
+              <a:buNone/>
+            </a:pPr>
+            <a:r>
+              <a:rPr lang="en-US" sz="1200" dirty="0">
+                <a:solidFill>
+                  <a:srgbClr val="5F6672"/>
+                </a:solidFill>
+                <a:latin typeface="Yu Gothic" pitchFamily="34" charset="0"/>
+                <a:ea typeface="Yu Gothic" pitchFamily="34" charset="-122"/>
+                <a:cs typeface="Yu Gothic" pitchFamily="34" charset="-120"/>
+              </a:rPr>
+              <a:t>SIMD を極端に推し進めたもの。単純なコアを数千〜数万。深層学習が使うのはこのため</a:t>
+            </a:r>
+            <a:endParaRPr lang="en-US" sz="1200" dirty="0"/>
+          </a:p>
+        </p:txBody>
+      </p:sp>
+      <p:sp>
+        <p:nvSpPr>
           <p:cNvPr id="14" name="Shape 12"/>
           <p:cNvSpPr/>
           <p:nvPr/>
         </p:nvSpPr>
         <p:spPr>
           <a:xfrm>
-            <a:off x="685800" y="4928616"/>
-            <a:ext cx="868680" cy="402336"/>
+            <a:off x="6195060" y="3054096"/>
+            <a:ext cx="5280660" cy="1371600"/>
           </a:xfrm>
           <a:prstGeom prst="roundRect">
             <a:avLst>
-              <a:gd name="adj" fmla="val 18182"/>
+              <a:gd name="adj" fmla="val 4000"/>
             </a:avLst>
           </a:prstGeom>
           <a:solidFill>
-            <a:srgbClr val="D9E6F4"/>
+            <a:srgbClr val="EEF1F5"/>
           </a:solidFill>
           <a:ln w="12700">
             <a:solidFill>
-              <a:srgbClr val="0B5CAD"/>
+              <a:srgbClr val="DDE4EC"/>
             </a:solidFill>
             <a:prstDash val="solid"/>
           </a:ln>
@@ -10901,8 +11953,8 @@
         </p:nvSpPr>
         <p:spPr>
           <a:xfrm>
-            <a:off x="685800" y="4928616"/>
-            <a:ext cx="868680" cy="402336"/>
+            <a:off x="6377940" y="3191256"/>
+            <a:ext cx="4914900" cy="310896"/>
           </a:xfrm>
           <a:prstGeom prst="rect">
             <a:avLst/>
@@ -10914,53 +11966,11 @@
           <a:bodyPr wrap="square" lIns="0" tIns="0" rIns="0" bIns="0" rtlCol="0" anchor="ctr"/>
           <a:lstStyle/>
           <a:p>
-            <a:pPr algn="ctr" indent="0" marL="0">
-              <a:buNone/>
-            </a:pPr>
-            <a:r>
-              <a:rPr lang="en-US" sz="1300" b="1" dirty="0">
-                <a:solidFill>
-                  <a:srgbClr val="0B5CAD"/>
-                </a:solidFill>
-                <a:latin typeface="Courier New" pitchFamily="34" charset="0"/>
-                <a:ea typeface="Courier New" pitchFamily="34" charset="-122"/>
-                <a:cs typeface="Courier New" pitchFamily="34" charset="-120"/>
-              </a:rPr>
-              <a:t>5-4</a:t>
-            </a:r>
-            <a:endParaRPr lang="en-US" sz="1300" dirty="0"/>
-          </a:p>
-        </p:txBody>
-      </p:sp>
-      <p:sp>
-        <p:nvSpPr>
-          <p:cNvPr id="16" name="Text 14"/>
-          <p:cNvSpPr/>
-          <p:nvPr/>
-        </p:nvSpPr>
-        <p:spPr>
-          <a:xfrm>
-            <a:off x="1783080" y="4910328"/>
-            <a:ext cx="9692640" cy="932688"/>
-          </a:xfrm>
-          <a:prstGeom prst="rect">
-            <a:avLst/>
-          </a:prstGeom>
-          <a:noFill/>
-          <a:ln/>
-        </p:spPr>
-        <p:txBody>
-          <a:bodyPr wrap="square" lIns="0" tIns="0" rIns="0" bIns="0" rtlCol="0" anchor="t"/>
-          <a:lstStyle/>
-          <a:p>
             <a:pPr indent="0" marL="0">
-              <a:lnSpc>
-                <a:spcPts val="2100"/>
-              </a:lnSpc>
-              <a:buNone/>
-            </a:pPr>
-            <a:r>
-              <a:rPr lang="en-US" sz="1400" dirty="0">
+              <a:buNone/>
+            </a:pPr>
+            <a:r>
+              <a:rPr lang="en-US" sz="1400" b="1" dirty="0">
                 <a:solidFill>
                   <a:srgbClr val="16191D"/>
                 </a:solidFill>
@@ -10968,9 +11978,93 @@
                 <a:ea typeface="Yu Gothic" pitchFamily="34" charset="-122"/>
                 <a:cs typeface="Yu Gothic" pitchFamily="34" charset="-120"/>
               </a:rPr>
-              <a:t>実行時間の 80% は並列化でき、20% は逐次実行しかできない。(a) 4コアでの高速化率は何倍か (b) コア数を無限にしたときの上限は何倍か。</a:t>
+              <a:t>マルチコア</a:t>
             </a:r>
             <a:endParaRPr lang="en-US" sz="1400" dirty="0"/>
+          </a:p>
+        </p:txBody>
+      </p:sp>
+      <p:sp>
+        <p:nvSpPr>
+          <p:cNvPr id="16" name="Text 14"/>
+          <p:cNvSpPr/>
+          <p:nvPr/>
+        </p:nvSpPr>
+        <p:spPr>
+          <a:xfrm>
+            <a:off x="6377940" y="3538728"/>
+            <a:ext cx="4914900" cy="731520"/>
+          </a:xfrm>
+          <a:prstGeom prst="rect">
+            <a:avLst/>
+          </a:prstGeom>
+          <a:noFill/>
+          <a:ln/>
+        </p:spPr>
+        <p:txBody>
+          <a:bodyPr wrap="square" lIns="0" tIns="0" rIns="0" bIns="0" rtlCol="0" anchor="t"/>
+          <a:lstStyle/>
+          <a:p>
+            <a:pPr indent="0" marL="0">
+              <a:lnSpc>
+                <a:spcPts val="1600"/>
+              </a:lnSpc>
+              <a:buNone/>
+            </a:pPr>
+            <a:r>
+              <a:rPr lang="en-US" sz="1200" dirty="0">
+                <a:solidFill>
+                  <a:srgbClr val="5F6672"/>
+                </a:solidFill>
+                <a:latin typeface="Yu Gothic" pitchFamily="34" charset="0"/>
+                <a:ea typeface="Yu Gothic" pitchFamily="34" charset="-122"/>
+                <a:cs typeface="Yu Gothic" pitchFamily="34" charset="-120"/>
+              </a:rPr>
+              <a:t>別々のスレッドを同時に実行する。ハードウェア任せにできず、プログラム側の対応が要る</a:t>
+            </a:r>
+            <a:endParaRPr lang="en-US" sz="1200" dirty="0"/>
+          </a:p>
+        </p:txBody>
+      </p:sp>
+      <p:sp>
+        <p:nvSpPr>
+          <p:cNvPr id="17" name="Text 15"/>
+          <p:cNvSpPr/>
+          <p:nvPr/>
+        </p:nvSpPr>
+        <p:spPr>
+          <a:xfrm>
+            <a:off x="685800" y="5029200"/>
+            <a:ext cx="10789920" cy="512064"/>
+          </a:xfrm>
+          <a:prstGeom prst="rect">
+            <a:avLst/>
+          </a:prstGeom>
+          <a:noFill/>
+          <a:ln/>
+        </p:spPr>
+        <p:txBody>
+          <a:bodyPr wrap="square" lIns="0" tIns="0" rIns="0" bIns="0" rtlCol="0" anchor="ctr"/>
+          <a:lstStyle/>
+          <a:p>
+            <a:pPr indent="0" marL="0">
+              <a:lnSpc>
+                <a:spcPts val="1900"/>
+              </a:lnSpc>
+              <a:buNone/>
+            </a:pPr>
+            <a:r>
+              <a:rPr lang="en-US" sz="1300" b="1" dirty="0">
+                <a:solidFill>
+                  <a:srgbClr val="0B5CAD"/>
+                </a:solidFill>
+                <a:latin typeface="Yu Gothic" pitchFamily="34" charset="0"/>
+                <a:ea typeface="Yu Gothic" pitchFamily="34" charset="-122"/>
+                <a:cs typeface="Yu Gothic" pitchFamily="34" charset="-120"/>
+              </a:rPr>
+              <a:t>(1)〜(3) はハードウェアが勝手にやってくれる。マルチコアだけは、1スレッドのプログラムだとコアが100個あっても1個しか使わない。</a:t>
+            </a:r>
+            <a:endParaRPr lang="en-US" sz="1300" dirty="0"/>
           </a:p>
         </p:txBody>
       </p:sp>
@@ -10985,6 +12079,1159 @@
 <file path=ppt/slides/slide21.xml><?xml version="1.0" encoding="utf-8"?>
 <p:sld xmlns:a="http://schemas.openxmlformats.org/drawingml/2006/main" xmlns:r="http://schemas.openxmlformats.org/officeDocument/2006/relationships" xmlns:p="http://schemas.openxmlformats.org/presentationml/2006/main">
   <p:cSld name="Slide 21">
+    <p:bg>
+      <p:bgPr>
+        <a:solidFill>
+          <a:srgbClr val="FFFFFF"/>
+        </a:solidFill>
+      </p:bgPr>
+    </p:bg>
+    <p:spTree>
+      <p:nvGrpSpPr>
+        <p:cNvPr id="1" name=""/>
+        <p:cNvGrpSpPr/>
+        <p:nvPr/>
+      </p:nvGrpSpPr>
+      <p:grpSpPr>
+        <a:xfrm>
+          <a:off x="0" y="0"/>
+          <a:ext cx="0" cy="0"/>
+          <a:chOff x="0" y="0"/>
+          <a:chExt cx="0" cy="0"/>
+        </a:xfrm>
+      </p:grpSpPr>
+      <p:sp>
+        <p:nvSpPr>
+          <p:cNvPr id="2" name="Text 0"/>
+          <p:cNvSpPr/>
+          <p:nvPr/>
+        </p:nvSpPr>
+        <p:spPr>
+          <a:xfrm>
+            <a:off x="566928" y="310896"/>
+            <a:ext cx="4572000" cy="256032"/>
+          </a:xfrm>
+          <a:prstGeom prst="rect">
+            <a:avLst/>
+          </a:prstGeom>
+          <a:noFill/>
+          <a:ln/>
+        </p:spPr>
+        <p:txBody>
+          <a:bodyPr wrap="square" lIns="0" tIns="0" rIns="0" bIns="0" rtlCol="0" anchor="ctr"/>
+          <a:lstStyle/>
+          <a:p>
+            <a:pPr indent="0" marL="0">
+              <a:buNone/>
+            </a:pPr>
+            <a:r>
+              <a:rPr lang="en-US" sz="1200" b="1" dirty="0">
+                <a:solidFill>
+                  <a:srgbClr val="0B5CAD"/>
+                </a:solidFill>
+                <a:latin typeface="Yu Gothic" pitchFamily="34" charset="0"/>
+                <a:ea typeface="Yu Gothic" pitchFamily="34" charset="-122"/>
+                <a:cs typeface="Yu Gothic" pitchFamily="34" charset="-120"/>
+              </a:rPr>
+              <a:t>5.4　並列性</a:t>
+            </a:r>
+            <a:endParaRPr lang="en-US" sz="1200" dirty="0"/>
+          </a:p>
+        </p:txBody>
+      </p:sp>
+      <p:sp>
+        <p:nvSpPr>
+          <p:cNvPr id="3" name="Text 1"/>
+          <p:cNvSpPr/>
+          <p:nvPr/>
+        </p:nvSpPr>
+        <p:spPr>
+          <a:xfrm>
+            <a:off x="548640" y="603504"/>
+            <a:ext cx="11064240" cy="731520"/>
+          </a:xfrm>
+          <a:prstGeom prst="rect">
+            <a:avLst/>
+          </a:prstGeom>
+          <a:noFill/>
+          <a:ln/>
+        </p:spPr>
+        <p:txBody>
+          <a:bodyPr wrap="square" lIns="0" tIns="0" rIns="0" bIns="0" rtlCol="0" anchor="t"/>
+          <a:lstStyle/>
+          <a:p>
+            <a:pPr indent="0" marL="0">
+              <a:buNone/>
+            </a:pPr>
+            <a:r>
+              <a:rPr lang="en-US" sz="3000" b="1" dirty="0">
+                <a:solidFill>
+                  <a:srgbClr val="16191D"/>
+                </a:solidFill>
+                <a:latin typeface="Yu Gothic" pitchFamily="34" charset="0"/>
+                <a:ea typeface="Yu Gothic" pitchFamily="34" charset="-122"/>
+                <a:cs typeface="Yu Gothic" pitchFamily="34" charset="-120"/>
+              </a:rPr>
+              <a:t>アムダールの法則</a:t>
+            </a:r>
+            <a:endParaRPr lang="en-US" sz="3000" dirty="0"/>
+          </a:p>
+        </p:txBody>
+      </p:sp>
+      <p:sp>
+        <p:nvSpPr>
+          <p:cNvPr id="4" name="Text 2"/>
+          <p:cNvSpPr/>
+          <p:nvPr/>
+        </p:nvSpPr>
+        <p:spPr>
+          <a:xfrm>
+            <a:off x="11247120" y="6355080"/>
+            <a:ext cx="548640" cy="274320"/>
+          </a:xfrm>
+          <a:prstGeom prst="rect">
+            <a:avLst/>
+          </a:prstGeom>
+          <a:noFill/>
+          <a:ln/>
+        </p:spPr>
+        <p:txBody>
+          <a:bodyPr wrap="square" lIns="0" tIns="0" rIns="0" bIns="0" rtlCol="0" anchor="ctr"/>
+          <a:lstStyle/>
+          <a:p>
+            <a:pPr algn="r" indent="0" marL="0">
+              <a:buNone/>
+            </a:pPr>
+            <a:r>
+              <a:rPr lang="en-US" sz="1000" dirty="0">
+                <a:solidFill>
+                  <a:srgbClr val="5F6672"/>
+                </a:solidFill>
+                <a:latin typeface="Yu Gothic" pitchFamily="34" charset="0"/>
+                <a:ea typeface="Yu Gothic" pitchFamily="34" charset="-122"/>
+                <a:cs typeface="Yu Gothic" pitchFamily="34" charset="-120"/>
+              </a:rPr>
+              <a:t>21</a:t>
+            </a:r>
+            <a:endParaRPr lang="en-US" sz="1000" dirty="0"/>
+          </a:p>
+        </p:txBody>
+      </p:sp>
+      <p:sp>
+        <p:nvSpPr>
+          <p:cNvPr id="5" name="Text 3"/>
+          <p:cNvSpPr/>
+          <p:nvPr/>
+        </p:nvSpPr>
+        <p:spPr>
+          <a:xfrm>
+            <a:off x="685800" y="1481328"/>
+            <a:ext cx="10789920" cy="365760"/>
+          </a:xfrm>
+          <a:prstGeom prst="rect">
+            <a:avLst/>
+          </a:prstGeom>
+          <a:noFill/>
+          <a:ln/>
+        </p:spPr>
+        <p:txBody>
+          <a:bodyPr wrap="square" lIns="0" tIns="0" rIns="0" bIns="0" rtlCol="0" anchor="ctr"/>
+          <a:lstStyle/>
+          <a:p>
+            <a:pPr indent="0" marL="0">
+              <a:lnSpc>
+                <a:spcPts val="2200"/>
+              </a:lnSpc>
+              <a:buNone/>
+            </a:pPr>
+            <a:r>
+              <a:rPr lang="en-US" sz="1500" dirty="0">
+                <a:solidFill>
+                  <a:srgbClr val="16191D"/>
+                </a:solidFill>
+                <a:latin typeface="Yu Gothic" pitchFamily="34" charset="0"/>
+                <a:ea typeface="Yu Gothic" pitchFamily="34" charset="-122"/>
+                <a:cs typeface="Yu Gothic" pitchFamily="34" charset="-120"/>
+              </a:rPr>
+              <a:t>並列化できる割合を p、コア数を n とすると、高速化率は S = 1 / ((1 − p) + p/n)。</a:t>
+            </a:r>
+            <a:endParaRPr lang="en-US" sz="1500" dirty="0"/>
+          </a:p>
+        </p:txBody>
+      </p:sp>
+      <p:pic>
+        <p:nvPicPr>
+          <p:cNvPr id="6" name="Image 0" descr="/Users/koide/Documents/Playground/CompOutline/slides/png/fig-05-06.png">    </p:cNvPr>
+          <p:cNvPicPr>
+            <a:picLocks noChangeAspect="1"/>
+          </p:cNvPicPr>
+          <p:nvPr/>
+        </p:nvPicPr>
+        <p:blipFill>
+          <a:blip r:embed="rId1"/>
+          <a:stretch>
+            <a:fillRect/>
+          </a:stretch>
+        </p:blipFill>
+        <p:spPr>
+          <a:xfrm>
+            <a:off x="3018434" y="1883664"/>
+            <a:ext cx="6124651" cy="3602736"/>
+          </a:xfrm>
+          <a:prstGeom prst="rect">
+            <a:avLst/>
+          </a:prstGeom>
+        </p:spPr>
+      </p:pic>
+      <p:sp>
+        <p:nvSpPr>
+          <p:cNvPr id="7" name="Text 4"/>
+          <p:cNvSpPr/>
+          <p:nvPr/>
+        </p:nvSpPr>
+        <p:spPr>
+          <a:xfrm>
+            <a:off x="685800" y="5687568"/>
+            <a:ext cx="10789920" cy="365760"/>
+          </a:xfrm>
+          <a:prstGeom prst="rect">
+            <a:avLst/>
+          </a:prstGeom>
+          <a:noFill/>
+          <a:ln/>
+        </p:spPr>
+        <p:txBody>
+          <a:bodyPr wrap="square" lIns="0" tIns="0" rIns="0" bIns="0" rtlCol="0" anchor="ctr"/>
+          <a:lstStyle/>
+          <a:p>
+            <a:pPr algn="ctr" indent="0" marL="0">
+              <a:buNone/>
+            </a:pPr>
+            <a:r>
+              <a:rPr lang="en-US" sz="1500" dirty="0">
+                <a:solidFill>
+                  <a:srgbClr val="16191D"/>
+                </a:solidFill>
+                <a:latin typeface="Yu Gothic" pitchFamily="34" charset="0"/>
+                <a:ea typeface="Yu Gothic" pitchFamily="34" charset="-122"/>
+                <a:cs typeface="Yu Gothic" pitchFamily="34" charset="-120"/>
+              </a:rPr>
+              <a:t>n を無限に大きくしても、S は 1/(1−p) を超えない。</a:t>
+            </a:r>
+            <a:endParaRPr lang="en-US" sz="1500" dirty="0"/>
+          </a:p>
+        </p:txBody>
+      </p:sp>
+    </p:spTree>
+  </p:cSld>
+  <p:clrMapOvr>
+    <a:masterClrMapping/>
+  </p:clrMapOvr>
+</p:sld>
+</file>
+
+<file path=ppt/slides/slide22.xml><?xml version="1.0" encoding="utf-8"?>
+<p:sld xmlns:a="http://schemas.openxmlformats.org/drawingml/2006/main" xmlns:r="http://schemas.openxmlformats.org/officeDocument/2006/relationships" xmlns:p="http://schemas.openxmlformats.org/presentationml/2006/main">
+  <p:cSld name="Slide 22">
+    <p:bg>
+      <p:bgPr>
+        <a:solidFill>
+          <a:srgbClr val="FFFFFF"/>
+        </a:solidFill>
+      </p:bgPr>
+    </p:bg>
+    <p:spTree>
+      <p:nvGrpSpPr>
+        <p:cNvPr id="1" name=""/>
+        <p:cNvGrpSpPr/>
+        <p:nvPr/>
+      </p:nvGrpSpPr>
+      <p:grpSpPr>
+        <a:xfrm>
+          <a:off x="0" y="0"/>
+          <a:ext cx="0" cy="0"/>
+          <a:chOff x="0" y="0"/>
+          <a:chExt cx="0" cy="0"/>
+        </a:xfrm>
+      </p:grpSpPr>
+      <p:sp>
+        <p:nvSpPr>
+          <p:cNvPr id="2" name="Text 0"/>
+          <p:cNvSpPr/>
+          <p:nvPr/>
+        </p:nvSpPr>
+        <p:spPr>
+          <a:xfrm>
+            <a:off x="566928" y="310896"/>
+            <a:ext cx="4572000" cy="256032"/>
+          </a:xfrm>
+          <a:prstGeom prst="rect">
+            <a:avLst/>
+          </a:prstGeom>
+          <a:noFill/>
+          <a:ln/>
+        </p:spPr>
+        <p:txBody>
+          <a:bodyPr wrap="square" lIns="0" tIns="0" rIns="0" bIns="0" rtlCol="0" anchor="ctr"/>
+          <a:lstStyle/>
+          <a:p>
+            <a:pPr indent="0" marL="0">
+              <a:buNone/>
+            </a:pPr>
+            <a:r>
+              <a:rPr lang="en-US" sz="1200" b="1" dirty="0">
+                <a:solidFill>
+                  <a:srgbClr val="0B5CAD"/>
+                </a:solidFill>
+                <a:latin typeface="Yu Gothic" pitchFamily="34" charset="0"/>
+                <a:ea typeface="Yu Gothic" pitchFamily="34" charset="-122"/>
+                <a:cs typeface="Yu Gothic" pitchFamily="34" charset="-120"/>
+              </a:rPr>
+              <a:t>5.4　並列性</a:t>
+            </a:r>
+            <a:endParaRPr lang="en-US" sz="1200" dirty="0"/>
+          </a:p>
+        </p:txBody>
+      </p:sp>
+      <p:sp>
+        <p:nvSpPr>
+          <p:cNvPr id="3" name="Text 1"/>
+          <p:cNvSpPr/>
+          <p:nvPr/>
+        </p:nvSpPr>
+        <p:spPr>
+          <a:xfrm>
+            <a:off x="548640" y="603504"/>
+            <a:ext cx="11064240" cy="731520"/>
+          </a:xfrm>
+          <a:prstGeom prst="rect">
+            <a:avLst/>
+          </a:prstGeom>
+          <a:noFill/>
+          <a:ln/>
+        </p:spPr>
+        <p:txBody>
+          <a:bodyPr wrap="square" lIns="0" tIns="0" rIns="0" bIns="0" rtlCol="0" anchor="t"/>
+          <a:lstStyle/>
+          <a:p>
+            <a:pPr indent="0" marL="0">
+              <a:buNone/>
+            </a:pPr>
+            <a:r>
+              <a:rPr lang="en-US" sz="3000" b="1" dirty="0">
+                <a:solidFill>
+                  <a:srgbClr val="16191D"/>
+                </a:solidFill>
+                <a:latin typeface="Yu Gothic" pitchFamily="34" charset="0"/>
+                <a:ea typeface="Yu Gothic" pitchFamily="34" charset="-122"/>
+                <a:cs typeface="Yu Gothic" pitchFamily="34" charset="-120"/>
+              </a:rPr>
+              <a:t>並列プログラムが難しい理由</a:t>
+            </a:r>
+            <a:endParaRPr lang="en-US" sz="3000" dirty="0"/>
+          </a:p>
+        </p:txBody>
+      </p:sp>
+      <p:sp>
+        <p:nvSpPr>
+          <p:cNvPr id="4" name="Text 2"/>
+          <p:cNvSpPr/>
+          <p:nvPr/>
+        </p:nvSpPr>
+        <p:spPr>
+          <a:xfrm>
+            <a:off x="11247120" y="6355080"/>
+            <a:ext cx="548640" cy="274320"/>
+          </a:xfrm>
+          <a:prstGeom prst="rect">
+            <a:avLst/>
+          </a:prstGeom>
+          <a:noFill/>
+          <a:ln/>
+        </p:spPr>
+        <p:txBody>
+          <a:bodyPr wrap="square" lIns="0" tIns="0" rIns="0" bIns="0" rtlCol="0" anchor="ctr"/>
+          <a:lstStyle/>
+          <a:p>
+            <a:pPr algn="r" indent="0" marL="0">
+              <a:buNone/>
+            </a:pPr>
+            <a:r>
+              <a:rPr lang="en-US" sz="1000" dirty="0">
+                <a:solidFill>
+                  <a:srgbClr val="5F6672"/>
+                </a:solidFill>
+                <a:latin typeface="Yu Gothic" pitchFamily="34" charset="0"/>
+                <a:ea typeface="Yu Gothic" pitchFamily="34" charset="-122"/>
+                <a:cs typeface="Yu Gothic" pitchFamily="34" charset="-120"/>
+              </a:rPr>
+              <a:t>22</a:t>
+            </a:r>
+            <a:endParaRPr lang="en-US" sz="1000" dirty="0"/>
+          </a:p>
+        </p:txBody>
+      </p:sp>
+      <p:sp>
+        <p:nvSpPr>
+          <p:cNvPr id="5" name="Text 3"/>
+          <p:cNvSpPr/>
+          <p:nvPr/>
+        </p:nvSpPr>
+        <p:spPr>
+          <a:xfrm>
+            <a:off x="822960" y="1481328"/>
+            <a:ext cx="10515600" cy="3090672"/>
+          </a:xfrm>
+          <a:prstGeom prst="rect">
+            <a:avLst/>
+          </a:prstGeom>
+          <a:noFill/>
+          <a:ln/>
+        </p:spPr>
+        <p:txBody>
+          <a:bodyPr wrap="square" lIns="0" tIns="0" rIns="0" bIns="0" rtlCol="0" anchor="t"/>
+          <a:lstStyle/>
+          <a:p>
+            <a:pPr marL="342900" indent="-342900">
+              <a:spcAft>
+                <a:spcPts val="1000"/>
+              </a:spcAft>
+              <a:buSzPct val="100000"/>
+              <a:buChar char="•"/>
+            </a:pPr>
+            <a:r>
+              <a:rPr lang="en-US" sz="1600" dirty="0">
+                <a:solidFill>
+                  <a:srgbClr val="16191D"/>
+                </a:solidFill>
+                <a:latin typeface="Yu Gothic" pitchFamily="34" charset="0"/>
+                <a:ea typeface="Yu Gothic" pitchFamily="34" charset="-122"/>
+                <a:cs typeface="Yu Gothic" pitchFamily="34" charset="-120"/>
+              </a:rPr>
+              <a:t>依存関係 — どの計算がどの計算の結果を必要とするか</a:t>
+            </a:r>
+            <a:endParaRPr lang="en-US" sz="1600" dirty="0"/>
+          </a:p>
+          <a:p>
+            <a:pPr marL="342900" indent="-342900">
+              <a:spcAft>
+                <a:spcPts val="1000"/>
+              </a:spcAft>
+              <a:buSzPct val="100000"/>
+              <a:buChar char="•"/>
+            </a:pPr>
+            <a:r>
+              <a:rPr lang="en-US" sz="1600" dirty="0">
+                <a:solidFill>
+                  <a:srgbClr val="16191D"/>
+                </a:solidFill>
+                <a:latin typeface="Yu Gothic" pitchFamily="34" charset="0"/>
+                <a:ea typeface="Yu Gothic" pitchFamily="34" charset="-122"/>
+                <a:cs typeface="Yu Gothic" pitchFamily="34" charset="-120"/>
+              </a:rPr>
+              <a:t>データの共有と競合 — 2つのスレッドが同じ変数を同時に書き換えると壊れる</a:t>
+            </a:r>
+            <a:endParaRPr lang="en-US" sz="1600" dirty="0"/>
+          </a:p>
+          <a:p>
+            <a:pPr marL="342900" indent="-342900">
+              <a:spcAft>
+                <a:spcPts val="1000"/>
+              </a:spcAft>
+              <a:buSzPct val="100000"/>
+              <a:buChar char="•"/>
+            </a:pPr>
+            <a:r>
+              <a:rPr lang="en-US" sz="1600" dirty="0">
+                <a:solidFill>
+                  <a:srgbClr val="16191D"/>
+                </a:solidFill>
+                <a:latin typeface="Yu Gothic" pitchFamily="34" charset="0"/>
+                <a:ea typeface="Yu Gothic" pitchFamily="34" charset="-122"/>
+                <a:cs typeface="Yu Gothic" pitchFamily="34" charset="-120"/>
+              </a:rPr>
+              <a:t>同期のコスト — 待ち合わせそのものに時間がかかる</a:t>
+            </a:r>
+            <a:endParaRPr lang="en-US" sz="1600" dirty="0"/>
+          </a:p>
+          <a:p>
+            <a:pPr marL="342900" indent="-342900">
+              <a:spcAft>
+                <a:spcPts val="1000"/>
+              </a:spcAft>
+              <a:buSzPct val="100000"/>
+              <a:buChar char="•"/>
+            </a:pPr>
+            <a:r>
+              <a:rPr lang="en-US" sz="1600" dirty="0">
+                <a:solidFill>
+                  <a:srgbClr val="16191D"/>
+                </a:solidFill>
+                <a:latin typeface="Yu Gothic" pitchFamily="34" charset="0"/>
+                <a:ea typeface="Yu Gothic" pitchFamily="34" charset="-122"/>
+                <a:cs typeface="Yu Gothic" pitchFamily="34" charset="-120"/>
+              </a:rPr>
+              <a:t>デッドロック — 互いに相手の資源を待って永久に止まる</a:t>
+            </a:r>
+            <a:endParaRPr lang="en-US" sz="1600" dirty="0"/>
+          </a:p>
+          <a:p>
+            <a:pPr marL="342900" indent="-342900">
+              <a:spcAft>
+                <a:spcPts val="1000"/>
+              </a:spcAft>
+              <a:buSzPct val="100000"/>
+              <a:buChar char="•"/>
+            </a:pPr>
+            <a:r>
+              <a:rPr lang="en-US" sz="1600" dirty="0">
+                <a:solidFill>
+                  <a:srgbClr val="16191D"/>
+                </a:solidFill>
+                <a:latin typeface="Yu Gothic" pitchFamily="34" charset="0"/>
+                <a:ea typeface="Yu Gothic" pitchFamily="34" charset="-122"/>
+                <a:cs typeface="Yu Gothic" pitchFamily="34" charset="-120"/>
+              </a:rPr>
+              <a:t>再現しないバグ — タイミング依存の不具合は、実行するたびに現れたり消えたりする</a:t>
+            </a:r>
+            <a:endParaRPr lang="en-US" sz="1600" dirty="0"/>
+          </a:p>
+        </p:txBody>
+      </p:sp>
+      <p:sp>
+        <p:nvSpPr>
+          <p:cNvPr id="6" name="Text 4"/>
+          <p:cNvSpPr/>
+          <p:nvPr/>
+        </p:nvSpPr>
+        <p:spPr>
+          <a:xfrm>
+            <a:off x="685800" y="4754880"/>
+            <a:ext cx="10789920" cy="512064"/>
+          </a:xfrm>
+          <a:prstGeom prst="rect">
+            <a:avLst/>
+          </a:prstGeom>
+          <a:noFill/>
+          <a:ln/>
+        </p:spPr>
+        <p:txBody>
+          <a:bodyPr wrap="square" lIns="0" tIns="0" rIns="0" bIns="0" rtlCol="0" anchor="ctr"/>
+          <a:lstStyle/>
+          <a:p>
+            <a:pPr indent="0" marL="0">
+              <a:lnSpc>
+                <a:spcPts val="1900"/>
+              </a:lnSpc>
+              <a:buNone/>
+            </a:pPr>
+            <a:r>
+              <a:rPr lang="en-US" sz="1300" b="1" dirty="0">
+                <a:solidFill>
+                  <a:srgbClr val="0B5CAD"/>
+                </a:solidFill>
+                <a:latin typeface="Yu Gothic" pitchFamily="34" charset="0"/>
+                <a:ea typeface="Yu Gothic" pitchFamily="34" charset="-122"/>
+                <a:cs typeface="Yu Gothic" pitchFamily="34" charset="-120"/>
+              </a:rPr>
+              <a:t>これらへの対処は第7回（プロセスとスレッド）で扱う。</a:t>
+            </a:r>
+            <a:endParaRPr lang="en-US" sz="1300" dirty="0"/>
+          </a:p>
+        </p:txBody>
+      </p:sp>
+    </p:spTree>
+  </p:cSld>
+  <p:clrMapOvr>
+    <a:masterClrMapping/>
+  </p:clrMapOvr>
+</p:sld>
+</file>
+
+<file path=ppt/slides/slide23.xml><?xml version="1.0" encoding="utf-8"?>
+<p:sld xmlns:a="http://schemas.openxmlformats.org/drawingml/2006/main" xmlns:r="http://schemas.openxmlformats.org/officeDocument/2006/relationships" xmlns:p="http://schemas.openxmlformats.org/presentationml/2006/main">
+  <p:cSld name="Slide 23">
+    <p:bg>
+      <p:bgPr>
+        <a:solidFill>
+          <a:srgbClr val="FFFFFF"/>
+        </a:solidFill>
+      </p:bgPr>
+    </p:bg>
+    <p:spTree>
+      <p:nvGrpSpPr>
+        <p:cNvPr id="1" name=""/>
+        <p:cNvGrpSpPr/>
+        <p:nvPr/>
+      </p:nvGrpSpPr>
+      <p:grpSpPr>
+        <a:xfrm>
+          <a:off x="0" y="0"/>
+          <a:ext cx="0" cy="0"/>
+          <a:chOff x="0" y="0"/>
+          <a:chExt cx="0" cy="0"/>
+        </a:xfrm>
+      </p:grpSpPr>
+      <p:sp>
+        <p:nvSpPr>
+          <p:cNvPr id="2" name="Text 0"/>
+          <p:cNvSpPr/>
+          <p:nvPr/>
+        </p:nvSpPr>
+        <p:spPr>
+          <a:xfrm>
+            <a:off x="566928" y="310896"/>
+            <a:ext cx="4572000" cy="256032"/>
+          </a:xfrm>
+          <a:prstGeom prst="rect">
+            <a:avLst/>
+          </a:prstGeom>
+          <a:noFill/>
+          <a:ln/>
+        </p:spPr>
+        <p:txBody>
+          <a:bodyPr wrap="square" lIns="0" tIns="0" rIns="0" bIns="0" rtlCol="0" anchor="ctr"/>
+          <a:lstStyle/>
+          <a:p>
+            <a:pPr indent="0" marL="0">
+              <a:buNone/>
+            </a:pPr>
+            <a:r>
+              <a:rPr lang="en-US" sz="1200" b="1" dirty="0">
+                <a:solidFill>
+                  <a:srgbClr val="0B5CAD"/>
+                </a:solidFill>
+                <a:latin typeface="Yu Gothic" pitchFamily="34" charset="0"/>
+                <a:ea typeface="Yu Gothic" pitchFamily="34" charset="-122"/>
+                <a:cs typeface="Yu Gothic" pitchFamily="34" charset="-120"/>
+              </a:rPr>
+              <a:t>第5回</a:t>
+            </a:r>
+            <a:endParaRPr lang="en-US" sz="1200" dirty="0"/>
+          </a:p>
+        </p:txBody>
+      </p:sp>
+      <p:sp>
+        <p:nvSpPr>
+          <p:cNvPr id="3" name="Text 1"/>
+          <p:cNvSpPr/>
+          <p:nvPr/>
+        </p:nvSpPr>
+        <p:spPr>
+          <a:xfrm>
+            <a:off x="548640" y="603504"/>
+            <a:ext cx="11064240" cy="731520"/>
+          </a:xfrm>
+          <a:prstGeom prst="rect">
+            <a:avLst/>
+          </a:prstGeom>
+          <a:noFill/>
+          <a:ln/>
+        </p:spPr>
+        <p:txBody>
+          <a:bodyPr wrap="square" lIns="0" tIns="0" rIns="0" bIns="0" rtlCol="0" anchor="t"/>
+          <a:lstStyle/>
+          <a:p>
+            <a:pPr indent="0" marL="0">
+              <a:buNone/>
+            </a:pPr>
+            <a:r>
+              <a:rPr lang="en-US" sz="3000" b="1" dirty="0">
+                <a:solidFill>
+                  <a:srgbClr val="16191D"/>
+                </a:solidFill>
+                <a:latin typeface="Yu Gothic" pitchFamily="34" charset="0"/>
+                <a:ea typeface="Yu Gothic" pitchFamily="34" charset="-122"/>
+                <a:cs typeface="Yu Gothic" pitchFamily="34" charset="-120"/>
+              </a:rPr>
+              <a:t>演習</a:t>
+            </a:r>
+            <a:endParaRPr lang="en-US" sz="3000" dirty="0"/>
+          </a:p>
+        </p:txBody>
+      </p:sp>
+      <p:sp>
+        <p:nvSpPr>
+          <p:cNvPr id="4" name="Text 2"/>
+          <p:cNvSpPr/>
+          <p:nvPr/>
+        </p:nvSpPr>
+        <p:spPr>
+          <a:xfrm>
+            <a:off x="11247120" y="6355080"/>
+            <a:ext cx="548640" cy="274320"/>
+          </a:xfrm>
+          <a:prstGeom prst="rect">
+            <a:avLst/>
+          </a:prstGeom>
+          <a:noFill/>
+          <a:ln/>
+        </p:spPr>
+        <p:txBody>
+          <a:bodyPr wrap="square" lIns="0" tIns="0" rIns="0" bIns="0" rtlCol="0" anchor="ctr"/>
+          <a:lstStyle/>
+          <a:p>
+            <a:pPr algn="r" indent="0" marL="0">
+              <a:buNone/>
+            </a:pPr>
+            <a:r>
+              <a:rPr lang="en-US" sz="1000" dirty="0">
+                <a:solidFill>
+                  <a:srgbClr val="5F6672"/>
+                </a:solidFill>
+                <a:latin typeface="Yu Gothic" pitchFamily="34" charset="0"/>
+                <a:ea typeface="Yu Gothic" pitchFamily="34" charset="-122"/>
+                <a:cs typeface="Yu Gothic" pitchFamily="34" charset="-120"/>
+              </a:rPr>
+              <a:t>23</a:t>
+            </a:r>
+            <a:endParaRPr lang="en-US" sz="1000" dirty="0"/>
+          </a:p>
+        </p:txBody>
+      </p:sp>
+      <p:sp>
+        <p:nvSpPr>
+          <p:cNvPr id="5" name="Shape 3"/>
+          <p:cNvSpPr/>
+          <p:nvPr/>
+        </p:nvSpPr>
+        <p:spPr>
+          <a:xfrm>
+            <a:off x="685800" y="1691640"/>
+            <a:ext cx="868680" cy="402336"/>
+          </a:xfrm>
+          <a:prstGeom prst="roundRect">
+            <a:avLst>
+              <a:gd name="adj" fmla="val 18182"/>
+            </a:avLst>
+          </a:prstGeom>
+          <a:solidFill>
+            <a:srgbClr val="D9E6F4"/>
+          </a:solidFill>
+          <a:ln w="12700">
+            <a:solidFill>
+              <a:srgbClr val="0B5CAD"/>
+            </a:solidFill>
+            <a:prstDash val="solid"/>
+          </a:ln>
+        </p:spPr>
+      </p:sp>
+      <p:sp>
+        <p:nvSpPr>
+          <p:cNvPr id="6" name="Text 4"/>
+          <p:cNvSpPr/>
+          <p:nvPr/>
+        </p:nvSpPr>
+        <p:spPr>
+          <a:xfrm>
+            <a:off x="685800" y="1691640"/>
+            <a:ext cx="868680" cy="402336"/>
+          </a:xfrm>
+          <a:prstGeom prst="rect">
+            <a:avLst/>
+          </a:prstGeom>
+          <a:noFill/>
+          <a:ln/>
+        </p:spPr>
+        <p:txBody>
+          <a:bodyPr wrap="square" lIns="0" tIns="0" rIns="0" bIns="0" rtlCol="0" anchor="ctr"/>
+          <a:lstStyle/>
+          <a:p>
+            <a:pPr algn="ctr" indent="0" marL="0">
+              <a:buNone/>
+            </a:pPr>
+            <a:r>
+              <a:rPr lang="en-US" sz="1300" b="1" dirty="0">
+                <a:solidFill>
+                  <a:srgbClr val="0B5CAD"/>
+                </a:solidFill>
+                <a:latin typeface="Courier New" pitchFamily="34" charset="0"/>
+                <a:ea typeface="Courier New" pitchFamily="34" charset="-122"/>
+                <a:cs typeface="Courier New" pitchFamily="34" charset="-120"/>
+              </a:rPr>
+              <a:t>5-1</a:t>
+            </a:r>
+            <a:endParaRPr lang="en-US" sz="1300" dirty="0"/>
+          </a:p>
+        </p:txBody>
+      </p:sp>
+      <p:sp>
+        <p:nvSpPr>
+          <p:cNvPr id="7" name="Text 5"/>
+          <p:cNvSpPr/>
+          <p:nvPr/>
+        </p:nvSpPr>
+        <p:spPr>
+          <a:xfrm>
+            <a:off x="1783080" y="1673352"/>
+            <a:ext cx="9692640" cy="932688"/>
+          </a:xfrm>
+          <a:prstGeom prst="rect">
+            <a:avLst/>
+          </a:prstGeom>
+          <a:noFill/>
+          <a:ln/>
+        </p:spPr>
+        <p:txBody>
+          <a:bodyPr wrap="square" lIns="0" tIns="0" rIns="0" bIns="0" rtlCol="0" anchor="t"/>
+          <a:lstStyle/>
+          <a:p>
+            <a:pPr indent="0" marL="0">
+              <a:lnSpc>
+                <a:spcPts val="2100"/>
+              </a:lnSpc>
+              <a:buNone/>
+            </a:pPr>
+            <a:r>
+              <a:rPr lang="en-US" sz="1400" dirty="0">
+                <a:solidFill>
+                  <a:srgbClr val="16191D"/>
+                </a:solidFill>
+                <a:latin typeface="Yu Gothic" pitchFamily="34" charset="0"/>
+                <a:ea typeface="Yu Gothic" pitchFamily="34" charset="-122"/>
+                <a:cs typeface="Yu Gothic" pitchFamily="34" charset="-120"/>
+              </a:rPr>
+              <a:t>キャッシュ参照時間 2ns、主記憶参照時間 100ns のシステムで、ヒット率が (a) 98% (b) 90% のとき実効アクセス時間をそれぞれ求めよ。</a:t>
+            </a:r>
+            <a:endParaRPr lang="en-US" sz="1400" dirty="0"/>
+          </a:p>
+        </p:txBody>
+      </p:sp>
+      <p:sp>
+        <p:nvSpPr>
+          <p:cNvPr id="8" name="Shape 6"/>
+          <p:cNvSpPr/>
+          <p:nvPr/>
+        </p:nvSpPr>
+        <p:spPr>
+          <a:xfrm>
+            <a:off x="685800" y="2770632"/>
+            <a:ext cx="868680" cy="402336"/>
+          </a:xfrm>
+          <a:prstGeom prst="roundRect">
+            <a:avLst>
+              <a:gd name="adj" fmla="val 18182"/>
+            </a:avLst>
+          </a:prstGeom>
+          <a:solidFill>
+            <a:srgbClr val="D9E6F4"/>
+          </a:solidFill>
+          <a:ln w="12700">
+            <a:solidFill>
+              <a:srgbClr val="0B5CAD"/>
+            </a:solidFill>
+            <a:prstDash val="solid"/>
+          </a:ln>
+        </p:spPr>
+      </p:sp>
+      <p:sp>
+        <p:nvSpPr>
+          <p:cNvPr id="9" name="Text 7"/>
+          <p:cNvSpPr/>
+          <p:nvPr/>
+        </p:nvSpPr>
+        <p:spPr>
+          <a:xfrm>
+            <a:off x="685800" y="2770632"/>
+            <a:ext cx="868680" cy="402336"/>
+          </a:xfrm>
+          <a:prstGeom prst="rect">
+            <a:avLst/>
+          </a:prstGeom>
+          <a:noFill/>
+          <a:ln/>
+        </p:spPr>
+        <p:txBody>
+          <a:bodyPr wrap="square" lIns="0" tIns="0" rIns="0" bIns="0" rtlCol="0" anchor="ctr"/>
+          <a:lstStyle/>
+          <a:p>
+            <a:pPr algn="ctr" indent="0" marL="0">
+              <a:buNone/>
+            </a:pPr>
+            <a:r>
+              <a:rPr lang="en-US" sz="1300" b="1" dirty="0">
+                <a:solidFill>
+                  <a:srgbClr val="0B5CAD"/>
+                </a:solidFill>
+                <a:latin typeface="Courier New" pitchFamily="34" charset="0"/>
+                <a:ea typeface="Courier New" pitchFamily="34" charset="-122"/>
+                <a:cs typeface="Courier New" pitchFamily="34" charset="-120"/>
+              </a:rPr>
+              <a:t>5-2</a:t>
+            </a:r>
+            <a:endParaRPr lang="en-US" sz="1300" dirty="0"/>
+          </a:p>
+        </p:txBody>
+      </p:sp>
+      <p:sp>
+        <p:nvSpPr>
+          <p:cNvPr id="10" name="Text 8"/>
+          <p:cNvSpPr/>
+          <p:nvPr/>
+        </p:nvSpPr>
+        <p:spPr>
+          <a:xfrm>
+            <a:off x="1783080" y="2752344"/>
+            <a:ext cx="9692640" cy="932688"/>
+          </a:xfrm>
+          <a:prstGeom prst="rect">
+            <a:avLst/>
+          </a:prstGeom>
+          <a:noFill/>
+          <a:ln/>
+        </p:spPr>
+        <p:txBody>
+          <a:bodyPr wrap="square" lIns="0" tIns="0" rIns="0" bIns="0" rtlCol="0" anchor="t"/>
+          <a:lstStyle/>
+          <a:p>
+            <a:pPr indent="0" marL="0">
+              <a:lnSpc>
+                <a:spcPts val="2100"/>
+              </a:lnSpc>
+              <a:buNone/>
+            </a:pPr>
+            <a:r>
+              <a:rPr lang="en-US" sz="1400" dirty="0">
+                <a:solidFill>
+                  <a:srgbClr val="16191D"/>
+                </a:solidFill>
+                <a:latin typeface="Yu Gothic" pitchFamily="34" charset="0"/>
+                <a:ea typeface="Yu Gothic" pitchFamily="34" charset="-122"/>
+                <a:cs typeface="Yu Gothic" pitchFamily="34" charset="-120"/>
+              </a:rPr>
+              <a:t>5.2 の (a)(b) 2つのループについて、N=1024、1要素8バイト、キャッシュライン64バイトとする。それぞれ何回のキャッシュミスが起きるか概算せよ。</a:t>
+            </a:r>
+            <a:endParaRPr lang="en-US" sz="1400" dirty="0"/>
+          </a:p>
+        </p:txBody>
+      </p:sp>
+      <p:sp>
+        <p:nvSpPr>
+          <p:cNvPr id="11" name="Shape 9"/>
+          <p:cNvSpPr/>
+          <p:nvPr/>
+        </p:nvSpPr>
+        <p:spPr>
+          <a:xfrm>
+            <a:off x="685800" y="3849624"/>
+            <a:ext cx="868680" cy="402336"/>
+          </a:xfrm>
+          <a:prstGeom prst="roundRect">
+            <a:avLst>
+              <a:gd name="adj" fmla="val 18182"/>
+            </a:avLst>
+          </a:prstGeom>
+          <a:solidFill>
+            <a:srgbClr val="D9E6F4"/>
+          </a:solidFill>
+          <a:ln w="12700">
+            <a:solidFill>
+              <a:srgbClr val="0B5CAD"/>
+            </a:solidFill>
+            <a:prstDash val="solid"/>
+          </a:ln>
+        </p:spPr>
+      </p:sp>
+      <p:sp>
+        <p:nvSpPr>
+          <p:cNvPr id="12" name="Text 10"/>
+          <p:cNvSpPr/>
+          <p:nvPr/>
+        </p:nvSpPr>
+        <p:spPr>
+          <a:xfrm>
+            <a:off x="685800" y="3849624"/>
+            <a:ext cx="868680" cy="402336"/>
+          </a:xfrm>
+          <a:prstGeom prst="rect">
+            <a:avLst/>
+          </a:prstGeom>
+          <a:noFill/>
+          <a:ln/>
+        </p:spPr>
+        <p:txBody>
+          <a:bodyPr wrap="square" lIns="0" tIns="0" rIns="0" bIns="0" rtlCol="0" anchor="ctr"/>
+          <a:lstStyle/>
+          <a:p>
+            <a:pPr algn="ctr" indent="0" marL="0">
+              <a:buNone/>
+            </a:pPr>
+            <a:r>
+              <a:rPr lang="en-US" sz="1300" b="1" dirty="0">
+                <a:solidFill>
+                  <a:srgbClr val="0B5CAD"/>
+                </a:solidFill>
+                <a:latin typeface="Courier New" pitchFamily="34" charset="0"/>
+                <a:ea typeface="Courier New" pitchFamily="34" charset="-122"/>
+                <a:cs typeface="Courier New" pitchFamily="34" charset="-120"/>
+              </a:rPr>
+              <a:t>5-3</a:t>
+            </a:r>
+            <a:endParaRPr lang="en-US" sz="1300" dirty="0"/>
+          </a:p>
+        </p:txBody>
+      </p:sp>
+      <p:sp>
+        <p:nvSpPr>
+          <p:cNvPr id="13" name="Text 11"/>
+          <p:cNvSpPr/>
+          <p:nvPr/>
+        </p:nvSpPr>
+        <p:spPr>
+          <a:xfrm>
+            <a:off x="1783080" y="3831336"/>
+            <a:ext cx="9692640" cy="932688"/>
+          </a:xfrm>
+          <a:prstGeom prst="rect">
+            <a:avLst/>
+          </a:prstGeom>
+          <a:noFill/>
+          <a:ln/>
+        </p:spPr>
+        <p:txBody>
+          <a:bodyPr wrap="square" lIns="0" tIns="0" rIns="0" bIns="0" rtlCol="0" anchor="t"/>
+          <a:lstStyle/>
+          <a:p>
+            <a:pPr indent="0" marL="0">
+              <a:lnSpc>
+                <a:spcPts val="2100"/>
+              </a:lnSpc>
+              <a:buNone/>
+            </a:pPr>
+            <a:r>
+              <a:rPr lang="en-US" sz="1400" dirty="0">
+                <a:solidFill>
+                  <a:srgbClr val="16191D"/>
+                </a:solidFill>
+                <a:latin typeface="Yu Gothic" pitchFamily="34" charset="0"/>
+                <a:ea typeface="Yu Gothic" pitchFamily="34" charset="-122"/>
+                <a:cs typeface="Yu Gothic" pitchFamily="34" charset="-120"/>
+              </a:rPr>
+              <a:t>仮想記憶がもたらす利点を3つ挙げ、それぞれ「なかったら何が困るか」を述べよ。</a:t>
+            </a:r>
+            <a:endParaRPr lang="en-US" sz="1400" dirty="0"/>
+          </a:p>
+        </p:txBody>
+      </p:sp>
+      <p:sp>
+        <p:nvSpPr>
+          <p:cNvPr id="14" name="Shape 12"/>
+          <p:cNvSpPr/>
+          <p:nvPr/>
+        </p:nvSpPr>
+        <p:spPr>
+          <a:xfrm>
+            <a:off x="685800" y="4928616"/>
+            <a:ext cx="868680" cy="402336"/>
+          </a:xfrm>
+          <a:prstGeom prst="roundRect">
+            <a:avLst>
+              <a:gd name="adj" fmla="val 18182"/>
+            </a:avLst>
+          </a:prstGeom>
+          <a:solidFill>
+            <a:srgbClr val="D9E6F4"/>
+          </a:solidFill>
+          <a:ln w="12700">
+            <a:solidFill>
+              <a:srgbClr val="0B5CAD"/>
+            </a:solidFill>
+            <a:prstDash val="solid"/>
+          </a:ln>
+        </p:spPr>
+      </p:sp>
+      <p:sp>
+        <p:nvSpPr>
+          <p:cNvPr id="15" name="Text 13"/>
+          <p:cNvSpPr/>
+          <p:nvPr/>
+        </p:nvSpPr>
+        <p:spPr>
+          <a:xfrm>
+            <a:off x="685800" y="4928616"/>
+            <a:ext cx="868680" cy="402336"/>
+          </a:xfrm>
+          <a:prstGeom prst="rect">
+            <a:avLst/>
+          </a:prstGeom>
+          <a:noFill/>
+          <a:ln/>
+        </p:spPr>
+        <p:txBody>
+          <a:bodyPr wrap="square" lIns="0" tIns="0" rIns="0" bIns="0" rtlCol="0" anchor="ctr"/>
+          <a:lstStyle/>
+          <a:p>
+            <a:pPr algn="ctr" indent="0" marL="0">
+              <a:buNone/>
+            </a:pPr>
+            <a:r>
+              <a:rPr lang="en-US" sz="1300" b="1" dirty="0">
+                <a:solidFill>
+                  <a:srgbClr val="0B5CAD"/>
+                </a:solidFill>
+                <a:latin typeface="Courier New" pitchFamily="34" charset="0"/>
+                <a:ea typeface="Courier New" pitchFamily="34" charset="-122"/>
+                <a:cs typeface="Courier New" pitchFamily="34" charset="-120"/>
+              </a:rPr>
+              <a:t>5-4</a:t>
+            </a:r>
+            <a:endParaRPr lang="en-US" sz="1300" dirty="0"/>
+          </a:p>
+        </p:txBody>
+      </p:sp>
+      <p:sp>
+        <p:nvSpPr>
+          <p:cNvPr id="16" name="Text 14"/>
+          <p:cNvSpPr/>
+          <p:nvPr/>
+        </p:nvSpPr>
+        <p:spPr>
+          <a:xfrm>
+            <a:off x="1783080" y="4910328"/>
+            <a:ext cx="9692640" cy="932688"/>
+          </a:xfrm>
+          <a:prstGeom prst="rect">
+            <a:avLst/>
+          </a:prstGeom>
+          <a:noFill/>
+          <a:ln/>
+        </p:spPr>
+        <p:txBody>
+          <a:bodyPr wrap="square" lIns="0" tIns="0" rIns="0" bIns="0" rtlCol="0" anchor="t"/>
+          <a:lstStyle/>
+          <a:p>
+            <a:pPr indent="0" marL="0">
+              <a:lnSpc>
+                <a:spcPts val="2100"/>
+              </a:lnSpc>
+              <a:buNone/>
+            </a:pPr>
+            <a:r>
+              <a:rPr lang="en-US" sz="1400" dirty="0">
+                <a:solidFill>
+                  <a:srgbClr val="16191D"/>
+                </a:solidFill>
+                <a:latin typeface="Yu Gothic" pitchFamily="34" charset="0"/>
+                <a:ea typeface="Yu Gothic" pitchFamily="34" charset="-122"/>
+                <a:cs typeface="Yu Gothic" pitchFamily="34" charset="-120"/>
+              </a:rPr>
+              <a:t>実行時間の 80% は並列化でき、20% は逐次実行しかできない。(a) 4コアでの高速化率は何倍か (b) コア数を無限にしたときの上限は何倍か。</a:t>
+            </a:r>
+            <a:endParaRPr lang="en-US" sz="1400" dirty="0"/>
+          </a:p>
+        </p:txBody>
+      </p:sp>
+    </p:spTree>
+  </p:cSld>
+  <p:clrMapOvr>
+    <a:masterClrMapping/>
+  </p:clrMapOvr>
+</p:sld>
+</file>
+
+<file path=ppt/slides/slide24.xml><?xml version="1.0" encoding="utf-8"?>
+<p:sld xmlns:a="http://schemas.openxmlformats.org/drawingml/2006/main" xmlns:r="http://schemas.openxmlformats.org/officeDocument/2006/relationships" xmlns:p="http://schemas.openxmlformats.org/presentationml/2006/main">
+  <p:cSld name="Slide 24">
     <p:bg>
       <p:bgPr>
         <a:solidFill>
@@ -11093,7 +13340,7 @@
         <p:spPr>
           <a:xfrm>
             <a:off x="4297680" y="1380744"/>
-            <a:ext cx="7132320" cy="640080"/>
+            <a:ext cx="7132320" cy="548640"/>
           </a:xfrm>
           <a:prstGeom prst="rect">
             <a:avLst/>
@@ -11134,7 +13381,7 @@
         </p:nvSpPr>
         <p:spPr>
           <a:xfrm>
-            <a:off x="822960" y="2167128"/>
+            <a:off x="822960" y="2075688"/>
             <a:ext cx="3291840" cy="320040"/>
           </a:xfrm>
           <a:prstGeom prst="rect">
@@ -11159,7 +13406,7 @@
                 <a:ea typeface="Yu Gothic" pitchFamily="34" charset="-122"/>
                 <a:cs typeface="Yu Gothic" pitchFamily="34" charset="-120"/>
               </a:rPr>
-              <a:t>記憶階層</a:t>
+              <a:t>投機実行の穴</a:t>
             </a:r>
             <a:endParaRPr lang="en-US" sz="1400" dirty="0"/>
           </a:p>
@@ -11173,8 +13420,8 @@
         </p:nvSpPr>
         <p:spPr>
           <a:xfrm>
-            <a:off x="4297680" y="2130552"/>
-            <a:ext cx="7132320" cy="640080"/>
+            <a:off x="4297680" y="2039112"/>
+            <a:ext cx="7132320" cy="548640"/>
           </a:xfrm>
           <a:prstGeom prst="rect">
             <a:avLst/>
@@ -11201,7 +13448,7 @@
                 <a:ea typeface="Yu Gothic" pitchFamily="34" charset="-122"/>
                 <a:cs typeface="Yu Gothic" pitchFamily="34" charset="-120"/>
               </a:rPr>
-              <a:t>性質の違う記憶を積む。有効なのは、プログラムに参照の局所性があるから</a:t>
+              <a:t>結果は取り消せるがキャッシュの痕跡は残る。時間を測れば「触ったか」が分かる</a:t>
             </a:r>
             <a:endParaRPr lang="en-US" sz="1250" dirty="0"/>
           </a:p>
@@ -11215,7 +13462,7 @@
         </p:nvSpPr>
         <p:spPr>
           <a:xfrm>
-            <a:off x="822960" y="2916936"/>
+            <a:off x="822960" y="2734056"/>
             <a:ext cx="3291840" cy="320040"/>
           </a:xfrm>
           <a:prstGeom prst="rect">
@@ -11240,7 +13487,7 @@
                 <a:ea typeface="Yu Gothic" pitchFamily="34" charset="-122"/>
                 <a:cs typeface="Yu Gothic" pitchFamily="34" charset="-120"/>
               </a:rPr>
-              <a:t>キャッシュ</a:t>
+              <a:t>記憶階層</a:t>
             </a:r>
             <a:endParaRPr lang="en-US" sz="1400" dirty="0"/>
           </a:p>
@@ -11254,8 +13501,8 @@
         </p:nvSpPr>
         <p:spPr>
           <a:xfrm>
-            <a:off x="4297680" y="2880360"/>
-            <a:ext cx="7132320" cy="640080"/>
+            <a:off x="4297680" y="2697480"/>
+            <a:ext cx="7132320" cy="548640"/>
           </a:xfrm>
           <a:prstGeom prst="rect">
             <a:avLst/>
@@ -11282,7 +13529,7 @@
                 <a:ea typeface="Yu Gothic" pitchFamily="34" charset="-122"/>
                 <a:cs typeface="Yu Gothic" pitchFamily="34" charset="-120"/>
               </a:rPr>
-              <a:t>ヒット率のわずかな低下が実効速度を大きく損なう。同じ計算量でも触り方で桁が変わる</a:t>
+              <a:t>性質の違う記憶を積む。有効なのは、プログラムに参照の局所性があるから</a:t>
             </a:r>
             <a:endParaRPr lang="en-US" sz="1250" dirty="0"/>
           </a:p>
@@ -11296,7 +13543,7 @@
         </p:nvSpPr>
         <p:spPr>
           <a:xfrm>
-            <a:off x="822960" y="3666744"/>
+            <a:off x="822960" y="3392424"/>
             <a:ext cx="3291840" cy="320040"/>
           </a:xfrm>
           <a:prstGeom prst="rect">
@@ -11321,7 +13568,7 @@
                 <a:ea typeface="Yu Gothic" pitchFamily="34" charset="-122"/>
                 <a:cs typeface="Yu Gothic" pitchFamily="34" charset="-120"/>
               </a:rPr>
-              <a:t>仮想記憶</a:t>
+              <a:t>キャッシュ</a:t>
             </a:r>
             <a:endParaRPr lang="en-US" sz="1400" dirty="0"/>
           </a:p>
@@ -11335,8 +13582,8 @@
         </p:nvSpPr>
         <p:spPr>
           <a:xfrm>
-            <a:off x="4297680" y="3630168"/>
-            <a:ext cx="7132320" cy="640080"/>
+            <a:off x="4297680" y="3355848"/>
+            <a:ext cx="7132320" cy="548640"/>
           </a:xfrm>
           <a:prstGeom prst="rect">
             <a:avLst/>
@@ -11363,7 +13610,7 @@
                 <a:ea typeface="Yu Gothic" pitchFamily="34" charset="-122"/>
                 <a:cs typeface="Yu Gothic" pitchFamily="34" charset="-120"/>
               </a:rPr>
-              <a:t>保護・連続性の幻・容量の拡張・共有を、対応表1枚でまとめて得る</a:t>
+              <a:t>ヒット率のわずかな低下が実効速度を大きく損なう。同じ計算量でも触り方で桁が変わる</a:t>
             </a:r>
             <a:endParaRPr lang="en-US" sz="1250" dirty="0"/>
           </a:p>
@@ -11377,7 +13624,7 @@
         </p:nvSpPr>
         <p:spPr>
           <a:xfrm>
-            <a:off x="822960" y="4416552"/>
+            <a:off x="822960" y="4050792"/>
             <a:ext cx="3291840" cy="320040"/>
           </a:xfrm>
           <a:prstGeom prst="rect">
@@ -11402,7 +13649,7 @@
                 <a:ea typeface="Yu Gothic" pitchFamily="34" charset="-122"/>
                 <a:cs typeface="Yu Gothic" pitchFamily="34" charset="-120"/>
               </a:rPr>
-              <a:t>並列性</a:t>
+              <a:t>仮想記憶</a:t>
             </a:r>
             <a:endParaRPr lang="en-US" sz="1400" dirty="0"/>
           </a:p>
@@ -11416,8 +13663,8 @@
         </p:nvSpPr>
         <p:spPr>
           <a:xfrm>
-            <a:off x="4297680" y="4379976"/>
-            <a:ext cx="7132320" cy="640080"/>
+            <a:off x="4297680" y="4014216"/>
+            <a:ext cx="7132320" cy="548640"/>
           </a:xfrm>
           <a:prstGeom prst="rect">
             <a:avLst/>
@@ -11444,7 +13691,7 @@
                 <a:ea typeface="Yu Gothic" pitchFamily="34" charset="-122"/>
                 <a:cs typeface="Yu Gothic" pitchFamily="34" charset="-120"/>
               </a:rPr>
-              <a:t>パイプライン、スーパースカラ、SIMD、マルチコアの階層。前3者はハードウェア任せ</a:t>
+              <a:t>保護・連続性の幻・容量の拡張・共有を、対応表1枚でまとめて得る</a:t>
             </a:r>
             <a:endParaRPr lang="en-US" sz="1250" dirty="0"/>
           </a:p>
@@ -11458,7 +13705,7 @@
         </p:nvSpPr>
         <p:spPr>
           <a:xfrm>
-            <a:off x="822960" y="5166360"/>
+            <a:off x="822960" y="4709160"/>
             <a:ext cx="3291840" cy="320040"/>
           </a:xfrm>
           <a:prstGeom prst="rect">
@@ -11483,7 +13730,7 @@
                 <a:ea typeface="Yu Gothic" pitchFamily="34" charset="-122"/>
                 <a:cs typeface="Yu Gothic" pitchFamily="34" charset="-120"/>
               </a:rPr>
-              <a:t>アムダールの法則</a:t>
+              <a:t>並列性</a:t>
             </a:r>
             <a:endParaRPr lang="en-US" sz="1400" dirty="0"/>
           </a:p>
@@ -11497,8 +13744,8 @@
         </p:nvSpPr>
         <p:spPr>
           <a:xfrm>
-            <a:off x="4297680" y="5129784"/>
-            <a:ext cx="7132320" cy="640080"/>
+            <a:off x="4297680" y="4672584"/>
+            <a:ext cx="7132320" cy="548640"/>
           </a:xfrm>
           <a:prstGeom prst="rect">
             <a:avLst/>
@@ -11525,6 +13772,87 @@
                 <a:ea typeface="Yu Gothic" pitchFamily="34" charset="-122"/>
                 <a:cs typeface="Yu Gothic" pitchFamily="34" charset="-120"/>
               </a:rPr>
+              <a:t>パイプライン、スーパースカラ、SIMD、マルチコアの階層。前3者はハードウェア任せ</a:t>
+            </a:r>
+            <a:endParaRPr lang="en-US" sz="1250" dirty="0"/>
+          </a:p>
+        </p:txBody>
+      </p:sp>
+      <p:sp>
+        <p:nvSpPr>
+          <p:cNvPr id="15" name="Text 13"/>
+          <p:cNvSpPr/>
+          <p:nvPr/>
+        </p:nvSpPr>
+        <p:spPr>
+          <a:xfrm>
+            <a:off x="822960" y="5367528"/>
+            <a:ext cx="3291840" cy="320040"/>
+          </a:xfrm>
+          <a:prstGeom prst="rect">
+            <a:avLst/>
+          </a:prstGeom>
+          <a:noFill/>
+          <a:ln/>
+        </p:spPr>
+        <p:txBody>
+          <a:bodyPr wrap="square" lIns="0" tIns="0" rIns="0" bIns="0" rtlCol="0" anchor="ctr"/>
+          <a:lstStyle/>
+          <a:p>
+            <a:pPr indent="0" marL="0">
+              <a:buNone/>
+            </a:pPr>
+            <a:r>
+              <a:rPr lang="en-US" sz="1400" b="1" dirty="0">
+                <a:solidFill>
+                  <a:srgbClr val="6AB0F3"/>
+                </a:solidFill>
+                <a:latin typeface="Yu Gothic" pitchFamily="34" charset="0"/>
+                <a:ea typeface="Yu Gothic" pitchFamily="34" charset="-122"/>
+                <a:cs typeface="Yu Gothic" pitchFamily="34" charset="-120"/>
+              </a:rPr>
+              <a:t>アムダールの法則</a:t>
+            </a:r>
+            <a:endParaRPr lang="en-US" sz="1400" dirty="0"/>
+          </a:p>
+        </p:txBody>
+      </p:sp>
+      <p:sp>
+        <p:nvSpPr>
+          <p:cNvPr id="16" name="Text 14"/>
+          <p:cNvSpPr/>
+          <p:nvPr/>
+        </p:nvSpPr>
+        <p:spPr>
+          <a:xfrm>
+            <a:off x="4297680" y="5330952"/>
+            <a:ext cx="7132320" cy="548640"/>
+          </a:xfrm>
+          <a:prstGeom prst="rect">
+            <a:avLst/>
+          </a:prstGeom>
+          <a:noFill/>
+          <a:ln/>
+        </p:spPr>
+        <p:txBody>
+          <a:bodyPr wrap="square" lIns="0" tIns="0" rIns="0" bIns="0" rtlCol="0" anchor="t"/>
+          <a:lstStyle/>
+          <a:p>
+            <a:pPr indent="0" marL="0">
+              <a:lnSpc>
+                <a:spcPts val="1900"/>
+              </a:lnSpc>
+              <a:buNone/>
+            </a:pPr>
+            <a:r>
+              <a:rPr lang="en-US" sz="1250" dirty="0">
+                <a:solidFill>
+                  <a:srgbClr val="E8EBEF"/>
+                </a:solidFill>
+                <a:latin typeface="Yu Gothic" pitchFamily="34" charset="0"/>
+                <a:ea typeface="Yu Gothic" pitchFamily="34" charset="-122"/>
+                <a:cs typeface="Yu Gothic" pitchFamily="34" charset="-120"/>
+              </a:rPr>
               <a:t>逐次のまま残る部分が、高速化の上限を決める</a:t>
             </a:r>
             <a:endParaRPr lang="en-US" sz="1250" dirty="0"/>
@@ -11533,7 +13861,7 @@
       </p:sp>
       <p:sp>
         <p:nvSpPr>
-          <p:cNvPr id="15" name="Text 13"/>
+          <p:cNvPr id="17" name="Text 15"/>
           <p:cNvSpPr/>
           <p:nvPr/>
         </p:nvSpPr>
@@ -11808,7 +14136,7 @@
               <a:buNone/>
             </a:pPr>
             <a:r>
-              <a:rPr lang="en-US" sz="1600" b="1" dirty="0">
+              <a:rPr lang="en-US" sz="1500" b="1" dirty="0">
                 <a:solidFill>
                   <a:srgbClr val="16191D"/>
                 </a:solidFill>
@@ -11822,7 +14150,7 @@
               <a:buNone/>
             </a:pPr>
             <a:r>
-              <a:rPr lang="en-US" sz="1400" dirty="0">
+              <a:rPr lang="en-US" sz="1300" dirty="0">
                 <a:solidFill>
                   <a:srgbClr val="5F6672"/>
                 </a:solidFill>
@@ -11832,7 +14160,7 @@
               </a:rPr>
               <a:t>　の違いを、素子の構造から説明できる</a:t>
             </a:r>
-            <a:endParaRPr lang="en-US" sz="1600" dirty="0"/>
+            <a:endParaRPr lang="en-US" sz="1500" dirty="0"/>
           </a:p>
         </p:txBody>
       </p:sp>
@@ -11844,7 +14172,7 @@
         </p:nvSpPr>
         <p:spPr>
           <a:xfrm>
-            <a:off x="777240" y="2624328"/>
+            <a:off x="777240" y="2496312"/>
             <a:ext cx="457200" cy="457200"/>
           </a:xfrm>
           <a:prstGeom prst="ellipse">
@@ -11869,7 +14197,7 @@
         </p:nvSpPr>
         <p:spPr>
           <a:xfrm>
-            <a:off x="777240" y="2624328"/>
+            <a:off x="777240" y="2496312"/>
             <a:ext cx="457200" cy="457200"/>
           </a:xfrm>
           <a:prstGeom prst="rect">
@@ -11908,7 +14236,7 @@
         </p:nvSpPr>
         <p:spPr>
           <a:xfrm>
-            <a:off x="1417320" y="2642616"/>
+            <a:off x="1417320" y="2514600"/>
             <a:ext cx="9966960" cy="457200"/>
           </a:xfrm>
           <a:prstGeom prst="rect">
@@ -11925,7 +14253,7 @@
               <a:buNone/>
             </a:pPr>
             <a:r>
-              <a:rPr lang="en-US" sz="1600" b="1" dirty="0">
+              <a:rPr lang="en-US" sz="1500" b="1" dirty="0">
                 <a:solidFill>
                   <a:srgbClr val="16191D"/>
                 </a:solidFill>
@@ -11939,7 +14267,7 @@
               <a:buNone/>
             </a:pPr>
             <a:r>
-              <a:rPr lang="en-US" sz="1400" dirty="0">
+              <a:rPr lang="en-US" sz="1300" dirty="0">
                 <a:solidFill>
                   <a:srgbClr val="5F6672"/>
                 </a:solidFill>
@@ -11949,7 +14277,7 @@
               </a:rPr>
               <a:t>　がなぜ必要かを、速度・容量・価格の関係から説明できる</a:t>
             </a:r>
-            <a:endParaRPr lang="en-US" sz="1600" dirty="0"/>
+            <a:endParaRPr lang="en-US" sz="1500" dirty="0"/>
           </a:p>
         </p:txBody>
       </p:sp>
@@ -11961,7 +14289,7 @@
         </p:nvSpPr>
         <p:spPr>
           <a:xfrm>
-            <a:off x="777240" y="3483864"/>
+            <a:off x="777240" y="3227832"/>
             <a:ext cx="457200" cy="457200"/>
           </a:xfrm>
           <a:prstGeom prst="ellipse">
@@ -11986,7 +14314,7 @@
         </p:nvSpPr>
         <p:spPr>
           <a:xfrm>
-            <a:off x="777240" y="3483864"/>
+            <a:off x="777240" y="3227832"/>
             <a:ext cx="457200" cy="457200"/>
           </a:xfrm>
           <a:prstGeom prst="rect">
@@ -12025,7 +14353,7 @@
         </p:nvSpPr>
         <p:spPr>
           <a:xfrm>
-            <a:off x="1417320" y="3502152"/>
+            <a:off x="1417320" y="3246120"/>
             <a:ext cx="9966960" cy="457200"/>
           </a:xfrm>
           <a:prstGeom prst="rect">
@@ -12042,7 +14370,7 @@
               <a:buNone/>
             </a:pPr>
             <a:r>
-              <a:rPr lang="en-US" sz="1600" b="1" dirty="0">
+              <a:rPr lang="en-US" sz="1500" b="1" dirty="0">
                 <a:solidFill>
                   <a:srgbClr val="16191D"/>
                 </a:solidFill>
@@ -12056,7 +14384,7 @@
               <a:buNone/>
             </a:pPr>
             <a:r>
-              <a:rPr lang="en-US" sz="1400" dirty="0">
+              <a:rPr lang="en-US" sz="1300" dirty="0">
                 <a:solidFill>
                   <a:srgbClr val="5F6672"/>
                 </a:solidFill>
@@ -12066,7 +14394,7 @@
               </a:rPr>
               <a:t>　とキャッシュの働きを説明し、ヒット率から実効時間を計算できる</a:t>
             </a:r>
-            <a:endParaRPr lang="en-US" sz="1600" dirty="0"/>
+            <a:endParaRPr lang="en-US" sz="1500" dirty="0"/>
           </a:p>
         </p:txBody>
       </p:sp>
@@ -12078,7 +14406,7 @@
         </p:nvSpPr>
         <p:spPr>
           <a:xfrm>
-            <a:off x="777240" y="4343400"/>
+            <a:off x="777240" y="3959352"/>
             <a:ext cx="457200" cy="457200"/>
           </a:xfrm>
           <a:prstGeom prst="ellipse">
@@ -12103,7 +14431,7 @@
         </p:nvSpPr>
         <p:spPr>
           <a:xfrm>
-            <a:off x="777240" y="4343400"/>
+            <a:off x="777240" y="3959352"/>
             <a:ext cx="457200" cy="457200"/>
           </a:xfrm>
           <a:prstGeom prst="rect">
@@ -12142,7 +14470,7 @@
         </p:nvSpPr>
         <p:spPr>
           <a:xfrm>
-            <a:off x="1417320" y="4361688"/>
+            <a:off x="1417320" y="3977640"/>
             <a:ext cx="9966960" cy="457200"/>
           </a:xfrm>
           <a:prstGeom prst="rect">
@@ -12159,7 +14487,7 @@
               <a:buNone/>
             </a:pPr>
             <a:r>
-              <a:rPr lang="en-US" sz="1600" b="1" dirty="0">
+              <a:rPr lang="en-US" sz="1500" b="1" dirty="0">
                 <a:solidFill>
                   <a:srgbClr val="16191D"/>
                 </a:solidFill>
@@ -12173,7 +14501,7 @@
               <a:buNone/>
             </a:pPr>
             <a:r>
-              <a:rPr lang="en-US" sz="1400" dirty="0">
+              <a:rPr lang="en-US" sz="1300" dirty="0">
                 <a:solidFill>
                   <a:srgbClr val="5F6672"/>
                 </a:solidFill>
@@ -12183,7 +14511,7 @@
               </a:rPr>
               <a:t>　が解決している問題を説明できる</a:t>
             </a:r>
-            <a:endParaRPr lang="en-US" sz="1600" dirty="0"/>
+            <a:endParaRPr lang="en-US" sz="1500" dirty="0"/>
           </a:p>
         </p:txBody>
       </p:sp>
@@ -12195,7 +14523,7 @@
         </p:nvSpPr>
         <p:spPr>
           <a:xfrm>
-            <a:off x="777240" y="5202936"/>
+            <a:off x="777240" y="4690872"/>
             <a:ext cx="457200" cy="457200"/>
           </a:xfrm>
           <a:prstGeom prst="ellipse">
@@ -12220,7 +14548,7 @@
         </p:nvSpPr>
         <p:spPr>
           <a:xfrm>
-            <a:off x="777240" y="5202936"/>
+            <a:off x="777240" y="4690872"/>
             <a:ext cx="457200" cy="457200"/>
           </a:xfrm>
           <a:prstGeom prst="rect">
@@ -12259,7 +14587,7 @@
         </p:nvSpPr>
         <p:spPr>
           <a:xfrm>
-            <a:off x="1417320" y="5221224"/>
+            <a:off x="1417320" y="4709160"/>
             <a:ext cx="9966960" cy="457200"/>
           </a:xfrm>
           <a:prstGeom prst="rect">
@@ -12276,7 +14604,7 @@
               <a:buNone/>
             </a:pPr>
             <a:r>
-              <a:rPr lang="en-US" sz="1600" b="1" dirty="0">
+              <a:rPr lang="en-US" sz="1500" b="1" dirty="0">
                 <a:solidFill>
                   <a:srgbClr val="16191D"/>
                 </a:solidFill>
@@ -12290,7 +14618,7 @@
               <a:buNone/>
             </a:pPr>
             <a:r>
-              <a:rPr lang="en-US" sz="1400" dirty="0">
+              <a:rPr lang="en-US" sz="1300" dirty="0">
                 <a:solidFill>
                   <a:srgbClr val="5F6672"/>
                 </a:solidFill>
@@ -12300,7 +14628,124 @@
               </a:rPr>
               <a:t>　を説明し、アムダールの法則を適用できる</a:t>
             </a:r>
-            <a:endParaRPr lang="en-US" sz="1600" dirty="0"/>
+            <a:endParaRPr lang="en-US" sz="1500" dirty="0"/>
+          </a:p>
+        </p:txBody>
+      </p:sp>
+      <p:sp>
+        <p:nvSpPr>
+          <p:cNvPr id="20" name="Shape 18"/>
+          <p:cNvSpPr/>
+          <p:nvPr/>
+        </p:nvSpPr>
+        <p:spPr>
+          <a:xfrm>
+            <a:off x="777240" y="5422392"/>
+            <a:ext cx="457200" cy="457200"/>
+          </a:xfrm>
+          <a:prstGeom prst="ellipse">
+            <a:avLst/>
+          </a:prstGeom>
+          <a:solidFill>
+            <a:srgbClr val="D9E6F4"/>
+          </a:solidFill>
+          <a:ln w="15240">
+            <a:solidFill>
+              <a:srgbClr val="0B5CAD"/>
+            </a:solidFill>
+            <a:prstDash val="solid"/>
+          </a:ln>
+        </p:spPr>
+      </p:sp>
+      <p:sp>
+        <p:nvSpPr>
+          <p:cNvPr id="21" name="Text 19"/>
+          <p:cNvSpPr/>
+          <p:nvPr/>
+        </p:nvSpPr>
+        <p:spPr>
+          <a:xfrm>
+            <a:off x="777240" y="5422392"/>
+            <a:ext cx="457200" cy="457200"/>
+          </a:xfrm>
+          <a:prstGeom prst="rect">
+            <a:avLst/>
+          </a:prstGeom>
+          <a:noFill/>
+          <a:ln/>
+        </p:spPr>
+        <p:txBody>
+          <a:bodyPr wrap="square" lIns="0" tIns="0" rIns="0" bIns="0" rtlCol="0" anchor="ctr"/>
+          <a:lstStyle/>
+          <a:p>
+            <a:pPr algn="ctr" indent="0" marL="0">
+              <a:buNone/>
+            </a:pPr>
+            <a:r>
+              <a:rPr lang="en-US" sz="1400" b="1" dirty="0">
+                <a:solidFill>
+                  <a:srgbClr val="0B5CAD"/>
+                </a:solidFill>
+                <a:latin typeface="Yu Gothic" pitchFamily="34" charset="0"/>
+                <a:ea typeface="Yu Gothic" pitchFamily="34" charset="-122"/>
+                <a:cs typeface="Yu Gothic" pitchFamily="34" charset="-120"/>
+              </a:rPr>
+              <a:t>6</a:t>
+            </a:r>
+            <a:endParaRPr lang="en-US" sz="1400" dirty="0"/>
+          </a:p>
+        </p:txBody>
+      </p:sp>
+      <p:sp>
+        <p:nvSpPr>
+          <p:cNvPr id="22" name="Text 20"/>
+          <p:cNvSpPr/>
+          <p:nvPr/>
+        </p:nvSpPr>
+        <p:spPr>
+          <a:xfrm>
+            <a:off x="1417320" y="5440680"/>
+            <a:ext cx="9966960" cy="457200"/>
+          </a:xfrm>
+          <a:prstGeom prst="rect">
+            <a:avLst/>
+          </a:prstGeom>
+          <a:noFill/>
+          <a:ln/>
+        </p:spPr>
+        <p:txBody>
+          <a:bodyPr wrap="square" lIns="0" tIns="0" rIns="0" bIns="0" rtlCol="0" anchor="ctr"/>
+          <a:lstStyle/>
+          <a:p>
+            <a:pPr indent="0" marL="0">
+              <a:buNone/>
+            </a:pPr>
+            <a:r>
+              <a:rPr lang="en-US" sz="1500" b="1" dirty="0">
+                <a:solidFill>
+                  <a:srgbClr val="16191D"/>
+                </a:solidFill>
+                <a:latin typeface="Yu Gothic" pitchFamily="34" charset="0"/>
+                <a:ea typeface="Yu Gothic" pitchFamily="34" charset="-122"/>
+                <a:cs typeface="Yu Gothic" pitchFamily="34" charset="-120"/>
+              </a:rPr>
+              <a:t>投機実行</a:t>
+            </a:r>
+            <a:pPr indent="0" marL="0">
+              <a:buNone/>
+            </a:pPr>
+            <a:r>
+              <a:rPr lang="en-US" sz="1300" dirty="0">
+                <a:solidFill>
+                  <a:srgbClr val="5F6672"/>
+                </a:solidFill>
+                <a:latin typeface="Yu Gothic" pitchFamily="34" charset="0"/>
+                <a:ea typeface="Yu Gothic" pitchFamily="34" charset="-122"/>
+                <a:cs typeface="Yu Gothic" pitchFamily="34" charset="-120"/>
+              </a:rPr>
+              <a:t>　がサイドチャネル攻撃を可能にした仕組みを説明できる</a:t>
+            </a:r>
+            <a:endParaRPr lang="en-US" sz="1500" dirty="0"/>
           </a:p>
         </p:txBody>
       </p:sp>

--- a/slides/第05回_記憶階層とプロセッサの並列性.pptx
+++ b/slides/第05回_記憶階層とプロセッサの並列性.pptx
@@ -29,9 +29,10 @@
     <p:sldId id="277" r:id="rId23"/>
     <p:sldId id="278" r:id="rId24"/>
     <p:sldId id="279" r:id="rId25"/>
+    <p:sldId id="280" r:id="rId26"/>
   </p:sldIdLst>
   <p:notesMasterIdLst>
-    <p:notesMasterId r:id="rId26"/>
+    <p:notesMasterId r:id="rId27"/>
   </p:notesMasterIdLst>
   <p:sldSz cx="12192000" cy="6858000"/>
   <p:notesSz cx="6858000" cy="12192000"/>
@@ -1957,6 +1958,94 @@
             <a:fld id="{F7021451-1387-4CA6-816F-3879F97B5CBC}" type="slidenum">
               <a:rPr lang="en-US"/>
               <a:t>24</a:t>
+            </a:fld>
+            <a:endParaRPr lang="en-US"/>
+          </a:p>
+        </p:txBody>
+      </p:sp>
+    </p:spTree>
+    <p:extLst>
+      <p:ext uri="{BB962C8B-B14F-4D97-AF65-F5344CB8AC3E}">
+        <p14:creationId xmlns:p14="http://schemas.microsoft.com/office/powerpoint/2010/main" val="1024086991"/>
+      </p:ext>
+    </p:extLst>
+  </p:cSld>
+  <p:clrMapOvr>
+    <a:masterClrMapping/>
+  </p:clrMapOvr>
+</p:notes>
+</file>
+
+<file path=ppt/notesSlides/notesSlide25.xml><?xml version="1.0" encoding="utf-8"?>
+<p:notes xmlns:a="http://schemas.openxmlformats.org/drawingml/2006/main" xmlns:r="http://schemas.openxmlformats.org/officeDocument/2006/relationships" xmlns:p="http://schemas.openxmlformats.org/presentationml/2006/main">
+  <p:cSld>
+    <p:spTree>
+      <p:nvGrpSpPr>
+        <p:cNvPr id="1" name=""/>
+        <p:cNvGrpSpPr/>
+        <p:nvPr/>
+      </p:nvGrpSpPr>
+      <p:grpSpPr>
+        <a:xfrm>
+          <a:off x="0" y="0"/>
+          <a:ext cx="0" cy="0"/>
+          <a:chOff x="0" y="0"/>
+          <a:chExt cx="0" cy="0"/>
+        </a:xfrm>
+      </p:grpSpPr>
+      <p:sp>
+        <p:nvSpPr>
+          <p:cNvPr id="2" name="Slide Image Placeholder 1"/>
+          <p:cNvSpPr>
+            <a:spLocks noGrp="1" noRot="1" noChangeAspect="1"/>
+          </p:cNvSpPr>
+          <p:nvPr>
+            <p:ph type="sldImg"/>
+          </p:nvPr>
+        </p:nvSpPr>
+        <p:spPr/>
+      </p:sp>
+      <p:sp>
+        <p:nvSpPr>
+          <p:cNvPr id="3" name="Notes Placeholder 2"/>
+          <p:cNvSpPr>
+            <a:spLocks noGrp="1"/>
+          </p:cNvSpPr>
+          <p:nvPr>
+            <p:ph type="body" idx="1"/>
+          </p:nvPr>
+        </p:nvSpPr>
+        <p:spPr/>
+        <p:txBody>
+          <a:bodyPr/>
+          <a:lstStyle/>
+          <a:p>
+            <a:r>
+              <a:rPr lang="en-US" dirty="0"/>
+              <a:t/>
+            </a:r>
+            <a:endParaRPr lang="en-US" dirty="0"/>
+          </a:p>
+        </p:txBody>
+      </p:sp>
+      <p:sp>
+        <p:nvSpPr>
+          <p:cNvPr id="4" name="Slide Number Placeholder 3"/>
+          <p:cNvSpPr>
+            <a:spLocks noGrp="1"/>
+          </p:cNvSpPr>
+          <p:nvPr>
+            <p:ph type="sldNum" sz="quarter" idx="10"/>
+          </p:nvPr>
+        </p:nvSpPr>
+        <p:spPr/>
+        <p:txBody>
+          <a:bodyPr/>
+          <a:lstStyle/>
+          <a:p>
+            <a:fld id="{F7021451-1387-4CA6-816F-3879F97B5CBC}" type="slidenum">
+              <a:rPr lang="en-US"/>
+              <a:t>25</a:t>
             </a:fld>
             <a:endParaRPr lang="en-US"/>
           </a:p>
@@ -9730,7 +9819,7 @@
                 <a:ea typeface="Yu Gothic" pitchFamily="34" charset="-122"/>
                 <a:cs typeface="Yu Gothic" pitchFamily="34" charset="-120"/>
               </a:rPr>
-              <a:t>なぜ直しにくいのか</a:t>
+              <a:t>時間差が、秘密を漏らす</a:t>
             </a:r>
             <a:endParaRPr lang="en-US" sz="3000" dirty="0"/>
           </a:p>
@@ -9770,6 +9859,1136 @@
                 <a:cs typeface="Yu Gothic" pitchFamily="34" charset="-120"/>
               </a:rPr>
               <a:t>19</a:t>
+            </a:r>
+            <a:endParaRPr lang="en-US" sz="1000" dirty="0"/>
+          </a:p>
+        </p:txBody>
+      </p:sp>
+      <p:pic>
+        <p:nvPicPr>
+          <p:cNvPr id="5" name="Image 0" descr="/Users/koide/Documents/Playground/CompOutline/slides/png/fig-05-06.png">    </p:cNvPr>
+          <p:cNvPicPr>
+            <a:picLocks noChangeAspect="1"/>
+          </p:cNvPicPr>
+          <p:nvPr/>
+        </p:nvPicPr>
+        <p:blipFill>
+          <a:blip r:embed="rId1"/>
+          <a:stretch>
+            <a:fillRect/>
+          </a:stretch>
+        </p:blipFill>
+        <p:spPr>
+          <a:xfrm>
+            <a:off x="2880360" y="1371600"/>
+            <a:ext cx="6400800" cy="4114800"/>
+          </a:xfrm>
+          <a:prstGeom prst="rect">
+            <a:avLst/>
+          </a:prstGeom>
+        </p:spPr>
+      </p:pic>
+      <p:sp>
+        <p:nvSpPr>
+          <p:cNvPr id="6" name="Text 3"/>
+          <p:cNvSpPr/>
+          <p:nvPr/>
+        </p:nvSpPr>
+        <p:spPr>
+          <a:xfrm>
+            <a:off x="685800" y="5687568"/>
+            <a:ext cx="10789920" cy="365760"/>
+          </a:xfrm>
+          <a:prstGeom prst="rect">
+            <a:avLst/>
+          </a:prstGeom>
+          <a:noFill/>
+          <a:ln/>
+        </p:spPr>
+        <p:txBody>
+          <a:bodyPr wrap="square" lIns="0" tIns="0" rIns="0" bIns="0" rtlCol="0" anchor="ctr"/>
+          <a:lstStyle/>
+          <a:p>
+            <a:pPr algn="ctr" indent="0" marL="0">
+              <a:buNone/>
+            </a:pPr>
+            <a:r>
+              <a:rPr lang="en-US" sz="1500" dirty="0">
+                <a:solidFill>
+                  <a:srgbClr val="16191D"/>
+                </a:solidFill>
+                <a:latin typeface="Yu Gothic" pitchFamily="34" charset="0"/>
+                <a:ea typeface="Yu Gothic" pitchFamily="34" charset="-122"/>
+                <a:cs typeface="Yu Gothic" pitchFamily="34" charset="-120"/>
+              </a:rPr>
+              <a:t>「1つだけ速い」が読めれば値が1つ漏れる。繰り返せば1バイトずつ吸い出せる。</a:t>
+            </a:r>
+            <a:endParaRPr lang="en-US" sz="1500" dirty="0"/>
+          </a:p>
+        </p:txBody>
+      </p:sp>
+    </p:spTree>
+  </p:cSld>
+  <p:clrMapOvr>
+    <a:masterClrMapping/>
+  </p:clrMapOvr>
+</p:sld>
+</file>
+
+<file path=ppt/slides/slide2.xml><?xml version="1.0" encoding="utf-8"?>
+<p:sld xmlns:a="http://schemas.openxmlformats.org/drawingml/2006/main" xmlns:r="http://schemas.openxmlformats.org/officeDocument/2006/relationships" xmlns:p="http://schemas.openxmlformats.org/presentationml/2006/main">
+  <p:cSld name="Slide 2">
+    <p:bg>
+      <p:bgPr>
+        <a:solidFill>
+          <a:srgbClr val="16191D"/>
+        </a:solidFill>
+      </p:bgPr>
+    </p:bg>
+    <p:spTree>
+      <p:nvGrpSpPr>
+        <p:cNvPr id="1" name=""/>
+        <p:cNvGrpSpPr/>
+        <p:nvPr/>
+      </p:nvGrpSpPr>
+      <p:grpSpPr>
+        <a:xfrm>
+          <a:off x="0" y="0"/>
+          <a:ext cx="0" cy="0"/>
+          <a:chOff x="0" y="0"/>
+          <a:chExt cx="0" cy="0"/>
+        </a:xfrm>
+      </p:grpSpPr>
+      <p:sp>
+        <p:nvSpPr>
+          <p:cNvPr id="2" name="Text 0"/>
+          <p:cNvSpPr/>
+          <p:nvPr/>
+        </p:nvSpPr>
+        <p:spPr>
+          <a:xfrm>
+            <a:off x="822960" y="1371600"/>
+            <a:ext cx="10058400" cy="365760"/>
+          </a:xfrm>
+          <a:prstGeom prst="rect">
+            <a:avLst/>
+          </a:prstGeom>
+          <a:noFill/>
+          <a:ln/>
+        </p:spPr>
+        <p:txBody>
+          <a:bodyPr wrap="square" lIns="0" tIns="0" rIns="0" bIns="0" rtlCol="0" anchor="ctr"/>
+          <a:lstStyle/>
+          <a:p>
+            <a:pPr indent="0" marL="0">
+              <a:buNone/>
+            </a:pPr>
+            <a:r>
+              <a:rPr lang="en-US" sz="1400" b="1" dirty="0">
+                <a:solidFill>
+                  <a:srgbClr val="6AB0F3"/>
+                </a:solidFill>
+                <a:latin typeface="Yu Gothic" pitchFamily="34" charset="0"/>
+                <a:ea typeface="Yu Gothic" pitchFamily="34" charset="-122"/>
+                <a:cs typeface="Yu Gothic" pitchFamily="34" charset="-120"/>
+              </a:rPr>
+              <a:t>今回の問い</a:t>
+            </a:r>
+            <a:endParaRPr lang="en-US" sz="1400" dirty="0"/>
+          </a:p>
+        </p:txBody>
+      </p:sp>
+      <p:sp>
+        <p:nvSpPr>
+          <p:cNvPr id="3" name="Text 1"/>
+          <p:cNvSpPr/>
+          <p:nvPr/>
+        </p:nvSpPr>
+        <p:spPr>
+          <a:xfrm>
+            <a:off x="822960" y="1920240"/>
+            <a:ext cx="10607040" cy="2011680"/>
+          </a:xfrm>
+          <a:prstGeom prst="rect">
+            <a:avLst/>
+          </a:prstGeom>
+          <a:noFill/>
+          <a:ln/>
+        </p:spPr>
+        <p:txBody>
+          <a:bodyPr wrap="square" lIns="0" tIns="0" rIns="0" bIns="0" rtlCol="0" anchor="ctr"/>
+          <a:lstStyle/>
+          <a:p>
+            <a:pPr indent="0" marL="0">
+              <a:lnSpc>
+                <a:spcPts val="4800"/>
+              </a:lnSpc>
+              <a:buNone/>
+            </a:pPr>
+            <a:r>
+              <a:rPr lang="en-US" sz="3600" b="1" dirty="0">
+                <a:solidFill>
+                  <a:srgbClr val="FFFFFF"/>
+                </a:solidFill>
+                <a:latin typeface="Yu Gothic" pitchFamily="34" charset="0"/>
+                <a:ea typeface="Yu Gothic" pitchFamily="34" charset="-122"/>
+                <a:cs typeface="Yu Gothic" pitchFamily="34" charset="-120"/>
+              </a:rPr>
+              <a:t>なぜ計算機の速度は</a:t>
+            </a:r>
+            <a:endParaRPr lang="en-US" sz="3600" dirty="0"/>
+          </a:p>
+          <a:p>
+            <a:pPr indent="0" marL="0">
+              <a:lnSpc>
+                <a:spcPts val="4800"/>
+              </a:lnSpc>
+              <a:buNone/>
+            </a:pPr>
+            <a:r>
+              <a:rPr lang="en-US" sz="3600" b="1" dirty="0">
+                <a:solidFill>
+                  <a:srgbClr val="FFFFFF"/>
+                </a:solidFill>
+                <a:latin typeface="Yu Gothic" pitchFamily="34" charset="0"/>
+                <a:ea typeface="Yu Gothic" pitchFamily="34" charset="-122"/>
+                <a:cs typeface="Yu Gothic" pitchFamily="34" charset="-120"/>
+              </a:rPr>
+              <a:t>「メモリ待ち」で決まるのか。</a:t>
+            </a:r>
+            <a:endParaRPr lang="en-US" sz="3600" dirty="0"/>
+          </a:p>
+        </p:txBody>
+      </p:sp>
+      <p:sp>
+        <p:nvSpPr>
+          <p:cNvPr id="4" name="Text 2"/>
+          <p:cNvSpPr/>
+          <p:nvPr/>
+        </p:nvSpPr>
+        <p:spPr>
+          <a:xfrm>
+            <a:off x="822960" y="4937760"/>
+            <a:ext cx="10058400" cy="365760"/>
+          </a:xfrm>
+          <a:prstGeom prst="rect">
+            <a:avLst/>
+          </a:prstGeom>
+          <a:noFill/>
+          <a:ln/>
+        </p:spPr>
+        <p:txBody>
+          <a:bodyPr wrap="square" lIns="0" tIns="0" rIns="0" bIns="0" rtlCol="0" anchor="ctr"/>
+          <a:lstStyle/>
+          <a:p>
+            <a:pPr indent="0" marL="0">
+              <a:buNone/>
+            </a:pPr>
+            <a:r>
+              <a:rPr lang="en-US" sz="1400" dirty="0">
+                <a:solidFill>
+                  <a:srgbClr val="9AA3B0"/>
+                </a:solidFill>
+                <a:latin typeface="Yu Gothic" pitchFamily="34" charset="0"/>
+                <a:ea typeface="Yu Gothic" pitchFamily="34" charset="-122"/>
+                <a:cs typeface="Yu Gothic" pitchFamily="34" charset="-120"/>
+              </a:rPr>
+              <a:t>この90分で、この問いに答えを出す。</a:t>
+            </a:r>
+            <a:endParaRPr lang="en-US" sz="1400" dirty="0"/>
+          </a:p>
+        </p:txBody>
+      </p:sp>
+      <p:sp>
+        <p:nvSpPr>
+          <p:cNvPr id="5" name="Shape 3"/>
+          <p:cNvSpPr/>
+          <p:nvPr/>
+        </p:nvSpPr>
+        <p:spPr>
+          <a:xfrm>
+            <a:off x="548640" y="5852160"/>
+            <a:ext cx="265176" cy="182880"/>
+          </a:xfrm>
+          <a:prstGeom prst="rect">
+            <a:avLst/>
+          </a:prstGeom>
+          <a:solidFill>
+            <a:srgbClr val="FFFFFF">
+              <a:alpha val="12000"/>
+            </a:srgbClr>
+          </a:solidFill>
+          <a:ln w="7620">
+            <a:solidFill>
+              <a:srgbClr val="6AB0F3">
+                <a:alpha val="45000"/>
+              </a:srgbClr>
+            </a:solidFill>
+            <a:prstDash val="solid"/>
+          </a:ln>
+        </p:spPr>
+      </p:sp>
+      <p:sp>
+        <p:nvSpPr>
+          <p:cNvPr id="6" name="Shape 4"/>
+          <p:cNvSpPr/>
+          <p:nvPr/>
+        </p:nvSpPr>
+        <p:spPr>
+          <a:xfrm>
+            <a:off x="850392" y="5852160"/>
+            <a:ext cx="265176" cy="182880"/>
+          </a:xfrm>
+          <a:prstGeom prst="rect">
+            <a:avLst/>
+          </a:prstGeom>
+          <a:solidFill>
+            <a:srgbClr val="6AB0F3"/>
+          </a:solidFill>
+          <a:ln w="7620">
+            <a:solidFill>
+              <a:srgbClr val="6AB0F3">
+                <a:alpha val="45000"/>
+              </a:srgbClr>
+            </a:solidFill>
+            <a:prstDash val="solid"/>
+          </a:ln>
+        </p:spPr>
+      </p:sp>
+      <p:sp>
+        <p:nvSpPr>
+          <p:cNvPr id="7" name="Shape 5"/>
+          <p:cNvSpPr/>
+          <p:nvPr/>
+        </p:nvSpPr>
+        <p:spPr>
+          <a:xfrm>
+            <a:off x="1152144" y="5852160"/>
+            <a:ext cx="265176" cy="182880"/>
+          </a:xfrm>
+          <a:prstGeom prst="rect">
+            <a:avLst/>
+          </a:prstGeom>
+          <a:solidFill>
+            <a:srgbClr val="FFFFFF">
+              <a:alpha val="12000"/>
+            </a:srgbClr>
+          </a:solidFill>
+          <a:ln w="7620">
+            <a:solidFill>
+              <a:srgbClr val="6AB0F3">
+                <a:alpha val="45000"/>
+              </a:srgbClr>
+            </a:solidFill>
+            <a:prstDash val="solid"/>
+          </a:ln>
+        </p:spPr>
+      </p:sp>
+      <p:sp>
+        <p:nvSpPr>
+          <p:cNvPr id="8" name="Shape 6"/>
+          <p:cNvSpPr/>
+          <p:nvPr/>
+        </p:nvSpPr>
+        <p:spPr>
+          <a:xfrm>
+            <a:off x="1453896" y="5852160"/>
+            <a:ext cx="265176" cy="182880"/>
+          </a:xfrm>
+          <a:prstGeom prst="rect">
+            <a:avLst/>
+          </a:prstGeom>
+          <a:solidFill>
+            <a:srgbClr val="FFFFFF">
+              <a:alpha val="12000"/>
+            </a:srgbClr>
+          </a:solidFill>
+          <a:ln w="7620">
+            <a:solidFill>
+              <a:srgbClr val="6AB0F3">
+                <a:alpha val="45000"/>
+              </a:srgbClr>
+            </a:solidFill>
+            <a:prstDash val="solid"/>
+          </a:ln>
+        </p:spPr>
+      </p:sp>
+      <p:sp>
+        <p:nvSpPr>
+          <p:cNvPr id="9" name="Shape 7"/>
+          <p:cNvSpPr/>
+          <p:nvPr/>
+        </p:nvSpPr>
+        <p:spPr>
+          <a:xfrm>
+            <a:off x="1755648" y="5852160"/>
+            <a:ext cx="265176" cy="182880"/>
+          </a:xfrm>
+          <a:prstGeom prst="rect">
+            <a:avLst/>
+          </a:prstGeom>
+          <a:solidFill>
+            <a:srgbClr val="FFFFFF">
+              <a:alpha val="12000"/>
+            </a:srgbClr>
+          </a:solidFill>
+          <a:ln w="7620">
+            <a:solidFill>
+              <a:srgbClr val="6AB0F3">
+                <a:alpha val="45000"/>
+              </a:srgbClr>
+            </a:solidFill>
+            <a:prstDash val="solid"/>
+          </a:ln>
+        </p:spPr>
+      </p:sp>
+      <p:sp>
+        <p:nvSpPr>
+          <p:cNvPr id="10" name="Shape 8"/>
+          <p:cNvSpPr/>
+          <p:nvPr/>
+        </p:nvSpPr>
+        <p:spPr>
+          <a:xfrm>
+            <a:off x="2057400" y="5852160"/>
+            <a:ext cx="265176" cy="182880"/>
+          </a:xfrm>
+          <a:prstGeom prst="rect">
+            <a:avLst/>
+          </a:prstGeom>
+          <a:solidFill>
+            <a:srgbClr val="FFFFFF">
+              <a:alpha val="12000"/>
+            </a:srgbClr>
+          </a:solidFill>
+          <a:ln w="7620">
+            <a:solidFill>
+              <a:srgbClr val="6AB0F3">
+                <a:alpha val="45000"/>
+              </a:srgbClr>
+            </a:solidFill>
+            <a:prstDash val="solid"/>
+          </a:ln>
+        </p:spPr>
+      </p:sp>
+      <p:sp>
+        <p:nvSpPr>
+          <p:cNvPr id="11" name="Shape 9"/>
+          <p:cNvSpPr/>
+          <p:nvPr/>
+        </p:nvSpPr>
+        <p:spPr>
+          <a:xfrm>
+            <a:off x="2359152" y="5852160"/>
+            <a:ext cx="265176" cy="182880"/>
+          </a:xfrm>
+          <a:prstGeom prst="rect">
+            <a:avLst/>
+          </a:prstGeom>
+          <a:solidFill>
+            <a:srgbClr val="FFFFFF">
+              <a:alpha val="12000"/>
+            </a:srgbClr>
+          </a:solidFill>
+          <a:ln w="7620">
+            <a:solidFill>
+              <a:srgbClr val="6AB0F3">
+                <a:alpha val="45000"/>
+              </a:srgbClr>
+            </a:solidFill>
+            <a:prstDash val="solid"/>
+          </a:ln>
+        </p:spPr>
+      </p:sp>
+      <p:sp>
+        <p:nvSpPr>
+          <p:cNvPr id="12" name="Shape 10"/>
+          <p:cNvSpPr/>
+          <p:nvPr/>
+        </p:nvSpPr>
+        <p:spPr>
+          <a:xfrm>
+            <a:off x="2660904" y="5852160"/>
+            <a:ext cx="265176" cy="182880"/>
+          </a:xfrm>
+          <a:prstGeom prst="rect">
+            <a:avLst/>
+          </a:prstGeom>
+          <a:solidFill>
+            <a:srgbClr val="FFFFFF">
+              <a:alpha val="12000"/>
+            </a:srgbClr>
+          </a:solidFill>
+          <a:ln w="7620">
+            <a:solidFill>
+              <a:srgbClr val="6AB0F3">
+                <a:alpha val="45000"/>
+              </a:srgbClr>
+            </a:solidFill>
+            <a:prstDash val="solid"/>
+          </a:ln>
+        </p:spPr>
+      </p:sp>
+      <p:sp>
+        <p:nvSpPr>
+          <p:cNvPr id="13" name="Shape 11"/>
+          <p:cNvSpPr/>
+          <p:nvPr/>
+        </p:nvSpPr>
+        <p:spPr>
+          <a:xfrm>
+            <a:off x="2962656" y="5852160"/>
+            <a:ext cx="265176" cy="182880"/>
+          </a:xfrm>
+          <a:prstGeom prst="rect">
+            <a:avLst/>
+          </a:prstGeom>
+          <a:solidFill>
+            <a:srgbClr val="FFFFFF">
+              <a:alpha val="12000"/>
+            </a:srgbClr>
+          </a:solidFill>
+          <a:ln w="7620">
+            <a:solidFill>
+              <a:srgbClr val="6AB0F3">
+                <a:alpha val="45000"/>
+              </a:srgbClr>
+            </a:solidFill>
+            <a:prstDash val="solid"/>
+          </a:ln>
+        </p:spPr>
+      </p:sp>
+      <p:sp>
+        <p:nvSpPr>
+          <p:cNvPr id="14" name="Shape 12"/>
+          <p:cNvSpPr/>
+          <p:nvPr/>
+        </p:nvSpPr>
+        <p:spPr>
+          <a:xfrm>
+            <a:off x="3264408" y="5852160"/>
+            <a:ext cx="265176" cy="182880"/>
+          </a:xfrm>
+          <a:prstGeom prst="rect">
+            <a:avLst/>
+          </a:prstGeom>
+          <a:solidFill>
+            <a:srgbClr val="6AB0F3"/>
+          </a:solidFill>
+          <a:ln w="7620">
+            <a:solidFill>
+              <a:srgbClr val="6AB0F3">
+                <a:alpha val="45000"/>
+              </a:srgbClr>
+            </a:solidFill>
+            <a:prstDash val="solid"/>
+          </a:ln>
+        </p:spPr>
+      </p:sp>
+      <p:sp>
+        <p:nvSpPr>
+          <p:cNvPr id="15" name="Shape 13"/>
+          <p:cNvSpPr/>
+          <p:nvPr/>
+        </p:nvSpPr>
+        <p:spPr>
+          <a:xfrm>
+            <a:off x="3566160" y="5852160"/>
+            <a:ext cx="265176" cy="182880"/>
+          </a:xfrm>
+          <a:prstGeom prst="rect">
+            <a:avLst/>
+          </a:prstGeom>
+          <a:solidFill>
+            <a:srgbClr val="FFFFFF">
+              <a:alpha val="12000"/>
+            </a:srgbClr>
+          </a:solidFill>
+          <a:ln w="7620">
+            <a:solidFill>
+              <a:srgbClr val="6AB0F3">
+                <a:alpha val="45000"/>
+              </a:srgbClr>
+            </a:solidFill>
+            <a:prstDash val="solid"/>
+          </a:ln>
+        </p:spPr>
+      </p:sp>
+      <p:sp>
+        <p:nvSpPr>
+          <p:cNvPr id="16" name="Shape 14"/>
+          <p:cNvSpPr/>
+          <p:nvPr/>
+        </p:nvSpPr>
+        <p:spPr>
+          <a:xfrm>
+            <a:off x="3867912" y="5852160"/>
+            <a:ext cx="265176" cy="182880"/>
+          </a:xfrm>
+          <a:prstGeom prst="rect">
+            <a:avLst/>
+          </a:prstGeom>
+          <a:solidFill>
+            <a:srgbClr val="FFFFFF">
+              <a:alpha val="12000"/>
+            </a:srgbClr>
+          </a:solidFill>
+          <a:ln w="7620">
+            <a:solidFill>
+              <a:srgbClr val="6AB0F3">
+                <a:alpha val="45000"/>
+              </a:srgbClr>
+            </a:solidFill>
+            <a:prstDash val="solid"/>
+          </a:ln>
+        </p:spPr>
+      </p:sp>
+      <p:sp>
+        <p:nvSpPr>
+          <p:cNvPr id="17" name="Shape 15"/>
+          <p:cNvSpPr/>
+          <p:nvPr/>
+        </p:nvSpPr>
+        <p:spPr>
+          <a:xfrm>
+            <a:off x="4169664" y="5852160"/>
+            <a:ext cx="265176" cy="182880"/>
+          </a:xfrm>
+          <a:prstGeom prst="rect">
+            <a:avLst/>
+          </a:prstGeom>
+          <a:solidFill>
+            <a:srgbClr val="FFFFFF">
+              <a:alpha val="12000"/>
+            </a:srgbClr>
+          </a:solidFill>
+          <a:ln w="7620">
+            <a:solidFill>
+              <a:srgbClr val="6AB0F3">
+                <a:alpha val="45000"/>
+              </a:srgbClr>
+            </a:solidFill>
+            <a:prstDash val="solid"/>
+          </a:ln>
+        </p:spPr>
+      </p:sp>
+      <p:sp>
+        <p:nvSpPr>
+          <p:cNvPr id="18" name="Shape 16"/>
+          <p:cNvSpPr/>
+          <p:nvPr/>
+        </p:nvSpPr>
+        <p:spPr>
+          <a:xfrm>
+            <a:off x="4471416" y="5852160"/>
+            <a:ext cx="265176" cy="182880"/>
+          </a:xfrm>
+          <a:prstGeom prst="rect">
+            <a:avLst/>
+          </a:prstGeom>
+          <a:solidFill>
+            <a:srgbClr val="FFFFFF">
+              <a:alpha val="12000"/>
+            </a:srgbClr>
+          </a:solidFill>
+          <a:ln w="7620">
+            <a:solidFill>
+              <a:srgbClr val="6AB0F3">
+                <a:alpha val="45000"/>
+              </a:srgbClr>
+            </a:solidFill>
+            <a:prstDash val="solid"/>
+          </a:ln>
+        </p:spPr>
+      </p:sp>
+      <p:sp>
+        <p:nvSpPr>
+          <p:cNvPr id="19" name="Shape 17"/>
+          <p:cNvSpPr/>
+          <p:nvPr/>
+        </p:nvSpPr>
+        <p:spPr>
+          <a:xfrm>
+            <a:off x="4773168" y="5852160"/>
+            <a:ext cx="265176" cy="182880"/>
+          </a:xfrm>
+          <a:prstGeom prst="rect">
+            <a:avLst/>
+          </a:prstGeom>
+          <a:solidFill>
+            <a:srgbClr val="FFFFFF">
+              <a:alpha val="12000"/>
+            </a:srgbClr>
+          </a:solidFill>
+          <a:ln w="7620">
+            <a:solidFill>
+              <a:srgbClr val="6AB0F3">
+                <a:alpha val="45000"/>
+              </a:srgbClr>
+            </a:solidFill>
+            <a:prstDash val="solid"/>
+          </a:ln>
+        </p:spPr>
+      </p:sp>
+      <p:sp>
+        <p:nvSpPr>
+          <p:cNvPr id="20" name="Shape 18"/>
+          <p:cNvSpPr/>
+          <p:nvPr/>
+        </p:nvSpPr>
+        <p:spPr>
+          <a:xfrm>
+            <a:off x="5074920" y="5852160"/>
+            <a:ext cx="265176" cy="182880"/>
+          </a:xfrm>
+          <a:prstGeom prst="rect">
+            <a:avLst/>
+          </a:prstGeom>
+          <a:solidFill>
+            <a:srgbClr val="FFFFFF">
+              <a:alpha val="12000"/>
+            </a:srgbClr>
+          </a:solidFill>
+          <a:ln w="7620">
+            <a:solidFill>
+              <a:srgbClr val="6AB0F3">
+                <a:alpha val="45000"/>
+              </a:srgbClr>
+            </a:solidFill>
+            <a:prstDash val="solid"/>
+          </a:ln>
+        </p:spPr>
+      </p:sp>
+      <p:sp>
+        <p:nvSpPr>
+          <p:cNvPr id="21" name="Shape 19"/>
+          <p:cNvSpPr/>
+          <p:nvPr/>
+        </p:nvSpPr>
+        <p:spPr>
+          <a:xfrm>
+            <a:off x="5376672" y="5852160"/>
+            <a:ext cx="265176" cy="182880"/>
+          </a:xfrm>
+          <a:prstGeom prst="rect">
+            <a:avLst/>
+          </a:prstGeom>
+          <a:solidFill>
+            <a:srgbClr val="FFFFFF">
+              <a:alpha val="12000"/>
+            </a:srgbClr>
+          </a:solidFill>
+          <a:ln w="7620">
+            <a:solidFill>
+              <a:srgbClr val="6AB0F3">
+                <a:alpha val="45000"/>
+              </a:srgbClr>
+            </a:solidFill>
+            <a:prstDash val="solid"/>
+          </a:ln>
+        </p:spPr>
+      </p:sp>
+      <p:sp>
+        <p:nvSpPr>
+          <p:cNvPr id="22" name="Shape 20"/>
+          <p:cNvSpPr/>
+          <p:nvPr/>
+        </p:nvSpPr>
+        <p:spPr>
+          <a:xfrm>
+            <a:off x="5678424" y="5852160"/>
+            <a:ext cx="265176" cy="182880"/>
+          </a:xfrm>
+          <a:prstGeom prst="rect">
+            <a:avLst/>
+          </a:prstGeom>
+          <a:solidFill>
+            <a:srgbClr val="6AB0F3"/>
+          </a:solidFill>
+          <a:ln w="7620">
+            <a:solidFill>
+              <a:srgbClr val="6AB0F3">
+                <a:alpha val="45000"/>
+              </a:srgbClr>
+            </a:solidFill>
+            <a:prstDash val="solid"/>
+          </a:ln>
+        </p:spPr>
+      </p:sp>
+      <p:sp>
+        <p:nvSpPr>
+          <p:cNvPr id="23" name="Shape 21"/>
+          <p:cNvSpPr/>
+          <p:nvPr/>
+        </p:nvSpPr>
+        <p:spPr>
+          <a:xfrm>
+            <a:off x="5980176" y="5852160"/>
+            <a:ext cx="265176" cy="182880"/>
+          </a:xfrm>
+          <a:prstGeom prst="rect">
+            <a:avLst/>
+          </a:prstGeom>
+          <a:solidFill>
+            <a:srgbClr val="FFFFFF">
+              <a:alpha val="12000"/>
+            </a:srgbClr>
+          </a:solidFill>
+          <a:ln w="7620">
+            <a:solidFill>
+              <a:srgbClr val="6AB0F3">
+                <a:alpha val="45000"/>
+              </a:srgbClr>
+            </a:solidFill>
+            <a:prstDash val="solid"/>
+          </a:ln>
+        </p:spPr>
+      </p:sp>
+      <p:sp>
+        <p:nvSpPr>
+          <p:cNvPr id="24" name="Shape 22"/>
+          <p:cNvSpPr/>
+          <p:nvPr/>
+        </p:nvSpPr>
+        <p:spPr>
+          <a:xfrm>
+            <a:off x="6281928" y="5852160"/>
+            <a:ext cx="265176" cy="182880"/>
+          </a:xfrm>
+          <a:prstGeom prst="rect">
+            <a:avLst/>
+          </a:prstGeom>
+          <a:solidFill>
+            <a:srgbClr val="FFFFFF">
+              <a:alpha val="12000"/>
+            </a:srgbClr>
+          </a:solidFill>
+          <a:ln w="7620">
+            <a:solidFill>
+              <a:srgbClr val="6AB0F3">
+                <a:alpha val="45000"/>
+              </a:srgbClr>
+            </a:solidFill>
+            <a:prstDash val="solid"/>
+          </a:ln>
+        </p:spPr>
+      </p:sp>
+      <p:sp>
+        <p:nvSpPr>
+          <p:cNvPr id="25" name="Shape 23"/>
+          <p:cNvSpPr/>
+          <p:nvPr/>
+        </p:nvSpPr>
+        <p:spPr>
+          <a:xfrm>
+            <a:off x="6583680" y="5852160"/>
+            <a:ext cx="265176" cy="182880"/>
+          </a:xfrm>
+          <a:prstGeom prst="rect">
+            <a:avLst/>
+          </a:prstGeom>
+          <a:solidFill>
+            <a:srgbClr val="FFFFFF">
+              <a:alpha val="12000"/>
+            </a:srgbClr>
+          </a:solidFill>
+          <a:ln w="7620">
+            <a:solidFill>
+              <a:srgbClr val="6AB0F3">
+                <a:alpha val="45000"/>
+              </a:srgbClr>
+            </a:solidFill>
+            <a:prstDash val="solid"/>
+          </a:ln>
+        </p:spPr>
+      </p:sp>
+      <p:sp>
+        <p:nvSpPr>
+          <p:cNvPr id="26" name="Shape 24"/>
+          <p:cNvSpPr/>
+          <p:nvPr/>
+        </p:nvSpPr>
+        <p:spPr>
+          <a:xfrm>
+            <a:off x="6885432" y="5852160"/>
+            <a:ext cx="265176" cy="182880"/>
+          </a:xfrm>
+          <a:prstGeom prst="rect">
+            <a:avLst/>
+          </a:prstGeom>
+          <a:solidFill>
+            <a:srgbClr val="FFFFFF">
+              <a:alpha val="12000"/>
+            </a:srgbClr>
+          </a:solidFill>
+          <a:ln w="7620">
+            <a:solidFill>
+              <a:srgbClr val="6AB0F3">
+                <a:alpha val="45000"/>
+              </a:srgbClr>
+            </a:solidFill>
+            <a:prstDash val="solid"/>
+          </a:ln>
+        </p:spPr>
+      </p:sp>
+      <p:sp>
+        <p:nvSpPr>
+          <p:cNvPr id="27" name="Shape 25"/>
+          <p:cNvSpPr/>
+          <p:nvPr/>
+        </p:nvSpPr>
+        <p:spPr>
+          <a:xfrm>
+            <a:off x="7187184" y="5852160"/>
+            <a:ext cx="265176" cy="182880"/>
+          </a:xfrm>
+          <a:prstGeom prst="rect">
+            <a:avLst/>
+          </a:prstGeom>
+          <a:solidFill>
+            <a:srgbClr val="FFFFFF">
+              <a:alpha val="12000"/>
+            </a:srgbClr>
+          </a:solidFill>
+          <a:ln w="7620">
+            <a:solidFill>
+              <a:srgbClr val="6AB0F3">
+                <a:alpha val="45000"/>
+              </a:srgbClr>
+            </a:solidFill>
+            <a:prstDash val="solid"/>
+          </a:ln>
+        </p:spPr>
+      </p:sp>
+      <p:sp>
+        <p:nvSpPr>
+          <p:cNvPr id="28" name="Shape 26"/>
+          <p:cNvSpPr/>
+          <p:nvPr/>
+        </p:nvSpPr>
+        <p:spPr>
+          <a:xfrm>
+            <a:off x="7488936" y="5852160"/>
+            <a:ext cx="265176" cy="182880"/>
+          </a:xfrm>
+          <a:prstGeom prst="rect">
+            <a:avLst/>
+          </a:prstGeom>
+          <a:solidFill>
+            <a:srgbClr val="FFFFFF">
+              <a:alpha val="12000"/>
+            </a:srgbClr>
+          </a:solidFill>
+          <a:ln w="7620">
+            <a:solidFill>
+              <a:srgbClr val="6AB0F3">
+                <a:alpha val="45000"/>
+              </a:srgbClr>
+            </a:solidFill>
+            <a:prstDash val="solid"/>
+          </a:ln>
+        </p:spPr>
+      </p:sp>
+      <p:sp>
+        <p:nvSpPr>
+          <p:cNvPr id="29" name="Shape 27"/>
+          <p:cNvSpPr/>
+          <p:nvPr/>
+        </p:nvSpPr>
+        <p:spPr>
+          <a:xfrm>
+            <a:off x="7790688" y="5852160"/>
+            <a:ext cx="265176" cy="182880"/>
+          </a:xfrm>
+          <a:prstGeom prst="rect">
+            <a:avLst/>
+          </a:prstGeom>
+          <a:solidFill>
+            <a:srgbClr val="FFFFFF">
+              <a:alpha val="12000"/>
+            </a:srgbClr>
+          </a:solidFill>
+          <a:ln w="7620">
+            <a:solidFill>
+              <a:srgbClr val="6AB0F3">
+                <a:alpha val="45000"/>
+              </a:srgbClr>
+            </a:solidFill>
+            <a:prstDash val="solid"/>
+          </a:ln>
+        </p:spPr>
+      </p:sp>
+      <p:sp>
+        <p:nvSpPr>
+          <p:cNvPr id="30" name="Shape 28"/>
+          <p:cNvSpPr/>
+          <p:nvPr/>
+        </p:nvSpPr>
+        <p:spPr>
+          <a:xfrm>
+            <a:off x="8092440" y="5852160"/>
+            <a:ext cx="265176" cy="182880"/>
+          </a:xfrm>
+          <a:prstGeom prst="rect">
+            <a:avLst/>
+          </a:prstGeom>
+          <a:solidFill>
+            <a:srgbClr val="6AB0F3"/>
+          </a:solidFill>
+          <a:ln w="7620">
+            <a:solidFill>
+              <a:srgbClr val="6AB0F3">
+                <a:alpha val="45000"/>
+              </a:srgbClr>
+            </a:solidFill>
+            <a:prstDash val="solid"/>
+          </a:ln>
+        </p:spPr>
+      </p:sp>
+    </p:spTree>
+  </p:cSld>
+  <p:clrMapOvr>
+    <a:masterClrMapping/>
+  </p:clrMapOvr>
+</p:sld>
+</file>
+
+<file path=ppt/slides/slide20.xml><?xml version="1.0" encoding="utf-8"?>
+<p:sld xmlns:a="http://schemas.openxmlformats.org/drawingml/2006/main" xmlns:r="http://schemas.openxmlformats.org/officeDocument/2006/relationships" xmlns:p="http://schemas.openxmlformats.org/presentationml/2006/main">
+  <p:cSld name="Slide 20">
+    <p:bg>
+      <p:bgPr>
+        <a:solidFill>
+          <a:srgbClr val="FFFFFF"/>
+        </a:solidFill>
+      </p:bgPr>
+    </p:bg>
+    <p:spTree>
+      <p:nvGrpSpPr>
+        <p:cNvPr id="1" name=""/>
+        <p:cNvGrpSpPr/>
+        <p:nvPr/>
+      </p:nvGrpSpPr>
+      <p:grpSpPr>
+        <a:xfrm>
+          <a:off x="0" y="0"/>
+          <a:ext cx="0" cy="0"/>
+          <a:chOff x="0" y="0"/>
+          <a:chExt cx="0" cy="0"/>
+        </a:xfrm>
+      </p:grpSpPr>
+      <p:sp>
+        <p:nvSpPr>
+          <p:cNvPr id="2" name="Text 0"/>
+          <p:cNvSpPr/>
+          <p:nvPr/>
+        </p:nvSpPr>
+        <p:spPr>
+          <a:xfrm>
+            <a:off x="566928" y="310896"/>
+            <a:ext cx="4572000" cy="256032"/>
+          </a:xfrm>
+          <a:prstGeom prst="rect">
+            <a:avLst/>
+          </a:prstGeom>
+          <a:noFill/>
+          <a:ln/>
+        </p:spPr>
+        <p:txBody>
+          <a:bodyPr wrap="square" lIns="0" tIns="0" rIns="0" bIns="0" rtlCol="0" anchor="ctr"/>
+          <a:lstStyle/>
+          <a:p>
+            <a:pPr indent="0" marL="0">
+              <a:buNone/>
+            </a:pPr>
+            <a:r>
+              <a:rPr lang="en-US" sz="1200" b="1" dirty="0">
+                <a:solidFill>
+                  <a:srgbClr val="0B5CAD"/>
+                </a:solidFill>
+                <a:latin typeface="Yu Gothic" pitchFamily="34" charset="0"/>
+                <a:ea typeface="Yu Gothic" pitchFamily="34" charset="-122"/>
+                <a:cs typeface="Yu Gothic" pitchFamily="34" charset="-120"/>
+              </a:rPr>
+              <a:t>5.4　投機実行</a:t>
+            </a:r>
+            <a:endParaRPr lang="en-US" sz="1200" dirty="0"/>
+          </a:p>
+        </p:txBody>
+      </p:sp>
+      <p:sp>
+        <p:nvSpPr>
+          <p:cNvPr id="3" name="Text 1"/>
+          <p:cNvSpPr/>
+          <p:nvPr/>
+        </p:nvSpPr>
+        <p:spPr>
+          <a:xfrm>
+            <a:off x="548640" y="603504"/>
+            <a:ext cx="11064240" cy="731520"/>
+          </a:xfrm>
+          <a:prstGeom prst="rect">
+            <a:avLst/>
+          </a:prstGeom>
+          <a:noFill/>
+          <a:ln/>
+        </p:spPr>
+        <p:txBody>
+          <a:bodyPr wrap="square" lIns="0" tIns="0" rIns="0" bIns="0" rtlCol="0" anchor="t"/>
+          <a:lstStyle/>
+          <a:p>
+            <a:pPr indent="0" marL="0">
+              <a:buNone/>
+            </a:pPr>
+            <a:r>
+              <a:rPr lang="en-US" sz="3000" b="1" dirty="0">
+                <a:solidFill>
+                  <a:srgbClr val="16191D"/>
+                </a:solidFill>
+                <a:latin typeface="Yu Gothic" pitchFamily="34" charset="0"/>
+                <a:ea typeface="Yu Gothic" pitchFamily="34" charset="-122"/>
+                <a:cs typeface="Yu Gothic" pitchFamily="34" charset="-120"/>
+              </a:rPr>
+              <a:t>なぜ直しにくいのか</a:t>
+            </a:r>
+            <a:endParaRPr lang="en-US" sz="3000" dirty="0"/>
+          </a:p>
+        </p:txBody>
+      </p:sp>
+      <p:sp>
+        <p:nvSpPr>
+          <p:cNvPr id="4" name="Text 2"/>
+          <p:cNvSpPr/>
+          <p:nvPr/>
+        </p:nvSpPr>
+        <p:spPr>
+          <a:xfrm>
+            <a:off x="11247120" y="6355080"/>
+            <a:ext cx="548640" cy="274320"/>
+          </a:xfrm>
+          <a:prstGeom prst="rect">
+            <a:avLst/>
+          </a:prstGeom>
+          <a:noFill/>
+          <a:ln/>
+        </p:spPr>
+        <p:txBody>
+          <a:bodyPr wrap="square" lIns="0" tIns="0" rIns="0" bIns="0" rtlCol="0" anchor="ctr"/>
+          <a:lstStyle/>
+          <a:p>
+            <a:pPr algn="r" indent="0" marL="0">
+              <a:buNone/>
+            </a:pPr>
+            <a:r>
+              <a:rPr lang="en-US" sz="1000" dirty="0">
+                <a:solidFill>
+                  <a:srgbClr val="5F6672"/>
+                </a:solidFill>
+                <a:latin typeface="Yu Gothic" pitchFamily="34" charset="0"/>
+                <a:ea typeface="Yu Gothic" pitchFamily="34" charset="-122"/>
+                <a:cs typeface="Yu Gothic" pitchFamily="34" charset="-120"/>
+              </a:rPr>
+              <a:t>20</a:t>
             </a:r>
             <a:endParaRPr lang="en-US" sz="1000" dirty="0"/>
           </a:p>
@@ -9819,7 +11038,7 @@
       </p:sp>
       <p:graphicFrame>
         <p:nvGraphicFramePr>
-          <p:cNvPr id="20" name="Table 0"/>
+          <p:cNvPr id="21" name="Table 0"/>
           <p:cNvGraphicFramePr>
             <a:graphicFrameLocks noGrp="1"/>
           </p:cNvGraphicFramePr>
@@ -10535,1547 +11754,6 @@
 </p:sld>
 </file>
 
-<file path=ppt/slides/slide2.xml><?xml version="1.0" encoding="utf-8"?>
-<p:sld xmlns:a="http://schemas.openxmlformats.org/drawingml/2006/main" xmlns:r="http://schemas.openxmlformats.org/officeDocument/2006/relationships" xmlns:p="http://schemas.openxmlformats.org/presentationml/2006/main">
-  <p:cSld name="Slide 2">
-    <p:bg>
-      <p:bgPr>
-        <a:solidFill>
-          <a:srgbClr val="16191D"/>
-        </a:solidFill>
-      </p:bgPr>
-    </p:bg>
-    <p:spTree>
-      <p:nvGrpSpPr>
-        <p:cNvPr id="1" name=""/>
-        <p:cNvGrpSpPr/>
-        <p:nvPr/>
-      </p:nvGrpSpPr>
-      <p:grpSpPr>
-        <a:xfrm>
-          <a:off x="0" y="0"/>
-          <a:ext cx="0" cy="0"/>
-          <a:chOff x="0" y="0"/>
-          <a:chExt cx="0" cy="0"/>
-        </a:xfrm>
-      </p:grpSpPr>
-      <p:sp>
-        <p:nvSpPr>
-          <p:cNvPr id="2" name="Text 0"/>
-          <p:cNvSpPr/>
-          <p:nvPr/>
-        </p:nvSpPr>
-        <p:spPr>
-          <a:xfrm>
-            <a:off x="822960" y="1371600"/>
-            <a:ext cx="10058400" cy="365760"/>
-          </a:xfrm>
-          <a:prstGeom prst="rect">
-            <a:avLst/>
-          </a:prstGeom>
-          <a:noFill/>
-          <a:ln/>
-        </p:spPr>
-        <p:txBody>
-          <a:bodyPr wrap="square" lIns="0" tIns="0" rIns="0" bIns="0" rtlCol="0" anchor="ctr"/>
-          <a:lstStyle/>
-          <a:p>
-            <a:pPr indent="0" marL="0">
-              <a:buNone/>
-            </a:pPr>
-            <a:r>
-              <a:rPr lang="en-US" sz="1400" b="1" dirty="0">
-                <a:solidFill>
-                  <a:srgbClr val="6AB0F3"/>
-                </a:solidFill>
-                <a:latin typeface="Yu Gothic" pitchFamily="34" charset="0"/>
-                <a:ea typeface="Yu Gothic" pitchFamily="34" charset="-122"/>
-                <a:cs typeface="Yu Gothic" pitchFamily="34" charset="-120"/>
-              </a:rPr>
-              <a:t>今回の問い</a:t>
-            </a:r>
-            <a:endParaRPr lang="en-US" sz="1400" dirty="0"/>
-          </a:p>
-        </p:txBody>
-      </p:sp>
-      <p:sp>
-        <p:nvSpPr>
-          <p:cNvPr id="3" name="Text 1"/>
-          <p:cNvSpPr/>
-          <p:nvPr/>
-        </p:nvSpPr>
-        <p:spPr>
-          <a:xfrm>
-            <a:off x="822960" y="1920240"/>
-            <a:ext cx="10607040" cy="2011680"/>
-          </a:xfrm>
-          <a:prstGeom prst="rect">
-            <a:avLst/>
-          </a:prstGeom>
-          <a:noFill/>
-          <a:ln/>
-        </p:spPr>
-        <p:txBody>
-          <a:bodyPr wrap="square" lIns="0" tIns="0" rIns="0" bIns="0" rtlCol="0" anchor="ctr"/>
-          <a:lstStyle/>
-          <a:p>
-            <a:pPr indent="0" marL="0">
-              <a:lnSpc>
-                <a:spcPts val="4800"/>
-              </a:lnSpc>
-              <a:buNone/>
-            </a:pPr>
-            <a:r>
-              <a:rPr lang="en-US" sz="3600" b="1" dirty="0">
-                <a:solidFill>
-                  <a:srgbClr val="FFFFFF"/>
-                </a:solidFill>
-                <a:latin typeface="Yu Gothic" pitchFamily="34" charset="0"/>
-                <a:ea typeface="Yu Gothic" pitchFamily="34" charset="-122"/>
-                <a:cs typeface="Yu Gothic" pitchFamily="34" charset="-120"/>
-              </a:rPr>
-              <a:t>なぜ計算機の速度は</a:t>
-            </a:r>
-            <a:endParaRPr lang="en-US" sz="3600" dirty="0"/>
-          </a:p>
-          <a:p>
-            <a:pPr indent="0" marL="0">
-              <a:lnSpc>
-                <a:spcPts val="4800"/>
-              </a:lnSpc>
-              <a:buNone/>
-            </a:pPr>
-            <a:r>
-              <a:rPr lang="en-US" sz="3600" b="1" dirty="0">
-                <a:solidFill>
-                  <a:srgbClr val="FFFFFF"/>
-                </a:solidFill>
-                <a:latin typeface="Yu Gothic" pitchFamily="34" charset="0"/>
-                <a:ea typeface="Yu Gothic" pitchFamily="34" charset="-122"/>
-                <a:cs typeface="Yu Gothic" pitchFamily="34" charset="-120"/>
-              </a:rPr>
-              <a:t>「メモリ待ち」で決まるのか。</a:t>
-            </a:r>
-            <a:endParaRPr lang="en-US" sz="3600" dirty="0"/>
-          </a:p>
-        </p:txBody>
-      </p:sp>
-      <p:sp>
-        <p:nvSpPr>
-          <p:cNvPr id="4" name="Text 2"/>
-          <p:cNvSpPr/>
-          <p:nvPr/>
-        </p:nvSpPr>
-        <p:spPr>
-          <a:xfrm>
-            <a:off x="822960" y="4937760"/>
-            <a:ext cx="10058400" cy="365760"/>
-          </a:xfrm>
-          <a:prstGeom prst="rect">
-            <a:avLst/>
-          </a:prstGeom>
-          <a:noFill/>
-          <a:ln/>
-        </p:spPr>
-        <p:txBody>
-          <a:bodyPr wrap="square" lIns="0" tIns="0" rIns="0" bIns="0" rtlCol="0" anchor="ctr"/>
-          <a:lstStyle/>
-          <a:p>
-            <a:pPr indent="0" marL="0">
-              <a:buNone/>
-            </a:pPr>
-            <a:r>
-              <a:rPr lang="en-US" sz="1400" dirty="0">
-                <a:solidFill>
-                  <a:srgbClr val="9AA3B0"/>
-                </a:solidFill>
-                <a:latin typeface="Yu Gothic" pitchFamily="34" charset="0"/>
-                <a:ea typeface="Yu Gothic" pitchFamily="34" charset="-122"/>
-                <a:cs typeface="Yu Gothic" pitchFamily="34" charset="-120"/>
-              </a:rPr>
-              <a:t>この90分で、この問いに答えを出す。</a:t>
-            </a:r>
-            <a:endParaRPr lang="en-US" sz="1400" dirty="0"/>
-          </a:p>
-        </p:txBody>
-      </p:sp>
-      <p:sp>
-        <p:nvSpPr>
-          <p:cNvPr id="5" name="Shape 3"/>
-          <p:cNvSpPr/>
-          <p:nvPr/>
-        </p:nvSpPr>
-        <p:spPr>
-          <a:xfrm>
-            <a:off x="548640" y="5852160"/>
-            <a:ext cx="265176" cy="182880"/>
-          </a:xfrm>
-          <a:prstGeom prst="rect">
-            <a:avLst/>
-          </a:prstGeom>
-          <a:solidFill>
-            <a:srgbClr val="FFFFFF">
-              <a:alpha val="12000"/>
-            </a:srgbClr>
-          </a:solidFill>
-          <a:ln w="7620">
-            <a:solidFill>
-              <a:srgbClr val="6AB0F3">
-                <a:alpha val="45000"/>
-              </a:srgbClr>
-            </a:solidFill>
-            <a:prstDash val="solid"/>
-          </a:ln>
-        </p:spPr>
-      </p:sp>
-      <p:sp>
-        <p:nvSpPr>
-          <p:cNvPr id="6" name="Shape 4"/>
-          <p:cNvSpPr/>
-          <p:nvPr/>
-        </p:nvSpPr>
-        <p:spPr>
-          <a:xfrm>
-            <a:off x="850392" y="5852160"/>
-            <a:ext cx="265176" cy="182880"/>
-          </a:xfrm>
-          <a:prstGeom prst="rect">
-            <a:avLst/>
-          </a:prstGeom>
-          <a:solidFill>
-            <a:srgbClr val="6AB0F3"/>
-          </a:solidFill>
-          <a:ln w="7620">
-            <a:solidFill>
-              <a:srgbClr val="6AB0F3">
-                <a:alpha val="45000"/>
-              </a:srgbClr>
-            </a:solidFill>
-            <a:prstDash val="solid"/>
-          </a:ln>
-        </p:spPr>
-      </p:sp>
-      <p:sp>
-        <p:nvSpPr>
-          <p:cNvPr id="7" name="Shape 5"/>
-          <p:cNvSpPr/>
-          <p:nvPr/>
-        </p:nvSpPr>
-        <p:spPr>
-          <a:xfrm>
-            <a:off x="1152144" y="5852160"/>
-            <a:ext cx="265176" cy="182880"/>
-          </a:xfrm>
-          <a:prstGeom prst="rect">
-            <a:avLst/>
-          </a:prstGeom>
-          <a:solidFill>
-            <a:srgbClr val="FFFFFF">
-              <a:alpha val="12000"/>
-            </a:srgbClr>
-          </a:solidFill>
-          <a:ln w="7620">
-            <a:solidFill>
-              <a:srgbClr val="6AB0F3">
-                <a:alpha val="45000"/>
-              </a:srgbClr>
-            </a:solidFill>
-            <a:prstDash val="solid"/>
-          </a:ln>
-        </p:spPr>
-      </p:sp>
-      <p:sp>
-        <p:nvSpPr>
-          <p:cNvPr id="8" name="Shape 6"/>
-          <p:cNvSpPr/>
-          <p:nvPr/>
-        </p:nvSpPr>
-        <p:spPr>
-          <a:xfrm>
-            <a:off x="1453896" y="5852160"/>
-            <a:ext cx="265176" cy="182880"/>
-          </a:xfrm>
-          <a:prstGeom prst="rect">
-            <a:avLst/>
-          </a:prstGeom>
-          <a:solidFill>
-            <a:srgbClr val="FFFFFF">
-              <a:alpha val="12000"/>
-            </a:srgbClr>
-          </a:solidFill>
-          <a:ln w="7620">
-            <a:solidFill>
-              <a:srgbClr val="6AB0F3">
-                <a:alpha val="45000"/>
-              </a:srgbClr>
-            </a:solidFill>
-            <a:prstDash val="solid"/>
-          </a:ln>
-        </p:spPr>
-      </p:sp>
-      <p:sp>
-        <p:nvSpPr>
-          <p:cNvPr id="9" name="Shape 7"/>
-          <p:cNvSpPr/>
-          <p:nvPr/>
-        </p:nvSpPr>
-        <p:spPr>
-          <a:xfrm>
-            <a:off x="1755648" y="5852160"/>
-            <a:ext cx="265176" cy="182880"/>
-          </a:xfrm>
-          <a:prstGeom prst="rect">
-            <a:avLst/>
-          </a:prstGeom>
-          <a:solidFill>
-            <a:srgbClr val="FFFFFF">
-              <a:alpha val="12000"/>
-            </a:srgbClr>
-          </a:solidFill>
-          <a:ln w="7620">
-            <a:solidFill>
-              <a:srgbClr val="6AB0F3">
-                <a:alpha val="45000"/>
-              </a:srgbClr>
-            </a:solidFill>
-            <a:prstDash val="solid"/>
-          </a:ln>
-        </p:spPr>
-      </p:sp>
-      <p:sp>
-        <p:nvSpPr>
-          <p:cNvPr id="10" name="Shape 8"/>
-          <p:cNvSpPr/>
-          <p:nvPr/>
-        </p:nvSpPr>
-        <p:spPr>
-          <a:xfrm>
-            <a:off x="2057400" y="5852160"/>
-            <a:ext cx="265176" cy="182880"/>
-          </a:xfrm>
-          <a:prstGeom prst="rect">
-            <a:avLst/>
-          </a:prstGeom>
-          <a:solidFill>
-            <a:srgbClr val="FFFFFF">
-              <a:alpha val="12000"/>
-            </a:srgbClr>
-          </a:solidFill>
-          <a:ln w="7620">
-            <a:solidFill>
-              <a:srgbClr val="6AB0F3">
-                <a:alpha val="45000"/>
-              </a:srgbClr>
-            </a:solidFill>
-            <a:prstDash val="solid"/>
-          </a:ln>
-        </p:spPr>
-      </p:sp>
-      <p:sp>
-        <p:nvSpPr>
-          <p:cNvPr id="11" name="Shape 9"/>
-          <p:cNvSpPr/>
-          <p:nvPr/>
-        </p:nvSpPr>
-        <p:spPr>
-          <a:xfrm>
-            <a:off x="2359152" y="5852160"/>
-            <a:ext cx="265176" cy="182880"/>
-          </a:xfrm>
-          <a:prstGeom prst="rect">
-            <a:avLst/>
-          </a:prstGeom>
-          <a:solidFill>
-            <a:srgbClr val="FFFFFF">
-              <a:alpha val="12000"/>
-            </a:srgbClr>
-          </a:solidFill>
-          <a:ln w="7620">
-            <a:solidFill>
-              <a:srgbClr val="6AB0F3">
-                <a:alpha val="45000"/>
-              </a:srgbClr>
-            </a:solidFill>
-            <a:prstDash val="solid"/>
-          </a:ln>
-        </p:spPr>
-      </p:sp>
-      <p:sp>
-        <p:nvSpPr>
-          <p:cNvPr id="12" name="Shape 10"/>
-          <p:cNvSpPr/>
-          <p:nvPr/>
-        </p:nvSpPr>
-        <p:spPr>
-          <a:xfrm>
-            <a:off x="2660904" y="5852160"/>
-            <a:ext cx="265176" cy="182880"/>
-          </a:xfrm>
-          <a:prstGeom prst="rect">
-            <a:avLst/>
-          </a:prstGeom>
-          <a:solidFill>
-            <a:srgbClr val="FFFFFF">
-              <a:alpha val="12000"/>
-            </a:srgbClr>
-          </a:solidFill>
-          <a:ln w="7620">
-            <a:solidFill>
-              <a:srgbClr val="6AB0F3">
-                <a:alpha val="45000"/>
-              </a:srgbClr>
-            </a:solidFill>
-            <a:prstDash val="solid"/>
-          </a:ln>
-        </p:spPr>
-      </p:sp>
-      <p:sp>
-        <p:nvSpPr>
-          <p:cNvPr id="13" name="Shape 11"/>
-          <p:cNvSpPr/>
-          <p:nvPr/>
-        </p:nvSpPr>
-        <p:spPr>
-          <a:xfrm>
-            <a:off x="2962656" y="5852160"/>
-            <a:ext cx="265176" cy="182880"/>
-          </a:xfrm>
-          <a:prstGeom prst="rect">
-            <a:avLst/>
-          </a:prstGeom>
-          <a:solidFill>
-            <a:srgbClr val="FFFFFF">
-              <a:alpha val="12000"/>
-            </a:srgbClr>
-          </a:solidFill>
-          <a:ln w="7620">
-            <a:solidFill>
-              <a:srgbClr val="6AB0F3">
-                <a:alpha val="45000"/>
-              </a:srgbClr>
-            </a:solidFill>
-            <a:prstDash val="solid"/>
-          </a:ln>
-        </p:spPr>
-      </p:sp>
-      <p:sp>
-        <p:nvSpPr>
-          <p:cNvPr id="14" name="Shape 12"/>
-          <p:cNvSpPr/>
-          <p:nvPr/>
-        </p:nvSpPr>
-        <p:spPr>
-          <a:xfrm>
-            <a:off x="3264408" y="5852160"/>
-            <a:ext cx="265176" cy="182880"/>
-          </a:xfrm>
-          <a:prstGeom prst="rect">
-            <a:avLst/>
-          </a:prstGeom>
-          <a:solidFill>
-            <a:srgbClr val="6AB0F3"/>
-          </a:solidFill>
-          <a:ln w="7620">
-            <a:solidFill>
-              <a:srgbClr val="6AB0F3">
-                <a:alpha val="45000"/>
-              </a:srgbClr>
-            </a:solidFill>
-            <a:prstDash val="solid"/>
-          </a:ln>
-        </p:spPr>
-      </p:sp>
-      <p:sp>
-        <p:nvSpPr>
-          <p:cNvPr id="15" name="Shape 13"/>
-          <p:cNvSpPr/>
-          <p:nvPr/>
-        </p:nvSpPr>
-        <p:spPr>
-          <a:xfrm>
-            <a:off x="3566160" y="5852160"/>
-            <a:ext cx="265176" cy="182880"/>
-          </a:xfrm>
-          <a:prstGeom prst="rect">
-            <a:avLst/>
-          </a:prstGeom>
-          <a:solidFill>
-            <a:srgbClr val="FFFFFF">
-              <a:alpha val="12000"/>
-            </a:srgbClr>
-          </a:solidFill>
-          <a:ln w="7620">
-            <a:solidFill>
-              <a:srgbClr val="6AB0F3">
-                <a:alpha val="45000"/>
-              </a:srgbClr>
-            </a:solidFill>
-            <a:prstDash val="solid"/>
-          </a:ln>
-        </p:spPr>
-      </p:sp>
-      <p:sp>
-        <p:nvSpPr>
-          <p:cNvPr id="16" name="Shape 14"/>
-          <p:cNvSpPr/>
-          <p:nvPr/>
-        </p:nvSpPr>
-        <p:spPr>
-          <a:xfrm>
-            <a:off x="3867912" y="5852160"/>
-            <a:ext cx="265176" cy="182880"/>
-          </a:xfrm>
-          <a:prstGeom prst="rect">
-            <a:avLst/>
-          </a:prstGeom>
-          <a:solidFill>
-            <a:srgbClr val="FFFFFF">
-              <a:alpha val="12000"/>
-            </a:srgbClr>
-          </a:solidFill>
-          <a:ln w="7620">
-            <a:solidFill>
-              <a:srgbClr val="6AB0F3">
-                <a:alpha val="45000"/>
-              </a:srgbClr>
-            </a:solidFill>
-            <a:prstDash val="solid"/>
-          </a:ln>
-        </p:spPr>
-      </p:sp>
-      <p:sp>
-        <p:nvSpPr>
-          <p:cNvPr id="17" name="Shape 15"/>
-          <p:cNvSpPr/>
-          <p:nvPr/>
-        </p:nvSpPr>
-        <p:spPr>
-          <a:xfrm>
-            <a:off x="4169664" y="5852160"/>
-            <a:ext cx="265176" cy="182880"/>
-          </a:xfrm>
-          <a:prstGeom prst="rect">
-            <a:avLst/>
-          </a:prstGeom>
-          <a:solidFill>
-            <a:srgbClr val="FFFFFF">
-              <a:alpha val="12000"/>
-            </a:srgbClr>
-          </a:solidFill>
-          <a:ln w="7620">
-            <a:solidFill>
-              <a:srgbClr val="6AB0F3">
-                <a:alpha val="45000"/>
-              </a:srgbClr>
-            </a:solidFill>
-            <a:prstDash val="solid"/>
-          </a:ln>
-        </p:spPr>
-      </p:sp>
-      <p:sp>
-        <p:nvSpPr>
-          <p:cNvPr id="18" name="Shape 16"/>
-          <p:cNvSpPr/>
-          <p:nvPr/>
-        </p:nvSpPr>
-        <p:spPr>
-          <a:xfrm>
-            <a:off x="4471416" y="5852160"/>
-            <a:ext cx="265176" cy="182880"/>
-          </a:xfrm>
-          <a:prstGeom prst="rect">
-            <a:avLst/>
-          </a:prstGeom>
-          <a:solidFill>
-            <a:srgbClr val="FFFFFF">
-              <a:alpha val="12000"/>
-            </a:srgbClr>
-          </a:solidFill>
-          <a:ln w="7620">
-            <a:solidFill>
-              <a:srgbClr val="6AB0F3">
-                <a:alpha val="45000"/>
-              </a:srgbClr>
-            </a:solidFill>
-            <a:prstDash val="solid"/>
-          </a:ln>
-        </p:spPr>
-      </p:sp>
-      <p:sp>
-        <p:nvSpPr>
-          <p:cNvPr id="19" name="Shape 17"/>
-          <p:cNvSpPr/>
-          <p:nvPr/>
-        </p:nvSpPr>
-        <p:spPr>
-          <a:xfrm>
-            <a:off x="4773168" y="5852160"/>
-            <a:ext cx="265176" cy="182880"/>
-          </a:xfrm>
-          <a:prstGeom prst="rect">
-            <a:avLst/>
-          </a:prstGeom>
-          <a:solidFill>
-            <a:srgbClr val="FFFFFF">
-              <a:alpha val="12000"/>
-            </a:srgbClr>
-          </a:solidFill>
-          <a:ln w="7620">
-            <a:solidFill>
-              <a:srgbClr val="6AB0F3">
-                <a:alpha val="45000"/>
-              </a:srgbClr>
-            </a:solidFill>
-            <a:prstDash val="solid"/>
-          </a:ln>
-        </p:spPr>
-      </p:sp>
-      <p:sp>
-        <p:nvSpPr>
-          <p:cNvPr id="20" name="Shape 18"/>
-          <p:cNvSpPr/>
-          <p:nvPr/>
-        </p:nvSpPr>
-        <p:spPr>
-          <a:xfrm>
-            <a:off x="5074920" y="5852160"/>
-            <a:ext cx="265176" cy="182880"/>
-          </a:xfrm>
-          <a:prstGeom prst="rect">
-            <a:avLst/>
-          </a:prstGeom>
-          <a:solidFill>
-            <a:srgbClr val="FFFFFF">
-              <a:alpha val="12000"/>
-            </a:srgbClr>
-          </a:solidFill>
-          <a:ln w="7620">
-            <a:solidFill>
-              <a:srgbClr val="6AB0F3">
-                <a:alpha val="45000"/>
-              </a:srgbClr>
-            </a:solidFill>
-            <a:prstDash val="solid"/>
-          </a:ln>
-        </p:spPr>
-      </p:sp>
-      <p:sp>
-        <p:nvSpPr>
-          <p:cNvPr id="21" name="Shape 19"/>
-          <p:cNvSpPr/>
-          <p:nvPr/>
-        </p:nvSpPr>
-        <p:spPr>
-          <a:xfrm>
-            <a:off x="5376672" y="5852160"/>
-            <a:ext cx="265176" cy="182880"/>
-          </a:xfrm>
-          <a:prstGeom prst="rect">
-            <a:avLst/>
-          </a:prstGeom>
-          <a:solidFill>
-            <a:srgbClr val="FFFFFF">
-              <a:alpha val="12000"/>
-            </a:srgbClr>
-          </a:solidFill>
-          <a:ln w="7620">
-            <a:solidFill>
-              <a:srgbClr val="6AB0F3">
-                <a:alpha val="45000"/>
-              </a:srgbClr>
-            </a:solidFill>
-            <a:prstDash val="solid"/>
-          </a:ln>
-        </p:spPr>
-      </p:sp>
-      <p:sp>
-        <p:nvSpPr>
-          <p:cNvPr id="22" name="Shape 20"/>
-          <p:cNvSpPr/>
-          <p:nvPr/>
-        </p:nvSpPr>
-        <p:spPr>
-          <a:xfrm>
-            <a:off x="5678424" y="5852160"/>
-            <a:ext cx="265176" cy="182880"/>
-          </a:xfrm>
-          <a:prstGeom prst="rect">
-            <a:avLst/>
-          </a:prstGeom>
-          <a:solidFill>
-            <a:srgbClr val="6AB0F3"/>
-          </a:solidFill>
-          <a:ln w="7620">
-            <a:solidFill>
-              <a:srgbClr val="6AB0F3">
-                <a:alpha val="45000"/>
-              </a:srgbClr>
-            </a:solidFill>
-            <a:prstDash val="solid"/>
-          </a:ln>
-        </p:spPr>
-      </p:sp>
-      <p:sp>
-        <p:nvSpPr>
-          <p:cNvPr id="23" name="Shape 21"/>
-          <p:cNvSpPr/>
-          <p:nvPr/>
-        </p:nvSpPr>
-        <p:spPr>
-          <a:xfrm>
-            <a:off x="5980176" y="5852160"/>
-            <a:ext cx="265176" cy="182880"/>
-          </a:xfrm>
-          <a:prstGeom prst="rect">
-            <a:avLst/>
-          </a:prstGeom>
-          <a:solidFill>
-            <a:srgbClr val="FFFFFF">
-              <a:alpha val="12000"/>
-            </a:srgbClr>
-          </a:solidFill>
-          <a:ln w="7620">
-            <a:solidFill>
-              <a:srgbClr val="6AB0F3">
-                <a:alpha val="45000"/>
-              </a:srgbClr>
-            </a:solidFill>
-            <a:prstDash val="solid"/>
-          </a:ln>
-        </p:spPr>
-      </p:sp>
-      <p:sp>
-        <p:nvSpPr>
-          <p:cNvPr id="24" name="Shape 22"/>
-          <p:cNvSpPr/>
-          <p:nvPr/>
-        </p:nvSpPr>
-        <p:spPr>
-          <a:xfrm>
-            <a:off x="6281928" y="5852160"/>
-            <a:ext cx="265176" cy="182880"/>
-          </a:xfrm>
-          <a:prstGeom prst="rect">
-            <a:avLst/>
-          </a:prstGeom>
-          <a:solidFill>
-            <a:srgbClr val="FFFFFF">
-              <a:alpha val="12000"/>
-            </a:srgbClr>
-          </a:solidFill>
-          <a:ln w="7620">
-            <a:solidFill>
-              <a:srgbClr val="6AB0F3">
-                <a:alpha val="45000"/>
-              </a:srgbClr>
-            </a:solidFill>
-            <a:prstDash val="solid"/>
-          </a:ln>
-        </p:spPr>
-      </p:sp>
-      <p:sp>
-        <p:nvSpPr>
-          <p:cNvPr id="25" name="Shape 23"/>
-          <p:cNvSpPr/>
-          <p:nvPr/>
-        </p:nvSpPr>
-        <p:spPr>
-          <a:xfrm>
-            <a:off x="6583680" y="5852160"/>
-            <a:ext cx="265176" cy="182880"/>
-          </a:xfrm>
-          <a:prstGeom prst="rect">
-            <a:avLst/>
-          </a:prstGeom>
-          <a:solidFill>
-            <a:srgbClr val="FFFFFF">
-              <a:alpha val="12000"/>
-            </a:srgbClr>
-          </a:solidFill>
-          <a:ln w="7620">
-            <a:solidFill>
-              <a:srgbClr val="6AB0F3">
-                <a:alpha val="45000"/>
-              </a:srgbClr>
-            </a:solidFill>
-            <a:prstDash val="solid"/>
-          </a:ln>
-        </p:spPr>
-      </p:sp>
-      <p:sp>
-        <p:nvSpPr>
-          <p:cNvPr id="26" name="Shape 24"/>
-          <p:cNvSpPr/>
-          <p:nvPr/>
-        </p:nvSpPr>
-        <p:spPr>
-          <a:xfrm>
-            <a:off x="6885432" y="5852160"/>
-            <a:ext cx="265176" cy="182880"/>
-          </a:xfrm>
-          <a:prstGeom prst="rect">
-            <a:avLst/>
-          </a:prstGeom>
-          <a:solidFill>
-            <a:srgbClr val="FFFFFF">
-              <a:alpha val="12000"/>
-            </a:srgbClr>
-          </a:solidFill>
-          <a:ln w="7620">
-            <a:solidFill>
-              <a:srgbClr val="6AB0F3">
-                <a:alpha val="45000"/>
-              </a:srgbClr>
-            </a:solidFill>
-            <a:prstDash val="solid"/>
-          </a:ln>
-        </p:spPr>
-      </p:sp>
-      <p:sp>
-        <p:nvSpPr>
-          <p:cNvPr id="27" name="Shape 25"/>
-          <p:cNvSpPr/>
-          <p:nvPr/>
-        </p:nvSpPr>
-        <p:spPr>
-          <a:xfrm>
-            <a:off x="7187184" y="5852160"/>
-            <a:ext cx="265176" cy="182880"/>
-          </a:xfrm>
-          <a:prstGeom prst="rect">
-            <a:avLst/>
-          </a:prstGeom>
-          <a:solidFill>
-            <a:srgbClr val="FFFFFF">
-              <a:alpha val="12000"/>
-            </a:srgbClr>
-          </a:solidFill>
-          <a:ln w="7620">
-            <a:solidFill>
-              <a:srgbClr val="6AB0F3">
-                <a:alpha val="45000"/>
-              </a:srgbClr>
-            </a:solidFill>
-            <a:prstDash val="solid"/>
-          </a:ln>
-        </p:spPr>
-      </p:sp>
-      <p:sp>
-        <p:nvSpPr>
-          <p:cNvPr id="28" name="Shape 26"/>
-          <p:cNvSpPr/>
-          <p:nvPr/>
-        </p:nvSpPr>
-        <p:spPr>
-          <a:xfrm>
-            <a:off x="7488936" y="5852160"/>
-            <a:ext cx="265176" cy="182880"/>
-          </a:xfrm>
-          <a:prstGeom prst="rect">
-            <a:avLst/>
-          </a:prstGeom>
-          <a:solidFill>
-            <a:srgbClr val="FFFFFF">
-              <a:alpha val="12000"/>
-            </a:srgbClr>
-          </a:solidFill>
-          <a:ln w="7620">
-            <a:solidFill>
-              <a:srgbClr val="6AB0F3">
-                <a:alpha val="45000"/>
-              </a:srgbClr>
-            </a:solidFill>
-            <a:prstDash val="solid"/>
-          </a:ln>
-        </p:spPr>
-      </p:sp>
-      <p:sp>
-        <p:nvSpPr>
-          <p:cNvPr id="29" name="Shape 27"/>
-          <p:cNvSpPr/>
-          <p:nvPr/>
-        </p:nvSpPr>
-        <p:spPr>
-          <a:xfrm>
-            <a:off x="7790688" y="5852160"/>
-            <a:ext cx="265176" cy="182880"/>
-          </a:xfrm>
-          <a:prstGeom prst="rect">
-            <a:avLst/>
-          </a:prstGeom>
-          <a:solidFill>
-            <a:srgbClr val="FFFFFF">
-              <a:alpha val="12000"/>
-            </a:srgbClr>
-          </a:solidFill>
-          <a:ln w="7620">
-            <a:solidFill>
-              <a:srgbClr val="6AB0F3">
-                <a:alpha val="45000"/>
-              </a:srgbClr>
-            </a:solidFill>
-            <a:prstDash val="solid"/>
-          </a:ln>
-        </p:spPr>
-      </p:sp>
-      <p:sp>
-        <p:nvSpPr>
-          <p:cNvPr id="30" name="Shape 28"/>
-          <p:cNvSpPr/>
-          <p:nvPr/>
-        </p:nvSpPr>
-        <p:spPr>
-          <a:xfrm>
-            <a:off x="8092440" y="5852160"/>
-            <a:ext cx="265176" cy="182880"/>
-          </a:xfrm>
-          <a:prstGeom prst="rect">
-            <a:avLst/>
-          </a:prstGeom>
-          <a:solidFill>
-            <a:srgbClr val="6AB0F3"/>
-          </a:solidFill>
-          <a:ln w="7620">
-            <a:solidFill>
-              <a:srgbClr val="6AB0F3">
-                <a:alpha val="45000"/>
-              </a:srgbClr>
-            </a:solidFill>
-            <a:prstDash val="solid"/>
-          </a:ln>
-        </p:spPr>
-      </p:sp>
-    </p:spTree>
-  </p:cSld>
-  <p:clrMapOvr>
-    <a:masterClrMapping/>
-  </p:clrMapOvr>
-</p:sld>
-</file>
-
-<file path=ppt/slides/slide20.xml><?xml version="1.0" encoding="utf-8"?>
-<p:sld xmlns:a="http://schemas.openxmlformats.org/drawingml/2006/main" xmlns:r="http://schemas.openxmlformats.org/officeDocument/2006/relationships" xmlns:p="http://schemas.openxmlformats.org/presentationml/2006/main">
-  <p:cSld name="Slide 20">
-    <p:bg>
-      <p:bgPr>
-        <a:solidFill>
-          <a:srgbClr val="FFFFFF"/>
-        </a:solidFill>
-      </p:bgPr>
-    </p:bg>
-    <p:spTree>
-      <p:nvGrpSpPr>
-        <p:cNvPr id="1" name=""/>
-        <p:cNvGrpSpPr/>
-        <p:nvPr/>
-      </p:nvGrpSpPr>
-      <p:grpSpPr>
-        <a:xfrm>
-          <a:off x="0" y="0"/>
-          <a:ext cx="0" cy="0"/>
-          <a:chOff x="0" y="0"/>
-          <a:chExt cx="0" cy="0"/>
-        </a:xfrm>
-      </p:grpSpPr>
-      <p:sp>
-        <p:nvSpPr>
-          <p:cNvPr id="2" name="Text 0"/>
-          <p:cNvSpPr/>
-          <p:nvPr/>
-        </p:nvSpPr>
-        <p:spPr>
-          <a:xfrm>
-            <a:off x="566928" y="310896"/>
-            <a:ext cx="4572000" cy="256032"/>
-          </a:xfrm>
-          <a:prstGeom prst="rect">
-            <a:avLst/>
-          </a:prstGeom>
-          <a:noFill/>
-          <a:ln/>
-        </p:spPr>
-        <p:txBody>
-          <a:bodyPr wrap="square" lIns="0" tIns="0" rIns="0" bIns="0" rtlCol="0" anchor="ctr"/>
-          <a:lstStyle/>
-          <a:p>
-            <a:pPr indent="0" marL="0">
-              <a:buNone/>
-            </a:pPr>
-            <a:r>
-              <a:rPr lang="en-US" sz="1200" b="1" dirty="0">
-                <a:solidFill>
-                  <a:srgbClr val="0B5CAD"/>
-                </a:solidFill>
-                <a:latin typeface="Yu Gothic" pitchFamily="34" charset="0"/>
-                <a:ea typeface="Yu Gothic" pitchFamily="34" charset="-122"/>
-                <a:cs typeface="Yu Gothic" pitchFamily="34" charset="-120"/>
-              </a:rPr>
-              <a:t>5.4　並列性</a:t>
-            </a:r>
-            <a:endParaRPr lang="en-US" sz="1200" dirty="0"/>
-          </a:p>
-        </p:txBody>
-      </p:sp>
-      <p:sp>
-        <p:nvSpPr>
-          <p:cNvPr id="3" name="Text 1"/>
-          <p:cNvSpPr/>
-          <p:nvPr/>
-        </p:nvSpPr>
-        <p:spPr>
-          <a:xfrm>
-            <a:off x="548640" y="603504"/>
-            <a:ext cx="11064240" cy="731520"/>
-          </a:xfrm>
-          <a:prstGeom prst="rect">
-            <a:avLst/>
-          </a:prstGeom>
-          <a:noFill/>
-          <a:ln/>
-        </p:spPr>
-        <p:txBody>
-          <a:bodyPr wrap="square" lIns="0" tIns="0" rIns="0" bIns="0" rtlCol="0" anchor="t"/>
-          <a:lstStyle/>
-          <a:p>
-            <a:pPr indent="0" marL="0">
-              <a:buNone/>
-            </a:pPr>
-            <a:r>
-              <a:rPr lang="en-US" sz="3000" b="1" dirty="0">
-                <a:solidFill>
-                  <a:srgbClr val="16191D"/>
-                </a:solidFill>
-                <a:latin typeface="Yu Gothic" pitchFamily="34" charset="0"/>
-                <a:ea typeface="Yu Gothic" pitchFamily="34" charset="-122"/>
-                <a:cs typeface="Yu Gothic" pitchFamily="34" charset="-120"/>
-              </a:rPr>
-              <a:t>並列性の階層</a:t>
-            </a:r>
-            <a:endParaRPr lang="en-US" sz="3000" dirty="0"/>
-          </a:p>
-        </p:txBody>
-      </p:sp>
-      <p:sp>
-        <p:nvSpPr>
-          <p:cNvPr id="4" name="Text 2"/>
-          <p:cNvSpPr/>
-          <p:nvPr/>
-        </p:nvSpPr>
-        <p:spPr>
-          <a:xfrm>
-            <a:off x="11247120" y="6355080"/>
-            <a:ext cx="548640" cy="274320"/>
-          </a:xfrm>
-          <a:prstGeom prst="rect">
-            <a:avLst/>
-          </a:prstGeom>
-          <a:noFill/>
-          <a:ln/>
-        </p:spPr>
-        <p:txBody>
-          <a:bodyPr wrap="square" lIns="0" tIns="0" rIns="0" bIns="0" rtlCol="0" anchor="ctr"/>
-          <a:lstStyle/>
-          <a:p>
-            <a:pPr algn="r" indent="0" marL="0">
-              <a:buNone/>
-            </a:pPr>
-            <a:r>
-              <a:rPr lang="en-US" sz="1000" dirty="0">
-                <a:solidFill>
-                  <a:srgbClr val="5F6672"/>
-                </a:solidFill>
-                <a:latin typeface="Yu Gothic" pitchFamily="34" charset="0"/>
-                <a:ea typeface="Yu Gothic" pitchFamily="34" charset="-122"/>
-                <a:cs typeface="Yu Gothic" pitchFamily="34" charset="-120"/>
-              </a:rPr>
-              <a:t>20</a:t>
-            </a:r>
-            <a:endParaRPr lang="en-US" sz="1000" dirty="0"/>
-          </a:p>
-        </p:txBody>
-      </p:sp>
-      <p:sp>
-        <p:nvSpPr>
-          <p:cNvPr id="5" name="Shape 3"/>
-          <p:cNvSpPr/>
-          <p:nvPr/>
-        </p:nvSpPr>
-        <p:spPr>
-          <a:xfrm>
-            <a:off x="685800" y="1481328"/>
-            <a:ext cx="5280660" cy="1371600"/>
-          </a:xfrm>
-          <a:prstGeom prst="roundRect">
-            <a:avLst>
-              <a:gd name="adj" fmla="val 4000"/>
-            </a:avLst>
-          </a:prstGeom>
-          <a:solidFill>
-            <a:srgbClr val="EEF1F5"/>
-          </a:solidFill>
-          <a:ln w="12700">
-            <a:solidFill>
-              <a:srgbClr val="DDE4EC"/>
-            </a:solidFill>
-            <a:prstDash val="solid"/>
-          </a:ln>
-        </p:spPr>
-      </p:sp>
-      <p:sp>
-        <p:nvSpPr>
-          <p:cNvPr id="6" name="Text 4"/>
-          <p:cNvSpPr/>
-          <p:nvPr/>
-        </p:nvSpPr>
-        <p:spPr>
-          <a:xfrm>
-            <a:off x="868680" y="1618488"/>
-            <a:ext cx="4914900" cy="310896"/>
-          </a:xfrm>
-          <a:prstGeom prst="rect">
-            <a:avLst/>
-          </a:prstGeom>
-          <a:noFill/>
-          <a:ln/>
-        </p:spPr>
-        <p:txBody>
-          <a:bodyPr wrap="square" lIns="0" tIns="0" rIns="0" bIns="0" rtlCol="0" anchor="ctr"/>
-          <a:lstStyle/>
-          <a:p>
-            <a:pPr indent="0" marL="0">
-              <a:buNone/>
-            </a:pPr>
-            <a:r>
-              <a:rPr lang="en-US" sz="1400" b="1" dirty="0">
-                <a:solidFill>
-                  <a:srgbClr val="16191D"/>
-                </a:solidFill>
-                <a:latin typeface="Yu Gothic" pitchFamily="34" charset="0"/>
-                <a:ea typeface="Yu Gothic" pitchFamily="34" charset="-122"/>
-                <a:cs typeface="Yu Gothic" pitchFamily="34" charset="-120"/>
-              </a:rPr>
-              <a:t>スーパースカラ</a:t>
-            </a:r>
-            <a:endParaRPr lang="en-US" sz="1400" dirty="0"/>
-          </a:p>
-        </p:txBody>
-      </p:sp>
-      <p:sp>
-        <p:nvSpPr>
-          <p:cNvPr id="7" name="Text 5"/>
-          <p:cNvSpPr/>
-          <p:nvPr/>
-        </p:nvSpPr>
-        <p:spPr>
-          <a:xfrm>
-            <a:off x="868680" y="1965960"/>
-            <a:ext cx="4914900" cy="731520"/>
-          </a:xfrm>
-          <a:prstGeom prst="rect">
-            <a:avLst/>
-          </a:prstGeom>
-          <a:noFill/>
-          <a:ln/>
-        </p:spPr>
-        <p:txBody>
-          <a:bodyPr wrap="square" lIns="0" tIns="0" rIns="0" bIns="0" rtlCol="0" anchor="t"/>
-          <a:lstStyle/>
-          <a:p>
-            <a:pPr indent="0" marL="0">
-              <a:lnSpc>
-                <a:spcPts val="1600"/>
-              </a:lnSpc>
-              <a:buNone/>
-            </a:pPr>
-            <a:r>
-              <a:rPr lang="en-US" sz="1200" dirty="0">
-                <a:solidFill>
-                  <a:srgbClr val="5F6672"/>
-                </a:solidFill>
-                <a:latin typeface="Yu Gothic" pitchFamily="34" charset="0"/>
-                <a:ea typeface="Yu Gothic" pitchFamily="34" charset="-122"/>
-                <a:cs typeface="Yu Gothic" pitchFamily="34" charset="-120"/>
-              </a:rPr>
-              <a:t>演算器を複数持ち、依存関係のない命令を同時に発行する。アウトオブオーダ実行では順序も入れ替える</a:t>
-            </a:r>
-            <a:endParaRPr lang="en-US" sz="1200" dirty="0"/>
-          </a:p>
-        </p:txBody>
-      </p:sp>
-      <p:sp>
-        <p:nvSpPr>
-          <p:cNvPr id="8" name="Shape 6"/>
-          <p:cNvSpPr/>
-          <p:nvPr/>
-        </p:nvSpPr>
-        <p:spPr>
-          <a:xfrm>
-            <a:off x="6195060" y="1481328"/>
-            <a:ext cx="5280660" cy="1371600"/>
-          </a:xfrm>
-          <a:prstGeom prst="roundRect">
-            <a:avLst>
-              <a:gd name="adj" fmla="val 4000"/>
-            </a:avLst>
-          </a:prstGeom>
-          <a:solidFill>
-            <a:srgbClr val="EEF1F5"/>
-          </a:solidFill>
-          <a:ln w="12700">
-            <a:solidFill>
-              <a:srgbClr val="DDE4EC"/>
-            </a:solidFill>
-            <a:prstDash val="solid"/>
-          </a:ln>
-        </p:spPr>
-      </p:sp>
-      <p:sp>
-        <p:nvSpPr>
-          <p:cNvPr id="9" name="Text 7"/>
-          <p:cNvSpPr/>
-          <p:nvPr/>
-        </p:nvSpPr>
-        <p:spPr>
-          <a:xfrm>
-            <a:off x="6377940" y="1618488"/>
-            <a:ext cx="4914900" cy="310896"/>
-          </a:xfrm>
-          <a:prstGeom prst="rect">
-            <a:avLst/>
-          </a:prstGeom>
-          <a:noFill/>
-          <a:ln/>
-        </p:spPr>
-        <p:txBody>
-          <a:bodyPr wrap="square" lIns="0" tIns="0" rIns="0" bIns="0" rtlCol="0" anchor="ctr"/>
-          <a:lstStyle/>
-          <a:p>
-            <a:pPr indent="0" marL="0">
-              <a:buNone/>
-            </a:pPr>
-            <a:r>
-              <a:rPr lang="en-US" sz="1400" b="1" dirty="0">
-                <a:solidFill>
-                  <a:srgbClr val="16191D"/>
-                </a:solidFill>
-                <a:latin typeface="Yu Gothic" pitchFamily="34" charset="0"/>
-                <a:ea typeface="Yu Gothic" pitchFamily="34" charset="-122"/>
-                <a:cs typeface="Yu Gothic" pitchFamily="34" charset="-120"/>
-              </a:rPr>
-              <a:t>SIMD</a:t>
-            </a:r>
-            <a:endParaRPr lang="en-US" sz="1400" dirty="0"/>
-          </a:p>
-        </p:txBody>
-      </p:sp>
-      <p:sp>
-        <p:nvSpPr>
-          <p:cNvPr id="10" name="Text 8"/>
-          <p:cNvSpPr/>
-          <p:nvPr/>
-        </p:nvSpPr>
-        <p:spPr>
-          <a:xfrm>
-            <a:off x="6377940" y="1965960"/>
-            <a:ext cx="4914900" cy="731520"/>
-          </a:xfrm>
-          <a:prstGeom prst="rect">
-            <a:avLst/>
-          </a:prstGeom>
-          <a:noFill/>
-          <a:ln/>
-        </p:spPr>
-        <p:txBody>
-          <a:bodyPr wrap="square" lIns="0" tIns="0" rIns="0" bIns="0" rtlCol="0" anchor="t"/>
-          <a:lstStyle/>
-          <a:p>
-            <a:pPr indent="0" marL="0">
-              <a:lnSpc>
-                <a:spcPts val="1600"/>
-              </a:lnSpc>
-              <a:buNone/>
-            </a:pPr>
-            <a:r>
-              <a:rPr lang="en-US" sz="1200" dirty="0">
-                <a:solidFill>
-                  <a:srgbClr val="5F6672"/>
-                </a:solidFill>
-                <a:latin typeface="Yu Gothic" pitchFamily="34" charset="0"/>
-                <a:ea typeface="Yu Gothic" pitchFamily="34" charset="-122"/>
-                <a:cs typeface="Yu Gothic" pitchFamily="34" charset="-120"/>
-              </a:rPr>
-              <a:t>1つの命令で複数のデータに同じ演算をする。画像・音声・行列演算で効く</a:t>
-            </a:r>
-            <a:endParaRPr lang="en-US" sz="1200" dirty="0"/>
-          </a:p>
-        </p:txBody>
-      </p:sp>
-      <p:sp>
-        <p:nvSpPr>
-          <p:cNvPr id="11" name="Shape 9"/>
-          <p:cNvSpPr/>
-          <p:nvPr/>
-        </p:nvSpPr>
-        <p:spPr>
-          <a:xfrm>
-            <a:off x="685800" y="3054096"/>
-            <a:ext cx="5280660" cy="1371600"/>
-          </a:xfrm>
-          <a:prstGeom prst="roundRect">
-            <a:avLst>
-              <a:gd name="adj" fmla="val 4000"/>
-            </a:avLst>
-          </a:prstGeom>
-          <a:solidFill>
-            <a:srgbClr val="EEF1F5"/>
-          </a:solidFill>
-          <a:ln w="12700">
-            <a:solidFill>
-              <a:srgbClr val="DDE4EC"/>
-            </a:solidFill>
-            <a:prstDash val="solid"/>
-          </a:ln>
-        </p:spPr>
-      </p:sp>
-      <p:sp>
-        <p:nvSpPr>
-          <p:cNvPr id="12" name="Text 10"/>
-          <p:cNvSpPr/>
-          <p:nvPr/>
-        </p:nvSpPr>
-        <p:spPr>
-          <a:xfrm>
-            <a:off x="868680" y="3191256"/>
-            <a:ext cx="4914900" cy="310896"/>
-          </a:xfrm>
-          <a:prstGeom prst="rect">
-            <a:avLst/>
-          </a:prstGeom>
-          <a:noFill/>
-          <a:ln/>
-        </p:spPr>
-        <p:txBody>
-          <a:bodyPr wrap="square" lIns="0" tIns="0" rIns="0" bIns="0" rtlCol="0" anchor="ctr"/>
-          <a:lstStyle/>
-          <a:p>
-            <a:pPr indent="0" marL="0">
-              <a:buNone/>
-            </a:pPr>
-            <a:r>
-              <a:rPr lang="en-US" sz="1400" b="1" dirty="0">
-                <a:solidFill>
-                  <a:srgbClr val="16191D"/>
-                </a:solidFill>
-                <a:latin typeface="Yu Gothic" pitchFamily="34" charset="0"/>
-                <a:ea typeface="Yu Gothic" pitchFamily="34" charset="-122"/>
-                <a:cs typeface="Yu Gothic" pitchFamily="34" charset="-120"/>
-              </a:rPr>
-              <a:t>GPU</a:t>
-            </a:r>
-            <a:endParaRPr lang="en-US" sz="1400" dirty="0"/>
-          </a:p>
-        </p:txBody>
-      </p:sp>
-      <p:sp>
-        <p:nvSpPr>
-          <p:cNvPr id="13" name="Text 11"/>
-          <p:cNvSpPr/>
-          <p:nvPr/>
-        </p:nvSpPr>
-        <p:spPr>
-          <a:xfrm>
-            <a:off x="868680" y="3538728"/>
-            <a:ext cx="4914900" cy="731520"/>
-          </a:xfrm>
-          <a:prstGeom prst="rect">
-            <a:avLst/>
-          </a:prstGeom>
-          <a:noFill/>
-          <a:ln/>
-        </p:spPr>
-        <p:txBody>
-          <a:bodyPr wrap="square" lIns="0" tIns="0" rIns="0" bIns="0" rtlCol="0" anchor="t"/>
-          <a:lstStyle/>
-          <a:p>
-            <a:pPr indent="0" marL="0">
-              <a:lnSpc>
-                <a:spcPts val="1600"/>
-              </a:lnSpc>
-              <a:buNone/>
-            </a:pPr>
-            <a:r>
-              <a:rPr lang="en-US" sz="1200" dirty="0">
-                <a:solidFill>
-                  <a:srgbClr val="5F6672"/>
-                </a:solidFill>
-                <a:latin typeface="Yu Gothic" pitchFamily="34" charset="0"/>
-                <a:ea typeface="Yu Gothic" pitchFamily="34" charset="-122"/>
-                <a:cs typeface="Yu Gothic" pitchFamily="34" charset="-120"/>
-              </a:rPr>
-              <a:t>SIMD を極端に推し進めたもの。単純なコアを数千〜数万。深層学習が使うのはこのため</a:t>
-            </a:r>
-            <a:endParaRPr lang="en-US" sz="1200" dirty="0"/>
-          </a:p>
-        </p:txBody>
-      </p:sp>
-      <p:sp>
-        <p:nvSpPr>
-          <p:cNvPr id="14" name="Shape 12"/>
-          <p:cNvSpPr/>
-          <p:nvPr/>
-        </p:nvSpPr>
-        <p:spPr>
-          <a:xfrm>
-            <a:off x="6195060" y="3054096"/>
-            <a:ext cx="5280660" cy="1371600"/>
-          </a:xfrm>
-          <a:prstGeom prst="roundRect">
-            <a:avLst>
-              <a:gd name="adj" fmla="val 4000"/>
-            </a:avLst>
-          </a:prstGeom>
-          <a:solidFill>
-            <a:srgbClr val="EEF1F5"/>
-          </a:solidFill>
-          <a:ln w="12700">
-            <a:solidFill>
-              <a:srgbClr val="DDE4EC"/>
-            </a:solidFill>
-            <a:prstDash val="solid"/>
-          </a:ln>
-        </p:spPr>
-      </p:sp>
-      <p:sp>
-        <p:nvSpPr>
-          <p:cNvPr id="15" name="Text 13"/>
-          <p:cNvSpPr/>
-          <p:nvPr/>
-        </p:nvSpPr>
-        <p:spPr>
-          <a:xfrm>
-            <a:off x="6377940" y="3191256"/>
-            <a:ext cx="4914900" cy="310896"/>
-          </a:xfrm>
-          <a:prstGeom prst="rect">
-            <a:avLst/>
-          </a:prstGeom>
-          <a:noFill/>
-          <a:ln/>
-        </p:spPr>
-        <p:txBody>
-          <a:bodyPr wrap="square" lIns="0" tIns="0" rIns="0" bIns="0" rtlCol="0" anchor="ctr"/>
-          <a:lstStyle/>
-          <a:p>
-            <a:pPr indent="0" marL="0">
-              <a:buNone/>
-            </a:pPr>
-            <a:r>
-              <a:rPr lang="en-US" sz="1400" b="1" dirty="0">
-                <a:solidFill>
-                  <a:srgbClr val="16191D"/>
-                </a:solidFill>
-                <a:latin typeface="Yu Gothic" pitchFamily="34" charset="0"/>
-                <a:ea typeface="Yu Gothic" pitchFamily="34" charset="-122"/>
-                <a:cs typeface="Yu Gothic" pitchFamily="34" charset="-120"/>
-              </a:rPr>
-              <a:t>マルチコア</a:t>
-            </a:r>
-            <a:endParaRPr lang="en-US" sz="1400" dirty="0"/>
-          </a:p>
-        </p:txBody>
-      </p:sp>
-      <p:sp>
-        <p:nvSpPr>
-          <p:cNvPr id="16" name="Text 14"/>
-          <p:cNvSpPr/>
-          <p:nvPr/>
-        </p:nvSpPr>
-        <p:spPr>
-          <a:xfrm>
-            <a:off x="6377940" y="3538728"/>
-            <a:ext cx="4914900" cy="731520"/>
-          </a:xfrm>
-          <a:prstGeom prst="rect">
-            <a:avLst/>
-          </a:prstGeom>
-          <a:noFill/>
-          <a:ln/>
-        </p:spPr>
-        <p:txBody>
-          <a:bodyPr wrap="square" lIns="0" tIns="0" rIns="0" bIns="0" rtlCol="0" anchor="t"/>
-          <a:lstStyle/>
-          <a:p>
-            <a:pPr indent="0" marL="0">
-              <a:lnSpc>
-                <a:spcPts val="1600"/>
-              </a:lnSpc>
-              <a:buNone/>
-            </a:pPr>
-            <a:r>
-              <a:rPr lang="en-US" sz="1200" dirty="0">
-                <a:solidFill>
-                  <a:srgbClr val="5F6672"/>
-                </a:solidFill>
-                <a:latin typeface="Yu Gothic" pitchFamily="34" charset="0"/>
-                <a:ea typeface="Yu Gothic" pitchFamily="34" charset="-122"/>
-                <a:cs typeface="Yu Gothic" pitchFamily="34" charset="-120"/>
-              </a:rPr>
-              <a:t>別々のスレッドを同時に実行する。ハードウェア任せにできず、プログラム側の対応が要る</a:t>
-            </a:r>
-            <a:endParaRPr lang="en-US" sz="1200" dirty="0"/>
-          </a:p>
-        </p:txBody>
-      </p:sp>
-      <p:sp>
-        <p:nvSpPr>
-          <p:cNvPr id="17" name="Text 15"/>
-          <p:cNvSpPr/>
-          <p:nvPr/>
-        </p:nvSpPr>
-        <p:spPr>
-          <a:xfrm>
-            <a:off x="685800" y="5029200"/>
-            <a:ext cx="10789920" cy="512064"/>
-          </a:xfrm>
-          <a:prstGeom prst="rect">
-            <a:avLst/>
-          </a:prstGeom>
-          <a:noFill/>
-          <a:ln/>
-        </p:spPr>
-        <p:txBody>
-          <a:bodyPr wrap="square" lIns="0" tIns="0" rIns="0" bIns="0" rtlCol="0" anchor="ctr"/>
-          <a:lstStyle/>
-          <a:p>
-            <a:pPr indent="0" marL="0">
-              <a:lnSpc>
-                <a:spcPts val="1900"/>
-              </a:lnSpc>
-              <a:buNone/>
-            </a:pPr>
-            <a:r>
-              <a:rPr lang="en-US" sz="1300" b="1" dirty="0">
-                <a:solidFill>
-                  <a:srgbClr val="0B5CAD"/>
-                </a:solidFill>
-                <a:latin typeface="Yu Gothic" pitchFamily="34" charset="0"/>
-                <a:ea typeface="Yu Gothic" pitchFamily="34" charset="-122"/>
-                <a:cs typeface="Yu Gothic" pitchFamily="34" charset="-120"/>
-              </a:rPr>
-              <a:t>(1)〜(3) はハードウェアが勝手にやってくれる。マルチコアだけは、1スレッドのプログラムだとコアが100個あっても1個しか使わない。</a:t>
-            </a:r>
-            <a:endParaRPr lang="en-US" sz="1300" dirty="0"/>
-          </a:p>
-        </p:txBody>
-      </p:sp>
-    </p:spTree>
-  </p:cSld>
-  <p:clrMapOvr>
-    <a:masterClrMapping/>
-  </p:clrMapOvr>
-</p:sld>
-</file>
-
 <file path=ppt/slides/slide21.xml><?xml version="1.0" encoding="utf-8"?>
 <p:sld xmlns:a="http://schemas.openxmlformats.org/drawingml/2006/main" xmlns:r="http://schemas.openxmlformats.org/officeDocument/2006/relationships" xmlns:p="http://schemas.openxmlformats.org/presentationml/2006/main">
   <p:cSld name="Slide 21">
@@ -12172,7 +11850,7 @@
                 <a:ea typeface="Yu Gothic" pitchFamily="34" charset="-122"/>
                 <a:cs typeface="Yu Gothic" pitchFamily="34" charset="-120"/>
               </a:rPr>
-              <a:t>アムダールの法則</a:t>
+              <a:t>並列性の階層</a:t>
             </a:r>
             <a:endParaRPr lang="en-US" sz="3000" dirty="0"/>
           </a:p>
@@ -12219,14 +11897,41 @@
       </p:sp>
       <p:sp>
         <p:nvSpPr>
-          <p:cNvPr id="5" name="Text 3"/>
+          <p:cNvPr id="5" name="Shape 3"/>
           <p:cNvSpPr/>
           <p:nvPr/>
         </p:nvSpPr>
         <p:spPr>
           <a:xfrm>
             <a:off x="685800" y="1481328"/>
-            <a:ext cx="10789920" cy="365760"/>
+            <a:ext cx="5280660" cy="1371600"/>
+          </a:xfrm>
+          <a:prstGeom prst="roundRect">
+            <a:avLst>
+              <a:gd name="adj" fmla="val 4000"/>
+            </a:avLst>
+          </a:prstGeom>
+          <a:solidFill>
+            <a:srgbClr val="EEF1F5"/>
+          </a:solidFill>
+          <a:ln w="12700">
+            <a:solidFill>
+              <a:srgbClr val="DDE4EC"/>
+            </a:solidFill>
+            <a:prstDash val="solid"/>
+          </a:ln>
+        </p:spPr>
+      </p:sp>
+      <p:sp>
+        <p:nvSpPr>
+          <p:cNvPr id="6" name="Text 4"/>
+          <p:cNvSpPr/>
+          <p:nvPr/>
+        </p:nvSpPr>
+        <p:spPr>
+          <a:xfrm>
+            <a:off x="868680" y="1618488"/>
+            <a:ext cx="4914900" cy="310896"/>
           </a:xfrm>
           <a:prstGeom prst="rect">
             <a:avLst/>
@@ -12239,13 +11944,10 @@
           <a:lstStyle/>
           <a:p>
             <a:pPr indent="0" marL="0">
-              <a:lnSpc>
-                <a:spcPts val="2200"/>
-              </a:lnSpc>
-              <a:buNone/>
-            </a:pPr>
-            <a:r>
-              <a:rPr lang="en-US" sz="1500" dirty="0">
+              <a:buNone/>
+            </a:pPr>
+            <a:r>
+              <a:rPr lang="en-US" sz="1400" b="1" dirty="0">
                 <a:solidFill>
                   <a:srgbClr val="16191D"/>
                 </a:solidFill>
@@ -12253,46 +11955,22 @@
                 <a:ea typeface="Yu Gothic" pitchFamily="34" charset="-122"/>
                 <a:cs typeface="Yu Gothic" pitchFamily="34" charset="-120"/>
               </a:rPr>
-              <a:t>並列化できる割合を p、コア数を n とすると、高速化率は S = 1 / ((1 − p) + p/n)。</a:t>
-            </a:r>
-            <a:endParaRPr lang="en-US" sz="1500" dirty="0"/>
-          </a:p>
-        </p:txBody>
-      </p:sp>
-      <p:pic>
-        <p:nvPicPr>
-          <p:cNvPr id="6" name="Image 0" descr="/Users/koide/Documents/Playground/CompOutline/slides/png/fig-05-06.png">    </p:cNvPr>
-          <p:cNvPicPr>
-            <a:picLocks noChangeAspect="1"/>
-          </p:cNvPicPr>
-          <p:nvPr/>
-        </p:nvPicPr>
-        <p:blipFill>
-          <a:blip r:embed="rId1"/>
-          <a:stretch>
-            <a:fillRect/>
-          </a:stretch>
-        </p:blipFill>
-        <p:spPr>
-          <a:xfrm>
-            <a:off x="3018434" y="1883664"/>
-            <a:ext cx="6124651" cy="3602736"/>
-          </a:xfrm>
-          <a:prstGeom prst="rect">
-            <a:avLst/>
-          </a:prstGeom>
-        </p:spPr>
-      </p:pic>
-      <p:sp>
-        <p:nvSpPr>
-          <p:cNvPr id="7" name="Text 4"/>
-          <p:cNvSpPr/>
-          <p:nvPr/>
-        </p:nvSpPr>
-        <p:spPr>
-          <a:xfrm>
-            <a:off x="685800" y="5687568"/>
-            <a:ext cx="10789920" cy="365760"/>
+              <a:t>スーパースカラ</a:t>
+            </a:r>
+            <a:endParaRPr lang="en-US" sz="1400" dirty="0"/>
+          </a:p>
+        </p:txBody>
+      </p:sp>
+      <p:sp>
+        <p:nvSpPr>
+          <p:cNvPr id="7" name="Text 5"/>
+          <p:cNvSpPr/>
+          <p:nvPr/>
+        </p:nvSpPr>
+        <p:spPr>
+          <a:xfrm>
+            <a:off x="868680" y="1965960"/>
+            <a:ext cx="4914900" cy="731520"/>
           </a:xfrm>
           <a:prstGeom prst="rect">
             <a:avLst/>
@@ -12301,24 +11979,393 @@
           <a:ln/>
         </p:spPr>
         <p:txBody>
-          <a:bodyPr wrap="square" lIns="0" tIns="0" rIns="0" bIns="0" rtlCol="0" anchor="ctr"/>
-          <a:lstStyle/>
-          <a:p>
-            <a:pPr algn="ctr" indent="0" marL="0">
-              <a:buNone/>
-            </a:pPr>
-            <a:r>
-              <a:rPr lang="en-US" sz="1500" dirty="0">
-                <a:solidFill>
-                  <a:srgbClr val="16191D"/>
+          <a:bodyPr wrap="square" lIns="0" tIns="0" rIns="0" bIns="0" rtlCol="0" anchor="t"/>
+          <a:lstStyle/>
+          <a:p>
+            <a:pPr indent="0" marL="0">
+              <a:lnSpc>
+                <a:spcPts val="1600"/>
+              </a:lnSpc>
+              <a:buNone/>
+            </a:pPr>
+            <a:r>
+              <a:rPr lang="en-US" sz="1200" dirty="0">
+                <a:solidFill>
+                  <a:srgbClr val="5F6672"/>
                 </a:solidFill>
                 <a:latin typeface="Yu Gothic" pitchFamily="34" charset="0"/>
                 <a:ea typeface="Yu Gothic" pitchFamily="34" charset="-122"/>
                 <a:cs typeface="Yu Gothic" pitchFamily="34" charset="-120"/>
               </a:rPr>
-              <a:t>n を無限に大きくしても、S は 1/(1−p) を超えない。</a:t>
-            </a:r>
-            <a:endParaRPr lang="en-US" sz="1500" dirty="0"/>
+              <a:t>演算器を複数持ち、依存関係のない命令を同時に発行する。アウトオブオーダ実行では順序も入れ替える</a:t>
+            </a:r>
+            <a:endParaRPr lang="en-US" sz="1200" dirty="0"/>
+          </a:p>
+        </p:txBody>
+      </p:sp>
+      <p:sp>
+        <p:nvSpPr>
+          <p:cNvPr id="8" name="Shape 6"/>
+          <p:cNvSpPr/>
+          <p:nvPr/>
+        </p:nvSpPr>
+        <p:spPr>
+          <a:xfrm>
+            <a:off x="6195060" y="1481328"/>
+            <a:ext cx="5280660" cy="1371600"/>
+          </a:xfrm>
+          <a:prstGeom prst="roundRect">
+            <a:avLst>
+              <a:gd name="adj" fmla="val 4000"/>
+            </a:avLst>
+          </a:prstGeom>
+          <a:solidFill>
+            <a:srgbClr val="EEF1F5"/>
+          </a:solidFill>
+          <a:ln w="12700">
+            <a:solidFill>
+              <a:srgbClr val="DDE4EC"/>
+            </a:solidFill>
+            <a:prstDash val="solid"/>
+          </a:ln>
+        </p:spPr>
+      </p:sp>
+      <p:sp>
+        <p:nvSpPr>
+          <p:cNvPr id="9" name="Text 7"/>
+          <p:cNvSpPr/>
+          <p:nvPr/>
+        </p:nvSpPr>
+        <p:spPr>
+          <a:xfrm>
+            <a:off x="6377940" y="1618488"/>
+            <a:ext cx="4914900" cy="310896"/>
+          </a:xfrm>
+          <a:prstGeom prst="rect">
+            <a:avLst/>
+          </a:prstGeom>
+          <a:noFill/>
+          <a:ln/>
+        </p:spPr>
+        <p:txBody>
+          <a:bodyPr wrap="square" lIns="0" tIns="0" rIns="0" bIns="0" rtlCol="0" anchor="ctr"/>
+          <a:lstStyle/>
+          <a:p>
+            <a:pPr indent="0" marL="0">
+              <a:buNone/>
+            </a:pPr>
+            <a:r>
+              <a:rPr lang="en-US" sz="1400" b="1" dirty="0">
+                <a:solidFill>
+                  <a:srgbClr val="16191D"/>
+                </a:solidFill>
+                <a:latin typeface="Yu Gothic" pitchFamily="34" charset="0"/>
+                <a:ea typeface="Yu Gothic" pitchFamily="34" charset="-122"/>
+                <a:cs typeface="Yu Gothic" pitchFamily="34" charset="-120"/>
+              </a:rPr>
+              <a:t>SIMD</a:t>
+            </a:r>
+            <a:endParaRPr lang="en-US" sz="1400" dirty="0"/>
+          </a:p>
+        </p:txBody>
+      </p:sp>
+      <p:sp>
+        <p:nvSpPr>
+          <p:cNvPr id="10" name="Text 8"/>
+          <p:cNvSpPr/>
+          <p:nvPr/>
+        </p:nvSpPr>
+        <p:spPr>
+          <a:xfrm>
+            <a:off x="6377940" y="1965960"/>
+            <a:ext cx="4914900" cy="731520"/>
+          </a:xfrm>
+          <a:prstGeom prst="rect">
+            <a:avLst/>
+          </a:prstGeom>
+          <a:noFill/>
+          <a:ln/>
+        </p:spPr>
+        <p:txBody>
+          <a:bodyPr wrap="square" lIns="0" tIns="0" rIns="0" bIns="0" rtlCol="0" anchor="t"/>
+          <a:lstStyle/>
+          <a:p>
+            <a:pPr indent="0" marL="0">
+              <a:lnSpc>
+                <a:spcPts val="1600"/>
+              </a:lnSpc>
+              <a:buNone/>
+            </a:pPr>
+            <a:r>
+              <a:rPr lang="en-US" sz="1200" dirty="0">
+                <a:solidFill>
+                  <a:srgbClr val="5F6672"/>
+                </a:solidFill>
+                <a:latin typeface="Yu Gothic" pitchFamily="34" charset="0"/>
+                <a:ea typeface="Yu Gothic" pitchFamily="34" charset="-122"/>
+                <a:cs typeface="Yu Gothic" pitchFamily="34" charset="-120"/>
+              </a:rPr>
+              <a:t>1つの命令で複数のデータに同じ演算をする。画像・音声・行列演算で効く</a:t>
+            </a:r>
+            <a:endParaRPr lang="en-US" sz="1200" dirty="0"/>
+          </a:p>
+        </p:txBody>
+      </p:sp>
+      <p:sp>
+        <p:nvSpPr>
+          <p:cNvPr id="11" name="Shape 9"/>
+          <p:cNvSpPr/>
+          <p:nvPr/>
+        </p:nvSpPr>
+        <p:spPr>
+          <a:xfrm>
+            <a:off x="685800" y="3054096"/>
+            <a:ext cx="5280660" cy="1371600"/>
+          </a:xfrm>
+          <a:prstGeom prst="roundRect">
+            <a:avLst>
+              <a:gd name="adj" fmla="val 4000"/>
+            </a:avLst>
+          </a:prstGeom>
+          <a:solidFill>
+            <a:srgbClr val="EEF1F5"/>
+          </a:solidFill>
+          <a:ln w="12700">
+            <a:solidFill>
+              <a:srgbClr val="DDE4EC"/>
+            </a:solidFill>
+            <a:prstDash val="solid"/>
+          </a:ln>
+        </p:spPr>
+      </p:sp>
+      <p:sp>
+        <p:nvSpPr>
+          <p:cNvPr id="12" name="Text 10"/>
+          <p:cNvSpPr/>
+          <p:nvPr/>
+        </p:nvSpPr>
+        <p:spPr>
+          <a:xfrm>
+            <a:off x="868680" y="3191256"/>
+            <a:ext cx="4914900" cy="310896"/>
+          </a:xfrm>
+          <a:prstGeom prst="rect">
+            <a:avLst/>
+          </a:prstGeom>
+          <a:noFill/>
+          <a:ln/>
+        </p:spPr>
+        <p:txBody>
+          <a:bodyPr wrap="square" lIns="0" tIns="0" rIns="0" bIns="0" rtlCol="0" anchor="ctr"/>
+          <a:lstStyle/>
+          <a:p>
+            <a:pPr indent="0" marL="0">
+              <a:buNone/>
+            </a:pPr>
+            <a:r>
+              <a:rPr lang="en-US" sz="1400" b="1" dirty="0">
+                <a:solidFill>
+                  <a:srgbClr val="16191D"/>
+                </a:solidFill>
+                <a:latin typeface="Yu Gothic" pitchFamily="34" charset="0"/>
+                <a:ea typeface="Yu Gothic" pitchFamily="34" charset="-122"/>
+                <a:cs typeface="Yu Gothic" pitchFamily="34" charset="-120"/>
+              </a:rPr>
+              <a:t>GPU</a:t>
+            </a:r>
+            <a:endParaRPr lang="en-US" sz="1400" dirty="0"/>
+          </a:p>
+        </p:txBody>
+      </p:sp>
+      <p:sp>
+        <p:nvSpPr>
+          <p:cNvPr id="13" name="Text 11"/>
+          <p:cNvSpPr/>
+          <p:nvPr/>
+        </p:nvSpPr>
+        <p:spPr>
+          <a:xfrm>
+            <a:off x="868680" y="3538728"/>
+            <a:ext cx="4914900" cy="731520"/>
+          </a:xfrm>
+          <a:prstGeom prst="rect">
+            <a:avLst/>
+          </a:prstGeom>
+          <a:noFill/>
+          <a:ln/>
+        </p:spPr>
+        <p:txBody>
+          <a:bodyPr wrap="square" lIns="0" tIns="0" rIns="0" bIns="0" rtlCol="0" anchor="t"/>
+          <a:lstStyle/>
+          <a:p>
+            <a:pPr indent="0" marL="0">
+              <a:lnSpc>
+                <a:spcPts val="1600"/>
+              </a:lnSpc>
+              <a:buNone/>
+            </a:pPr>
+            <a:r>
+              <a:rPr lang="en-US" sz="1200" dirty="0">
+                <a:solidFill>
+                  <a:srgbClr val="5F6672"/>
+                </a:solidFill>
+                <a:latin typeface="Yu Gothic" pitchFamily="34" charset="0"/>
+                <a:ea typeface="Yu Gothic" pitchFamily="34" charset="-122"/>
+                <a:cs typeface="Yu Gothic" pitchFamily="34" charset="-120"/>
+              </a:rPr>
+              <a:t>SIMD を極端に推し進めたもの。単純なコアを数千〜数万。深層学習が使うのはこのため</a:t>
+            </a:r>
+            <a:endParaRPr lang="en-US" sz="1200" dirty="0"/>
+          </a:p>
+        </p:txBody>
+      </p:sp>
+      <p:sp>
+        <p:nvSpPr>
+          <p:cNvPr id="14" name="Shape 12"/>
+          <p:cNvSpPr/>
+          <p:nvPr/>
+        </p:nvSpPr>
+        <p:spPr>
+          <a:xfrm>
+            <a:off x="6195060" y="3054096"/>
+            <a:ext cx="5280660" cy="1371600"/>
+          </a:xfrm>
+          <a:prstGeom prst="roundRect">
+            <a:avLst>
+              <a:gd name="adj" fmla="val 4000"/>
+            </a:avLst>
+          </a:prstGeom>
+          <a:solidFill>
+            <a:srgbClr val="EEF1F5"/>
+          </a:solidFill>
+          <a:ln w="12700">
+            <a:solidFill>
+              <a:srgbClr val="DDE4EC"/>
+            </a:solidFill>
+            <a:prstDash val="solid"/>
+          </a:ln>
+        </p:spPr>
+      </p:sp>
+      <p:sp>
+        <p:nvSpPr>
+          <p:cNvPr id="15" name="Text 13"/>
+          <p:cNvSpPr/>
+          <p:nvPr/>
+        </p:nvSpPr>
+        <p:spPr>
+          <a:xfrm>
+            <a:off x="6377940" y="3191256"/>
+            <a:ext cx="4914900" cy="310896"/>
+          </a:xfrm>
+          <a:prstGeom prst="rect">
+            <a:avLst/>
+          </a:prstGeom>
+          <a:noFill/>
+          <a:ln/>
+        </p:spPr>
+        <p:txBody>
+          <a:bodyPr wrap="square" lIns="0" tIns="0" rIns="0" bIns="0" rtlCol="0" anchor="ctr"/>
+          <a:lstStyle/>
+          <a:p>
+            <a:pPr indent="0" marL="0">
+              <a:buNone/>
+            </a:pPr>
+            <a:r>
+              <a:rPr lang="en-US" sz="1400" b="1" dirty="0">
+                <a:solidFill>
+                  <a:srgbClr val="16191D"/>
+                </a:solidFill>
+                <a:latin typeface="Yu Gothic" pitchFamily="34" charset="0"/>
+                <a:ea typeface="Yu Gothic" pitchFamily="34" charset="-122"/>
+                <a:cs typeface="Yu Gothic" pitchFamily="34" charset="-120"/>
+              </a:rPr>
+              <a:t>マルチコア</a:t>
+            </a:r>
+            <a:endParaRPr lang="en-US" sz="1400" dirty="0"/>
+          </a:p>
+        </p:txBody>
+      </p:sp>
+      <p:sp>
+        <p:nvSpPr>
+          <p:cNvPr id="16" name="Text 14"/>
+          <p:cNvSpPr/>
+          <p:nvPr/>
+        </p:nvSpPr>
+        <p:spPr>
+          <a:xfrm>
+            <a:off x="6377940" y="3538728"/>
+            <a:ext cx="4914900" cy="731520"/>
+          </a:xfrm>
+          <a:prstGeom prst="rect">
+            <a:avLst/>
+          </a:prstGeom>
+          <a:noFill/>
+          <a:ln/>
+        </p:spPr>
+        <p:txBody>
+          <a:bodyPr wrap="square" lIns="0" tIns="0" rIns="0" bIns="0" rtlCol="0" anchor="t"/>
+          <a:lstStyle/>
+          <a:p>
+            <a:pPr indent="0" marL="0">
+              <a:lnSpc>
+                <a:spcPts val="1600"/>
+              </a:lnSpc>
+              <a:buNone/>
+            </a:pPr>
+            <a:r>
+              <a:rPr lang="en-US" sz="1200" dirty="0">
+                <a:solidFill>
+                  <a:srgbClr val="5F6672"/>
+                </a:solidFill>
+                <a:latin typeface="Yu Gothic" pitchFamily="34" charset="0"/>
+                <a:ea typeface="Yu Gothic" pitchFamily="34" charset="-122"/>
+                <a:cs typeface="Yu Gothic" pitchFamily="34" charset="-120"/>
+              </a:rPr>
+              <a:t>別々のスレッドを同時に実行する。ハードウェア任せにできず、プログラム側の対応が要る</a:t>
+            </a:r>
+            <a:endParaRPr lang="en-US" sz="1200" dirty="0"/>
+          </a:p>
+        </p:txBody>
+      </p:sp>
+      <p:sp>
+        <p:nvSpPr>
+          <p:cNvPr id="17" name="Text 15"/>
+          <p:cNvSpPr/>
+          <p:nvPr/>
+        </p:nvSpPr>
+        <p:spPr>
+          <a:xfrm>
+            <a:off x="685800" y="5029200"/>
+            <a:ext cx="10789920" cy="512064"/>
+          </a:xfrm>
+          <a:prstGeom prst="rect">
+            <a:avLst/>
+          </a:prstGeom>
+          <a:noFill/>
+          <a:ln/>
+        </p:spPr>
+        <p:txBody>
+          <a:bodyPr wrap="square" lIns="0" tIns="0" rIns="0" bIns="0" rtlCol="0" anchor="ctr"/>
+          <a:lstStyle/>
+          <a:p>
+            <a:pPr indent="0" marL="0">
+              <a:lnSpc>
+                <a:spcPts val="1900"/>
+              </a:lnSpc>
+              <a:buNone/>
+            </a:pPr>
+            <a:r>
+              <a:rPr lang="en-US" sz="1300" b="1" dirty="0">
+                <a:solidFill>
+                  <a:srgbClr val="0B5CAD"/>
+                </a:solidFill>
+                <a:latin typeface="Yu Gothic" pitchFamily="34" charset="0"/>
+                <a:ea typeface="Yu Gothic" pitchFamily="34" charset="-122"/>
+                <a:cs typeface="Yu Gothic" pitchFamily="34" charset="-120"/>
+              </a:rPr>
+              <a:t>(1)〜(3) はハードウェアが勝手にやってくれる。マルチコアだけは、1スレッドのプログラムだとコアが100個あっても1個しか使わない。</a:t>
+            </a:r>
+            <a:endParaRPr lang="en-US" sz="1300" dirty="0"/>
           </a:p>
         </p:txBody>
       </p:sp>
@@ -12426,7 +12473,7 @@
                 <a:ea typeface="Yu Gothic" pitchFamily="34" charset="-122"/>
                 <a:cs typeface="Yu Gothic" pitchFamily="34" charset="-120"/>
               </a:rPr>
-              <a:t>並列プログラムが難しい理由</a:t>
+              <a:t>アムダールの法則</a:t>
             </a:r>
             <a:endParaRPr lang="en-US" sz="3000" dirty="0"/>
           </a:p>
@@ -12479,8 +12526,8 @@
         </p:nvSpPr>
         <p:spPr>
           <a:xfrm>
-            <a:off x="822960" y="1481328"/>
-            <a:ext cx="10515600" cy="3090672"/>
+            <a:off x="685800" y="1481328"/>
+            <a:ext cx="10789920" cy="365760"/>
           </a:xfrm>
           <a:prstGeom prst="rect">
             <a:avLst/>
@@ -12489,18 +12536,17 @@
           <a:ln/>
         </p:spPr>
         <p:txBody>
-          <a:bodyPr wrap="square" lIns="0" tIns="0" rIns="0" bIns="0" rtlCol="0" anchor="t"/>
-          <a:lstStyle/>
-          <a:p>
-            <a:pPr marL="342900" indent="-342900">
-              <a:spcAft>
-                <a:spcPts val="1000"/>
-              </a:spcAft>
-              <a:buSzPct val="100000"/>
-              <a:buChar char="•"/>
-            </a:pPr>
-            <a:r>
-              <a:rPr lang="en-US" sz="1600" dirty="0">
+          <a:bodyPr wrap="square" lIns="0" tIns="0" rIns="0" bIns="0" rtlCol="0" anchor="ctr"/>
+          <a:lstStyle/>
+          <a:p>
+            <a:pPr indent="0" marL="0">
+              <a:lnSpc>
+                <a:spcPts val="2200"/>
+              </a:lnSpc>
+              <a:buNone/>
+            </a:pPr>
+            <a:r>
+              <a:rPr lang="en-US" sz="1500" dirty="0">
                 <a:solidFill>
                   <a:srgbClr val="16191D"/>
                 </a:solidFill>
@@ -12508,20 +12554,62 @@
                 <a:ea typeface="Yu Gothic" pitchFamily="34" charset="-122"/>
                 <a:cs typeface="Yu Gothic" pitchFamily="34" charset="-120"/>
               </a:rPr>
-              <a:t>依存関係 — どの計算がどの計算の結果を必要とするか</a:t>
-            </a:r>
-            <a:endParaRPr lang="en-US" sz="1600" dirty="0"/>
-          </a:p>
-          <a:p>
-            <a:pPr marL="342900" indent="-342900">
-              <a:spcAft>
-                <a:spcPts val="1000"/>
-              </a:spcAft>
-              <a:buSzPct val="100000"/>
-              <a:buChar char="•"/>
-            </a:pPr>
-            <a:r>
-              <a:rPr lang="en-US" sz="1600" dirty="0">
+              <a:t>並列化できる割合を p、コア数を n とすると、高速化率は S = 1 / ((1 − p) + p/n)。</a:t>
+            </a:r>
+            <a:endParaRPr lang="en-US" sz="1500" dirty="0"/>
+          </a:p>
+        </p:txBody>
+      </p:sp>
+      <p:pic>
+        <p:nvPicPr>
+          <p:cNvPr id="6" name="Image 0" descr="/Users/koide/Documents/Playground/CompOutline/slides/png/fig-05-07.png">    </p:cNvPr>
+          <p:cNvPicPr>
+            <a:picLocks noChangeAspect="1"/>
+          </p:cNvPicPr>
+          <p:nvPr/>
+        </p:nvPicPr>
+        <p:blipFill>
+          <a:blip r:embed="rId1"/>
+          <a:stretch>
+            <a:fillRect/>
+          </a:stretch>
+        </p:blipFill>
+        <p:spPr>
+          <a:xfrm>
+            <a:off x="3018434" y="1883664"/>
+            <a:ext cx="6124651" cy="3602736"/>
+          </a:xfrm>
+          <a:prstGeom prst="rect">
+            <a:avLst/>
+          </a:prstGeom>
+        </p:spPr>
+      </p:pic>
+      <p:sp>
+        <p:nvSpPr>
+          <p:cNvPr id="7" name="Text 4"/>
+          <p:cNvSpPr/>
+          <p:nvPr/>
+        </p:nvSpPr>
+        <p:spPr>
+          <a:xfrm>
+            <a:off x="685800" y="5687568"/>
+            <a:ext cx="10789920" cy="365760"/>
+          </a:xfrm>
+          <a:prstGeom prst="rect">
+            <a:avLst/>
+          </a:prstGeom>
+          <a:noFill/>
+          <a:ln/>
+        </p:spPr>
+        <p:txBody>
+          <a:bodyPr wrap="square" lIns="0" tIns="0" rIns="0" bIns="0" rtlCol="0" anchor="ctr"/>
+          <a:lstStyle/>
+          <a:p>
+            <a:pPr algn="ctr" indent="0" marL="0">
+              <a:buNone/>
+            </a:pPr>
+            <a:r>
+              <a:rPr lang="en-US" sz="1500" dirty="0">
                 <a:solidFill>
                   <a:srgbClr val="16191D"/>
                 </a:solidFill>
@@ -12529,114 +12617,9 @@
                 <a:ea typeface="Yu Gothic" pitchFamily="34" charset="-122"/>
                 <a:cs typeface="Yu Gothic" pitchFamily="34" charset="-120"/>
               </a:rPr>
-              <a:t>データの共有と競合 — 2つのスレッドが同じ変数を同時に書き換えると壊れる</a:t>
-            </a:r>
-            <a:endParaRPr lang="en-US" sz="1600" dirty="0"/>
-          </a:p>
-          <a:p>
-            <a:pPr marL="342900" indent="-342900">
-              <a:spcAft>
-                <a:spcPts val="1000"/>
-              </a:spcAft>
-              <a:buSzPct val="100000"/>
-              <a:buChar char="•"/>
-            </a:pPr>
-            <a:r>
-              <a:rPr lang="en-US" sz="1600" dirty="0">
-                <a:solidFill>
-                  <a:srgbClr val="16191D"/>
-                </a:solidFill>
-                <a:latin typeface="Yu Gothic" pitchFamily="34" charset="0"/>
-                <a:ea typeface="Yu Gothic" pitchFamily="34" charset="-122"/>
-                <a:cs typeface="Yu Gothic" pitchFamily="34" charset="-120"/>
-              </a:rPr>
-              <a:t>同期のコスト — 待ち合わせそのものに時間がかかる</a:t>
-            </a:r>
-            <a:endParaRPr lang="en-US" sz="1600" dirty="0"/>
-          </a:p>
-          <a:p>
-            <a:pPr marL="342900" indent="-342900">
-              <a:spcAft>
-                <a:spcPts val="1000"/>
-              </a:spcAft>
-              <a:buSzPct val="100000"/>
-              <a:buChar char="•"/>
-            </a:pPr>
-            <a:r>
-              <a:rPr lang="en-US" sz="1600" dirty="0">
-                <a:solidFill>
-                  <a:srgbClr val="16191D"/>
-                </a:solidFill>
-                <a:latin typeface="Yu Gothic" pitchFamily="34" charset="0"/>
-                <a:ea typeface="Yu Gothic" pitchFamily="34" charset="-122"/>
-                <a:cs typeface="Yu Gothic" pitchFamily="34" charset="-120"/>
-              </a:rPr>
-              <a:t>デッドロック — 互いに相手の資源を待って永久に止まる</a:t>
-            </a:r>
-            <a:endParaRPr lang="en-US" sz="1600" dirty="0"/>
-          </a:p>
-          <a:p>
-            <a:pPr marL="342900" indent="-342900">
-              <a:spcAft>
-                <a:spcPts val="1000"/>
-              </a:spcAft>
-              <a:buSzPct val="100000"/>
-              <a:buChar char="•"/>
-            </a:pPr>
-            <a:r>
-              <a:rPr lang="en-US" sz="1600" dirty="0">
-                <a:solidFill>
-                  <a:srgbClr val="16191D"/>
-                </a:solidFill>
-                <a:latin typeface="Yu Gothic" pitchFamily="34" charset="0"/>
-                <a:ea typeface="Yu Gothic" pitchFamily="34" charset="-122"/>
-                <a:cs typeface="Yu Gothic" pitchFamily="34" charset="-120"/>
-              </a:rPr>
-              <a:t>再現しないバグ — タイミング依存の不具合は、実行するたびに現れたり消えたりする</a:t>
-            </a:r>
-            <a:endParaRPr lang="en-US" sz="1600" dirty="0"/>
-          </a:p>
-        </p:txBody>
-      </p:sp>
-      <p:sp>
-        <p:nvSpPr>
-          <p:cNvPr id="6" name="Text 4"/>
-          <p:cNvSpPr/>
-          <p:nvPr/>
-        </p:nvSpPr>
-        <p:spPr>
-          <a:xfrm>
-            <a:off x="685800" y="4754880"/>
-            <a:ext cx="10789920" cy="512064"/>
-          </a:xfrm>
-          <a:prstGeom prst="rect">
-            <a:avLst/>
-          </a:prstGeom>
-          <a:noFill/>
-          <a:ln/>
-        </p:spPr>
-        <p:txBody>
-          <a:bodyPr wrap="square" lIns="0" tIns="0" rIns="0" bIns="0" rtlCol="0" anchor="ctr"/>
-          <a:lstStyle/>
-          <a:p>
-            <a:pPr indent="0" marL="0">
-              <a:lnSpc>
-                <a:spcPts val="1900"/>
-              </a:lnSpc>
-              <a:buNone/>
-            </a:pPr>
-            <a:r>
-              <a:rPr lang="en-US" sz="1300" b="1" dirty="0">
-                <a:solidFill>
-                  <a:srgbClr val="0B5CAD"/>
-                </a:solidFill>
-                <a:latin typeface="Yu Gothic" pitchFamily="34" charset="0"/>
-                <a:ea typeface="Yu Gothic" pitchFamily="34" charset="-122"/>
-                <a:cs typeface="Yu Gothic" pitchFamily="34" charset="-120"/>
-              </a:rPr>
-              <a:t>これらへの対処は第7回（プロセスとスレッド）で扱う。</a:t>
-            </a:r>
-            <a:endParaRPr lang="en-US" sz="1300" dirty="0"/>
+              <a:t>n を無限に大きくしても、S は 1/(1−p) を超えない。</a:t>
+            </a:r>
+            <a:endParaRPr lang="en-US" sz="1500" dirty="0"/>
           </a:p>
         </p:txBody>
       </p:sp>
@@ -12705,7 +12688,7 @@
                 <a:ea typeface="Yu Gothic" pitchFamily="34" charset="-122"/>
                 <a:cs typeface="Yu Gothic" pitchFamily="34" charset="-120"/>
               </a:rPr>
-              <a:t>第5回</a:t>
+              <a:t>5.4　並列性</a:t>
             </a:r>
             <a:endParaRPr lang="en-US" sz="1200" dirty="0"/>
           </a:p>
@@ -12744,7 +12727,7 @@
                 <a:ea typeface="Yu Gothic" pitchFamily="34" charset="-122"/>
                 <a:cs typeface="Yu Gothic" pitchFamily="34" charset="-120"/>
               </a:rPr>
-              <a:t>演習</a:t>
+              <a:t>並列プログラムが難しい理由</a:t>
             </a:r>
             <a:endParaRPr lang="en-US" sz="3000" dirty="0"/>
           </a:p>
@@ -12791,41 +12774,14 @@
       </p:sp>
       <p:sp>
         <p:nvSpPr>
-          <p:cNvPr id="5" name="Shape 3"/>
-          <p:cNvSpPr/>
-          <p:nvPr/>
-        </p:nvSpPr>
-        <p:spPr>
-          <a:xfrm>
-            <a:off x="685800" y="1691640"/>
-            <a:ext cx="868680" cy="402336"/>
-          </a:xfrm>
-          <a:prstGeom prst="roundRect">
-            <a:avLst>
-              <a:gd name="adj" fmla="val 18182"/>
-            </a:avLst>
-          </a:prstGeom>
-          <a:solidFill>
-            <a:srgbClr val="D9E6F4"/>
-          </a:solidFill>
-          <a:ln w="12700">
-            <a:solidFill>
-              <a:srgbClr val="0B5CAD"/>
-            </a:solidFill>
-            <a:prstDash val="solid"/>
-          </a:ln>
-        </p:spPr>
-      </p:sp>
-      <p:sp>
-        <p:nvSpPr>
-          <p:cNvPr id="6" name="Text 4"/>
-          <p:cNvSpPr/>
-          <p:nvPr/>
-        </p:nvSpPr>
-        <p:spPr>
-          <a:xfrm>
-            <a:off x="685800" y="1691640"/>
-            <a:ext cx="868680" cy="402336"/>
+          <p:cNvPr id="5" name="Text 3"/>
+          <p:cNvSpPr/>
+          <p:nvPr/>
+        </p:nvSpPr>
+        <p:spPr>
+          <a:xfrm>
+            <a:off x="822960" y="1481328"/>
+            <a:ext cx="10515600" cy="3090672"/>
           </a:xfrm>
           <a:prstGeom prst="rect">
             <a:avLst/>
@@ -12834,56 +12790,18 @@
           <a:ln/>
         </p:spPr>
         <p:txBody>
-          <a:bodyPr wrap="square" lIns="0" tIns="0" rIns="0" bIns="0" rtlCol="0" anchor="ctr"/>
-          <a:lstStyle/>
-          <a:p>
-            <a:pPr algn="ctr" indent="0" marL="0">
-              <a:buNone/>
-            </a:pPr>
-            <a:r>
-              <a:rPr lang="en-US" sz="1300" b="1" dirty="0">
-                <a:solidFill>
-                  <a:srgbClr val="0B5CAD"/>
-                </a:solidFill>
-                <a:latin typeface="Courier New" pitchFamily="34" charset="0"/>
-                <a:ea typeface="Courier New" pitchFamily="34" charset="-122"/>
-                <a:cs typeface="Courier New" pitchFamily="34" charset="-120"/>
-              </a:rPr>
-              <a:t>5-1</a:t>
-            </a:r>
-            <a:endParaRPr lang="en-US" sz="1300" dirty="0"/>
-          </a:p>
-        </p:txBody>
-      </p:sp>
-      <p:sp>
-        <p:nvSpPr>
-          <p:cNvPr id="7" name="Text 5"/>
-          <p:cNvSpPr/>
-          <p:nvPr/>
-        </p:nvSpPr>
-        <p:spPr>
-          <a:xfrm>
-            <a:off x="1783080" y="1673352"/>
-            <a:ext cx="9692640" cy="932688"/>
-          </a:xfrm>
-          <a:prstGeom prst="rect">
-            <a:avLst/>
-          </a:prstGeom>
-          <a:noFill/>
-          <a:ln/>
-        </p:spPr>
-        <p:txBody>
           <a:bodyPr wrap="square" lIns="0" tIns="0" rIns="0" bIns="0" rtlCol="0" anchor="t"/>
           <a:lstStyle/>
           <a:p>
-            <a:pPr indent="0" marL="0">
-              <a:lnSpc>
-                <a:spcPts val="2100"/>
-              </a:lnSpc>
-              <a:buNone/>
-            </a:pPr>
-            <a:r>
-              <a:rPr lang="en-US" sz="1400" dirty="0">
+            <a:pPr marL="342900" indent="-342900">
+              <a:spcAft>
+                <a:spcPts val="1000"/>
+              </a:spcAft>
+              <a:buSzPct val="100000"/>
+              <a:buChar char="•"/>
+            </a:pPr>
+            <a:r>
+              <a:rPr lang="en-US" sz="1600" dirty="0">
                 <a:solidFill>
                   <a:srgbClr val="16191D"/>
                 </a:solidFill>
@@ -12891,107 +12809,20 @@
                 <a:ea typeface="Yu Gothic" pitchFamily="34" charset="-122"/>
                 <a:cs typeface="Yu Gothic" pitchFamily="34" charset="-120"/>
               </a:rPr>
-              <a:t>キャッシュ参照時間 2ns、主記憶参照時間 100ns のシステムで、ヒット率が (a) 98% (b) 90% のとき実効アクセス時間をそれぞれ求めよ。</a:t>
-            </a:r>
-            <a:endParaRPr lang="en-US" sz="1400" dirty="0"/>
-          </a:p>
-        </p:txBody>
-      </p:sp>
-      <p:sp>
-        <p:nvSpPr>
-          <p:cNvPr id="8" name="Shape 6"/>
-          <p:cNvSpPr/>
-          <p:nvPr/>
-        </p:nvSpPr>
-        <p:spPr>
-          <a:xfrm>
-            <a:off x="685800" y="2770632"/>
-            <a:ext cx="868680" cy="402336"/>
-          </a:xfrm>
-          <a:prstGeom prst="roundRect">
-            <a:avLst>
-              <a:gd name="adj" fmla="val 18182"/>
-            </a:avLst>
-          </a:prstGeom>
-          <a:solidFill>
-            <a:srgbClr val="D9E6F4"/>
-          </a:solidFill>
-          <a:ln w="12700">
-            <a:solidFill>
-              <a:srgbClr val="0B5CAD"/>
-            </a:solidFill>
-            <a:prstDash val="solid"/>
-          </a:ln>
-        </p:spPr>
-      </p:sp>
-      <p:sp>
-        <p:nvSpPr>
-          <p:cNvPr id="9" name="Text 7"/>
-          <p:cNvSpPr/>
-          <p:nvPr/>
-        </p:nvSpPr>
-        <p:spPr>
-          <a:xfrm>
-            <a:off x="685800" y="2770632"/>
-            <a:ext cx="868680" cy="402336"/>
-          </a:xfrm>
-          <a:prstGeom prst="rect">
-            <a:avLst/>
-          </a:prstGeom>
-          <a:noFill/>
-          <a:ln/>
-        </p:spPr>
-        <p:txBody>
-          <a:bodyPr wrap="square" lIns="0" tIns="0" rIns="0" bIns="0" rtlCol="0" anchor="ctr"/>
-          <a:lstStyle/>
-          <a:p>
-            <a:pPr algn="ctr" indent="0" marL="0">
-              <a:buNone/>
-            </a:pPr>
-            <a:r>
-              <a:rPr lang="en-US" sz="1300" b="1" dirty="0">
-                <a:solidFill>
-                  <a:srgbClr val="0B5CAD"/>
-                </a:solidFill>
-                <a:latin typeface="Courier New" pitchFamily="34" charset="0"/>
-                <a:ea typeface="Courier New" pitchFamily="34" charset="-122"/>
-                <a:cs typeface="Courier New" pitchFamily="34" charset="-120"/>
-              </a:rPr>
-              <a:t>5-2</a:t>
-            </a:r>
-            <a:endParaRPr lang="en-US" sz="1300" dirty="0"/>
-          </a:p>
-        </p:txBody>
-      </p:sp>
-      <p:sp>
-        <p:nvSpPr>
-          <p:cNvPr id="10" name="Text 8"/>
-          <p:cNvSpPr/>
-          <p:nvPr/>
-        </p:nvSpPr>
-        <p:spPr>
-          <a:xfrm>
-            <a:off x="1783080" y="2752344"/>
-            <a:ext cx="9692640" cy="932688"/>
-          </a:xfrm>
-          <a:prstGeom prst="rect">
-            <a:avLst/>
-          </a:prstGeom>
-          <a:noFill/>
-          <a:ln/>
-        </p:spPr>
-        <p:txBody>
-          <a:bodyPr wrap="square" lIns="0" tIns="0" rIns="0" bIns="0" rtlCol="0" anchor="t"/>
-          <a:lstStyle/>
-          <a:p>
-            <a:pPr indent="0" marL="0">
-              <a:lnSpc>
-                <a:spcPts val="2100"/>
-              </a:lnSpc>
-              <a:buNone/>
-            </a:pPr>
-            <a:r>
-              <a:rPr lang="en-US" sz="1400" dirty="0">
+              <a:t>依存関係 — どの計算がどの計算の結果を必要とするか</a:t>
+            </a:r>
+            <a:endParaRPr lang="en-US" sz="1600" dirty="0"/>
+          </a:p>
+          <a:p>
+            <a:pPr marL="342900" indent="-342900">
+              <a:spcAft>
+                <a:spcPts val="1000"/>
+              </a:spcAft>
+              <a:buSzPct val="100000"/>
+              <a:buChar char="•"/>
+            </a:pPr>
+            <a:r>
+              <a:rPr lang="en-US" sz="1600" dirty="0">
                 <a:solidFill>
                   <a:srgbClr val="16191D"/>
                 </a:solidFill>
@@ -12999,107 +12830,20 @@
                 <a:ea typeface="Yu Gothic" pitchFamily="34" charset="-122"/>
                 <a:cs typeface="Yu Gothic" pitchFamily="34" charset="-120"/>
               </a:rPr>
-              <a:t>5.2 の (a)(b) 2つのループについて、N=1024、1要素8バイト、キャッシュライン64バイトとする。それぞれ何回のキャッシュミスが起きるか概算せよ。</a:t>
-            </a:r>
-            <a:endParaRPr lang="en-US" sz="1400" dirty="0"/>
-          </a:p>
-        </p:txBody>
-      </p:sp>
-      <p:sp>
-        <p:nvSpPr>
-          <p:cNvPr id="11" name="Shape 9"/>
-          <p:cNvSpPr/>
-          <p:nvPr/>
-        </p:nvSpPr>
-        <p:spPr>
-          <a:xfrm>
-            <a:off x="685800" y="3849624"/>
-            <a:ext cx="868680" cy="402336"/>
-          </a:xfrm>
-          <a:prstGeom prst="roundRect">
-            <a:avLst>
-              <a:gd name="adj" fmla="val 18182"/>
-            </a:avLst>
-          </a:prstGeom>
-          <a:solidFill>
-            <a:srgbClr val="D9E6F4"/>
-          </a:solidFill>
-          <a:ln w="12700">
-            <a:solidFill>
-              <a:srgbClr val="0B5CAD"/>
-            </a:solidFill>
-            <a:prstDash val="solid"/>
-          </a:ln>
-        </p:spPr>
-      </p:sp>
-      <p:sp>
-        <p:nvSpPr>
-          <p:cNvPr id="12" name="Text 10"/>
-          <p:cNvSpPr/>
-          <p:nvPr/>
-        </p:nvSpPr>
-        <p:spPr>
-          <a:xfrm>
-            <a:off x="685800" y="3849624"/>
-            <a:ext cx="868680" cy="402336"/>
-          </a:xfrm>
-          <a:prstGeom prst="rect">
-            <a:avLst/>
-          </a:prstGeom>
-          <a:noFill/>
-          <a:ln/>
-        </p:spPr>
-        <p:txBody>
-          <a:bodyPr wrap="square" lIns="0" tIns="0" rIns="0" bIns="0" rtlCol="0" anchor="ctr"/>
-          <a:lstStyle/>
-          <a:p>
-            <a:pPr algn="ctr" indent="0" marL="0">
-              <a:buNone/>
-            </a:pPr>
-            <a:r>
-              <a:rPr lang="en-US" sz="1300" b="1" dirty="0">
-                <a:solidFill>
-                  <a:srgbClr val="0B5CAD"/>
-                </a:solidFill>
-                <a:latin typeface="Courier New" pitchFamily="34" charset="0"/>
-                <a:ea typeface="Courier New" pitchFamily="34" charset="-122"/>
-                <a:cs typeface="Courier New" pitchFamily="34" charset="-120"/>
-              </a:rPr>
-              <a:t>5-3</a:t>
-            </a:r>
-            <a:endParaRPr lang="en-US" sz="1300" dirty="0"/>
-          </a:p>
-        </p:txBody>
-      </p:sp>
-      <p:sp>
-        <p:nvSpPr>
-          <p:cNvPr id="13" name="Text 11"/>
-          <p:cNvSpPr/>
-          <p:nvPr/>
-        </p:nvSpPr>
-        <p:spPr>
-          <a:xfrm>
-            <a:off x="1783080" y="3831336"/>
-            <a:ext cx="9692640" cy="932688"/>
-          </a:xfrm>
-          <a:prstGeom prst="rect">
-            <a:avLst/>
-          </a:prstGeom>
-          <a:noFill/>
-          <a:ln/>
-        </p:spPr>
-        <p:txBody>
-          <a:bodyPr wrap="square" lIns="0" tIns="0" rIns="0" bIns="0" rtlCol="0" anchor="t"/>
-          <a:lstStyle/>
-          <a:p>
-            <a:pPr indent="0" marL="0">
-              <a:lnSpc>
-                <a:spcPts val="2100"/>
-              </a:lnSpc>
-              <a:buNone/>
-            </a:pPr>
-            <a:r>
-              <a:rPr lang="en-US" sz="1400" dirty="0">
+              <a:t>データの共有と競合 — 2つのスレッドが同じ変数を同時に書き換えると壊れる</a:t>
+            </a:r>
+            <a:endParaRPr lang="en-US" sz="1600" dirty="0"/>
+          </a:p>
+          <a:p>
+            <a:pPr marL="342900" indent="-342900">
+              <a:spcAft>
+                <a:spcPts val="1000"/>
+              </a:spcAft>
+              <a:buSzPct val="100000"/>
+              <a:buChar char="•"/>
+            </a:pPr>
+            <a:r>
+              <a:rPr lang="en-US" sz="1600" dirty="0">
                 <a:solidFill>
                   <a:srgbClr val="16191D"/>
                 </a:solidFill>
@@ -13107,107 +12851,20 @@
                 <a:ea typeface="Yu Gothic" pitchFamily="34" charset="-122"/>
                 <a:cs typeface="Yu Gothic" pitchFamily="34" charset="-120"/>
               </a:rPr>
-              <a:t>仮想記憶がもたらす利点を3つ挙げ、それぞれ「なかったら何が困るか」を述べよ。</a:t>
-            </a:r>
-            <a:endParaRPr lang="en-US" sz="1400" dirty="0"/>
-          </a:p>
-        </p:txBody>
-      </p:sp>
-      <p:sp>
-        <p:nvSpPr>
-          <p:cNvPr id="14" name="Shape 12"/>
-          <p:cNvSpPr/>
-          <p:nvPr/>
-        </p:nvSpPr>
-        <p:spPr>
-          <a:xfrm>
-            <a:off x="685800" y="4928616"/>
-            <a:ext cx="868680" cy="402336"/>
-          </a:xfrm>
-          <a:prstGeom prst="roundRect">
-            <a:avLst>
-              <a:gd name="adj" fmla="val 18182"/>
-            </a:avLst>
-          </a:prstGeom>
-          <a:solidFill>
-            <a:srgbClr val="D9E6F4"/>
-          </a:solidFill>
-          <a:ln w="12700">
-            <a:solidFill>
-              <a:srgbClr val="0B5CAD"/>
-            </a:solidFill>
-            <a:prstDash val="solid"/>
-          </a:ln>
-        </p:spPr>
-      </p:sp>
-      <p:sp>
-        <p:nvSpPr>
-          <p:cNvPr id="15" name="Text 13"/>
-          <p:cNvSpPr/>
-          <p:nvPr/>
-        </p:nvSpPr>
-        <p:spPr>
-          <a:xfrm>
-            <a:off x="685800" y="4928616"/>
-            <a:ext cx="868680" cy="402336"/>
-          </a:xfrm>
-          <a:prstGeom prst="rect">
-            <a:avLst/>
-          </a:prstGeom>
-          <a:noFill/>
-          <a:ln/>
-        </p:spPr>
-        <p:txBody>
-          <a:bodyPr wrap="square" lIns="0" tIns="0" rIns="0" bIns="0" rtlCol="0" anchor="ctr"/>
-          <a:lstStyle/>
-          <a:p>
-            <a:pPr algn="ctr" indent="0" marL="0">
-              <a:buNone/>
-            </a:pPr>
-            <a:r>
-              <a:rPr lang="en-US" sz="1300" b="1" dirty="0">
-                <a:solidFill>
-                  <a:srgbClr val="0B5CAD"/>
-                </a:solidFill>
-                <a:latin typeface="Courier New" pitchFamily="34" charset="0"/>
-                <a:ea typeface="Courier New" pitchFamily="34" charset="-122"/>
-                <a:cs typeface="Courier New" pitchFamily="34" charset="-120"/>
-              </a:rPr>
-              <a:t>5-4</a:t>
-            </a:r>
-            <a:endParaRPr lang="en-US" sz="1300" dirty="0"/>
-          </a:p>
-        </p:txBody>
-      </p:sp>
-      <p:sp>
-        <p:nvSpPr>
-          <p:cNvPr id="16" name="Text 14"/>
-          <p:cNvSpPr/>
-          <p:nvPr/>
-        </p:nvSpPr>
-        <p:spPr>
-          <a:xfrm>
-            <a:off x="1783080" y="4910328"/>
-            <a:ext cx="9692640" cy="932688"/>
-          </a:xfrm>
-          <a:prstGeom prst="rect">
-            <a:avLst/>
-          </a:prstGeom>
-          <a:noFill/>
-          <a:ln/>
-        </p:spPr>
-        <p:txBody>
-          <a:bodyPr wrap="square" lIns="0" tIns="0" rIns="0" bIns="0" rtlCol="0" anchor="t"/>
-          <a:lstStyle/>
-          <a:p>
-            <a:pPr indent="0" marL="0">
-              <a:lnSpc>
-                <a:spcPts val="2100"/>
-              </a:lnSpc>
-              <a:buNone/>
-            </a:pPr>
-            <a:r>
-              <a:rPr lang="en-US" sz="1400" dirty="0">
+              <a:t>同期のコスト — 待ち合わせそのものに時間がかかる</a:t>
+            </a:r>
+            <a:endParaRPr lang="en-US" sz="1600" dirty="0"/>
+          </a:p>
+          <a:p>
+            <a:pPr marL="342900" indent="-342900">
+              <a:spcAft>
+                <a:spcPts val="1000"/>
+              </a:spcAft>
+              <a:buSzPct val="100000"/>
+              <a:buChar char="•"/>
+            </a:pPr>
+            <a:r>
+              <a:rPr lang="en-US" sz="1600" dirty="0">
                 <a:solidFill>
                   <a:srgbClr val="16191D"/>
                 </a:solidFill>
@@ -13215,9 +12872,72 @@
                 <a:ea typeface="Yu Gothic" pitchFamily="34" charset="-122"/>
                 <a:cs typeface="Yu Gothic" pitchFamily="34" charset="-120"/>
               </a:rPr>
-              <a:t>実行時間の 80% は並列化でき、20% は逐次実行しかできない。(a) 4コアでの高速化率は何倍か (b) コア数を無限にしたときの上限は何倍か。</a:t>
-            </a:r>
-            <a:endParaRPr lang="en-US" sz="1400" dirty="0"/>
+              <a:t>デッドロック — 互いに相手の資源を待って永久に止まる</a:t>
+            </a:r>
+            <a:endParaRPr lang="en-US" sz="1600" dirty="0"/>
+          </a:p>
+          <a:p>
+            <a:pPr marL="342900" indent="-342900">
+              <a:spcAft>
+                <a:spcPts val="1000"/>
+              </a:spcAft>
+              <a:buSzPct val="100000"/>
+              <a:buChar char="•"/>
+            </a:pPr>
+            <a:r>
+              <a:rPr lang="en-US" sz="1600" dirty="0">
+                <a:solidFill>
+                  <a:srgbClr val="16191D"/>
+                </a:solidFill>
+                <a:latin typeface="Yu Gothic" pitchFamily="34" charset="0"/>
+                <a:ea typeface="Yu Gothic" pitchFamily="34" charset="-122"/>
+                <a:cs typeface="Yu Gothic" pitchFamily="34" charset="-120"/>
+              </a:rPr>
+              <a:t>再現しないバグ — タイミング依存の不具合は、実行するたびに現れたり消えたりする</a:t>
+            </a:r>
+            <a:endParaRPr lang="en-US" sz="1600" dirty="0"/>
+          </a:p>
+        </p:txBody>
+      </p:sp>
+      <p:sp>
+        <p:nvSpPr>
+          <p:cNvPr id="6" name="Text 4"/>
+          <p:cNvSpPr/>
+          <p:nvPr/>
+        </p:nvSpPr>
+        <p:spPr>
+          <a:xfrm>
+            <a:off x="685800" y="4754880"/>
+            <a:ext cx="10789920" cy="512064"/>
+          </a:xfrm>
+          <a:prstGeom prst="rect">
+            <a:avLst/>
+          </a:prstGeom>
+          <a:noFill/>
+          <a:ln/>
+        </p:spPr>
+        <p:txBody>
+          <a:bodyPr wrap="square" lIns="0" tIns="0" rIns="0" bIns="0" rtlCol="0" anchor="ctr"/>
+          <a:lstStyle/>
+          <a:p>
+            <a:pPr indent="0" marL="0">
+              <a:lnSpc>
+                <a:spcPts val="1900"/>
+              </a:lnSpc>
+              <a:buNone/>
+            </a:pPr>
+            <a:r>
+              <a:rPr lang="en-US" sz="1300" b="1" dirty="0">
+                <a:solidFill>
+                  <a:srgbClr val="0B5CAD"/>
+                </a:solidFill>
+                <a:latin typeface="Yu Gothic" pitchFamily="34" charset="0"/>
+                <a:ea typeface="Yu Gothic" pitchFamily="34" charset="-122"/>
+                <a:cs typeface="Yu Gothic" pitchFamily="34" charset="-120"/>
+              </a:rPr>
+              <a:t>これらへの対処は第7回（プロセスとスレッド）で扱う。</a:t>
+            </a:r>
+            <a:endParaRPr lang="en-US" sz="1300" dirty="0"/>
           </a:p>
         </p:txBody>
       </p:sp>
@@ -13232,6 +12952,587 @@
 <file path=ppt/slides/slide24.xml><?xml version="1.0" encoding="utf-8"?>
 <p:sld xmlns:a="http://schemas.openxmlformats.org/drawingml/2006/main" xmlns:r="http://schemas.openxmlformats.org/officeDocument/2006/relationships" xmlns:p="http://schemas.openxmlformats.org/presentationml/2006/main">
   <p:cSld name="Slide 24">
+    <p:bg>
+      <p:bgPr>
+        <a:solidFill>
+          <a:srgbClr val="FFFFFF"/>
+        </a:solidFill>
+      </p:bgPr>
+    </p:bg>
+    <p:spTree>
+      <p:nvGrpSpPr>
+        <p:cNvPr id="1" name=""/>
+        <p:cNvGrpSpPr/>
+        <p:nvPr/>
+      </p:nvGrpSpPr>
+      <p:grpSpPr>
+        <a:xfrm>
+          <a:off x="0" y="0"/>
+          <a:ext cx="0" cy="0"/>
+          <a:chOff x="0" y="0"/>
+          <a:chExt cx="0" cy="0"/>
+        </a:xfrm>
+      </p:grpSpPr>
+      <p:sp>
+        <p:nvSpPr>
+          <p:cNvPr id="2" name="Text 0"/>
+          <p:cNvSpPr/>
+          <p:nvPr/>
+        </p:nvSpPr>
+        <p:spPr>
+          <a:xfrm>
+            <a:off x="566928" y="310896"/>
+            <a:ext cx="4572000" cy="256032"/>
+          </a:xfrm>
+          <a:prstGeom prst="rect">
+            <a:avLst/>
+          </a:prstGeom>
+          <a:noFill/>
+          <a:ln/>
+        </p:spPr>
+        <p:txBody>
+          <a:bodyPr wrap="square" lIns="0" tIns="0" rIns="0" bIns="0" rtlCol="0" anchor="ctr"/>
+          <a:lstStyle/>
+          <a:p>
+            <a:pPr indent="0" marL="0">
+              <a:buNone/>
+            </a:pPr>
+            <a:r>
+              <a:rPr lang="en-US" sz="1200" b="1" dirty="0">
+                <a:solidFill>
+                  <a:srgbClr val="0B5CAD"/>
+                </a:solidFill>
+                <a:latin typeface="Yu Gothic" pitchFamily="34" charset="0"/>
+                <a:ea typeface="Yu Gothic" pitchFamily="34" charset="-122"/>
+                <a:cs typeface="Yu Gothic" pitchFamily="34" charset="-120"/>
+              </a:rPr>
+              <a:t>第5回</a:t>
+            </a:r>
+            <a:endParaRPr lang="en-US" sz="1200" dirty="0"/>
+          </a:p>
+        </p:txBody>
+      </p:sp>
+      <p:sp>
+        <p:nvSpPr>
+          <p:cNvPr id="3" name="Text 1"/>
+          <p:cNvSpPr/>
+          <p:nvPr/>
+        </p:nvSpPr>
+        <p:spPr>
+          <a:xfrm>
+            <a:off x="548640" y="603504"/>
+            <a:ext cx="11064240" cy="731520"/>
+          </a:xfrm>
+          <a:prstGeom prst="rect">
+            <a:avLst/>
+          </a:prstGeom>
+          <a:noFill/>
+          <a:ln/>
+        </p:spPr>
+        <p:txBody>
+          <a:bodyPr wrap="square" lIns="0" tIns="0" rIns="0" bIns="0" rtlCol="0" anchor="t"/>
+          <a:lstStyle/>
+          <a:p>
+            <a:pPr indent="0" marL="0">
+              <a:buNone/>
+            </a:pPr>
+            <a:r>
+              <a:rPr lang="en-US" sz="3000" b="1" dirty="0">
+                <a:solidFill>
+                  <a:srgbClr val="16191D"/>
+                </a:solidFill>
+                <a:latin typeface="Yu Gothic" pitchFamily="34" charset="0"/>
+                <a:ea typeface="Yu Gothic" pitchFamily="34" charset="-122"/>
+                <a:cs typeface="Yu Gothic" pitchFamily="34" charset="-120"/>
+              </a:rPr>
+              <a:t>演習</a:t>
+            </a:r>
+            <a:endParaRPr lang="en-US" sz="3000" dirty="0"/>
+          </a:p>
+        </p:txBody>
+      </p:sp>
+      <p:sp>
+        <p:nvSpPr>
+          <p:cNvPr id="4" name="Text 2"/>
+          <p:cNvSpPr/>
+          <p:nvPr/>
+        </p:nvSpPr>
+        <p:spPr>
+          <a:xfrm>
+            <a:off x="11247120" y="6355080"/>
+            <a:ext cx="548640" cy="274320"/>
+          </a:xfrm>
+          <a:prstGeom prst="rect">
+            <a:avLst/>
+          </a:prstGeom>
+          <a:noFill/>
+          <a:ln/>
+        </p:spPr>
+        <p:txBody>
+          <a:bodyPr wrap="square" lIns="0" tIns="0" rIns="0" bIns="0" rtlCol="0" anchor="ctr"/>
+          <a:lstStyle/>
+          <a:p>
+            <a:pPr algn="r" indent="0" marL="0">
+              <a:buNone/>
+            </a:pPr>
+            <a:r>
+              <a:rPr lang="en-US" sz="1000" dirty="0">
+                <a:solidFill>
+                  <a:srgbClr val="5F6672"/>
+                </a:solidFill>
+                <a:latin typeface="Yu Gothic" pitchFamily="34" charset="0"/>
+                <a:ea typeface="Yu Gothic" pitchFamily="34" charset="-122"/>
+                <a:cs typeface="Yu Gothic" pitchFamily="34" charset="-120"/>
+              </a:rPr>
+              <a:t>24</a:t>
+            </a:r>
+            <a:endParaRPr lang="en-US" sz="1000" dirty="0"/>
+          </a:p>
+        </p:txBody>
+      </p:sp>
+      <p:sp>
+        <p:nvSpPr>
+          <p:cNvPr id="5" name="Shape 3"/>
+          <p:cNvSpPr/>
+          <p:nvPr/>
+        </p:nvSpPr>
+        <p:spPr>
+          <a:xfrm>
+            <a:off x="685800" y="1691640"/>
+            <a:ext cx="868680" cy="402336"/>
+          </a:xfrm>
+          <a:prstGeom prst="roundRect">
+            <a:avLst>
+              <a:gd name="adj" fmla="val 18182"/>
+            </a:avLst>
+          </a:prstGeom>
+          <a:solidFill>
+            <a:srgbClr val="D9E6F4"/>
+          </a:solidFill>
+          <a:ln w="12700">
+            <a:solidFill>
+              <a:srgbClr val="0B5CAD"/>
+            </a:solidFill>
+            <a:prstDash val="solid"/>
+          </a:ln>
+        </p:spPr>
+      </p:sp>
+      <p:sp>
+        <p:nvSpPr>
+          <p:cNvPr id="6" name="Text 4"/>
+          <p:cNvSpPr/>
+          <p:nvPr/>
+        </p:nvSpPr>
+        <p:spPr>
+          <a:xfrm>
+            <a:off x="685800" y="1691640"/>
+            <a:ext cx="868680" cy="402336"/>
+          </a:xfrm>
+          <a:prstGeom prst="rect">
+            <a:avLst/>
+          </a:prstGeom>
+          <a:noFill/>
+          <a:ln/>
+        </p:spPr>
+        <p:txBody>
+          <a:bodyPr wrap="square" lIns="0" tIns="0" rIns="0" bIns="0" rtlCol="0" anchor="ctr"/>
+          <a:lstStyle/>
+          <a:p>
+            <a:pPr algn="ctr" indent="0" marL="0">
+              <a:buNone/>
+            </a:pPr>
+            <a:r>
+              <a:rPr lang="en-US" sz="1300" b="1" dirty="0">
+                <a:solidFill>
+                  <a:srgbClr val="0B5CAD"/>
+                </a:solidFill>
+                <a:latin typeface="Courier New" pitchFamily="34" charset="0"/>
+                <a:ea typeface="Courier New" pitchFamily="34" charset="-122"/>
+                <a:cs typeface="Courier New" pitchFamily="34" charset="-120"/>
+              </a:rPr>
+              <a:t>5-1</a:t>
+            </a:r>
+            <a:endParaRPr lang="en-US" sz="1300" dirty="0"/>
+          </a:p>
+        </p:txBody>
+      </p:sp>
+      <p:sp>
+        <p:nvSpPr>
+          <p:cNvPr id="7" name="Text 5"/>
+          <p:cNvSpPr/>
+          <p:nvPr/>
+        </p:nvSpPr>
+        <p:spPr>
+          <a:xfrm>
+            <a:off x="1783080" y="1673352"/>
+            <a:ext cx="9692640" cy="932688"/>
+          </a:xfrm>
+          <a:prstGeom prst="rect">
+            <a:avLst/>
+          </a:prstGeom>
+          <a:noFill/>
+          <a:ln/>
+        </p:spPr>
+        <p:txBody>
+          <a:bodyPr wrap="square" lIns="0" tIns="0" rIns="0" bIns="0" rtlCol="0" anchor="t"/>
+          <a:lstStyle/>
+          <a:p>
+            <a:pPr indent="0" marL="0">
+              <a:lnSpc>
+                <a:spcPts val="2100"/>
+              </a:lnSpc>
+              <a:buNone/>
+            </a:pPr>
+            <a:r>
+              <a:rPr lang="en-US" sz="1400" dirty="0">
+                <a:solidFill>
+                  <a:srgbClr val="16191D"/>
+                </a:solidFill>
+                <a:latin typeface="Yu Gothic" pitchFamily="34" charset="0"/>
+                <a:ea typeface="Yu Gothic" pitchFamily="34" charset="-122"/>
+                <a:cs typeface="Yu Gothic" pitchFamily="34" charset="-120"/>
+              </a:rPr>
+              <a:t>キャッシュ参照時間 2ns、主記憶参照時間 100ns のシステムで、ヒット率が (a) 98% (b) 90% のとき実効アクセス時間をそれぞれ求めよ。</a:t>
+            </a:r>
+            <a:endParaRPr lang="en-US" sz="1400" dirty="0"/>
+          </a:p>
+        </p:txBody>
+      </p:sp>
+      <p:sp>
+        <p:nvSpPr>
+          <p:cNvPr id="8" name="Shape 6"/>
+          <p:cNvSpPr/>
+          <p:nvPr/>
+        </p:nvSpPr>
+        <p:spPr>
+          <a:xfrm>
+            <a:off x="685800" y="2770632"/>
+            <a:ext cx="868680" cy="402336"/>
+          </a:xfrm>
+          <a:prstGeom prst="roundRect">
+            <a:avLst>
+              <a:gd name="adj" fmla="val 18182"/>
+            </a:avLst>
+          </a:prstGeom>
+          <a:solidFill>
+            <a:srgbClr val="D9E6F4"/>
+          </a:solidFill>
+          <a:ln w="12700">
+            <a:solidFill>
+              <a:srgbClr val="0B5CAD"/>
+            </a:solidFill>
+            <a:prstDash val="solid"/>
+          </a:ln>
+        </p:spPr>
+      </p:sp>
+      <p:sp>
+        <p:nvSpPr>
+          <p:cNvPr id="9" name="Text 7"/>
+          <p:cNvSpPr/>
+          <p:nvPr/>
+        </p:nvSpPr>
+        <p:spPr>
+          <a:xfrm>
+            <a:off x="685800" y="2770632"/>
+            <a:ext cx="868680" cy="402336"/>
+          </a:xfrm>
+          <a:prstGeom prst="rect">
+            <a:avLst/>
+          </a:prstGeom>
+          <a:noFill/>
+          <a:ln/>
+        </p:spPr>
+        <p:txBody>
+          <a:bodyPr wrap="square" lIns="0" tIns="0" rIns="0" bIns="0" rtlCol="0" anchor="ctr"/>
+          <a:lstStyle/>
+          <a:p>
+            <a:pPr algn="ctr" indent="0" marL="0">
+              <a:buNone/>
+            </a:pPr>
+            <a:r>
+              <a:rPr lang="en-US" sz="1300" b="1" dirty="0">
+                <a:solidFill>
+                  <a:srgbClr val="0B5CAD"/>
+                </a:solidFill>
+                <a:latin typeface="Courier New" pitchFamily="34" charset="0"/>
+                <a:ea typeface="Courier New" pitchFamily="34" charset="-122"/>
+                <a:cs typeface="Courier New" pitchFamily="34" charset="-120"/>
+              </a:rPr>
+              <a:t>5-2</a:t>
+            </a:r>
+            <a:endParaRPr lang="en-US" sz="1300" dirty="0"/>
+          </a:p>
+        </p:txBody>
+      </p:sp>
+      <p:sp>
+        <p:nvSpPr>
+          <p:cNvPr id="10" name="Text 8"/>
+          <p:cNvSpPr/>
+          <p:nvPr/>
+        </p:nvSpPr>
+        <p:spPr>
+          <a:xfrm>
+            <a:off x="1783080" y="2752344"/>
+            <a:ext cx="9692640" cy="932688"/>
+          </a:xfrm>
+          <a:prstGeom prst="rect">
+            <a:avLst/>
+          </a:prstGeom>
+          <a:noFill/>
+          <a:ln/>
+        </p:spPr>
+        <p:txBody>
+          <a:bodyPr wrap="square" lIns="0" tIns="0" rIns="0" bIns="0" rtlCol="0" anchor="t"/>
+          <a:lstStyle/>
+          <a:p>
+            <a:pPr indent="0" marL="0">
+              <a:lnSpc>
+                <a:spcPts val="2100"/>
+              </a:lnSpc>
+              <a:buNone/>
+            </a:pPr>
+            <a:r>
+              <a:rPr lang="en-US" sz="1400" dirty="0">
+                <a:solidFill>
+                  <a:srgbClr val="16191D"/>
+                </a:solidFill>
+                <a:latin typeface="Yu Gothic" pitchFamily="34" charset="0"/>
+                <a:ea typeface="Yu Gothic" pitchFamily="34" charset="-122"/>
+                <a:cs typeface="Yu Gothic" pitchFamily="34" charset="-120"/>
+              </a:rPr>
+              <a:t>5.2 の (a)(b) 2つのループについて、N=1024、1要素8バイト、キャッシュライン64バイトとする。それぞれ何回のキャッシュミスが起きるか概算せよ。</a:t>
+            </a:r>
+            <a:endParaRPr lang="en-US" sz="1400" dirty="0"/>
+          </a:p>
+        </p:txBody>
+      </p:sp>
+      <p:sp>
+        <p:nvSpPr>
+          <p:cNvPr id="11" name="Shape 9"/>
+          <p:cNvSpPr/>
+          <p:nvPr/>
+        </p:nvSpPr>
+        <p:spPr>
+          <a:xfrm>
+            <a:off x="685800" y="3849624"/>
+            <a:ext cx="868680" cy="402336"/>
+          </a:xfrm>
+          <a:prstGeom prst="roundRect">
+            <a:avLst>
+              <a:gd name="adj" fmla="val 18182"/>
+            </a:avLst>
+          </a:prstGeom>
+          <a:solidFill>
+            <a:srgbClr val="D9E6F4"/>
+          </a:solidFill>
+          <a:ln w="12700">
+            <a:solidFill>
+              <a:srgbClr val="0B5CAD"/>
+            </a:solidFill>
+            <a:prstDash val="solid"/>
+          </a:ln>
+        </p:spPr>
+      </p:sp>
+      <p:sp>
+        <p:nvSpPr>
+          <p:cNvPr id="12" name="Text 10"/>
+          <p:cNvSpPr/>
+          <p:nvPr/>
+        </p:nvSpPr>
+        <p:spPr>
+          <a:xfrm>
+            <a:off x="685800" y="3849624"/>
+            <a:ext cx="868680" cy="402336"/>
+          </a:xfrm>
+          <a:prstGeom prst="rect">
+            <a:avLst/>
+          </a:prstGeom>
+          <a:noFill/>
+          <a:ln/>
+        </p:spPr>
+        <p:txBody>
+          <a:bodyPr wrap="square" lIns="0" tIns="0" rIns="0" bIns="0" rtlCol="0" anchor="ctr"/>
+          <a:lstStyle/>
+          <a:p>
+            <a:pPr algn="ctr" indent="0" marL="0">
+              <a:buNone/>
+            </a:pPr>
+            <a:r>
+              <a:rPr lang="en-US" sz="1300" b="1" dirty="0">
+                <a:solidFill>
+                  <a:srgbClr val="0B5CAD"/>
+                </a:solidFill>
+                <a:latin typeface="Courier New" pitchFamily="34" charset="0"/>
+                <a:ea typeface="Courier New" pitchFamily="34" charset="-122"/>
+                <a:cs typeface="Courier New" pitchFamily="34" charset="-120"/>
+              </a:rPr>
+              <a:t>5-3</a:t>
+            </a:r>
+            <a:endParaRPr lang="en-US" sz="1300" dirty="0"/>
+          </a:p>
+        </p:txBody>
+      </p:sp>
+      <p:sp>
+        <p:nvSpPr>
+          <p:cNvPr id="13" name="Text 11"/>
+          <p:cNvSpPr/>
+          <p:nvPr/>
+        </p:nvSpPr>
+        <p:spPr>
+          <a:xfrm>
+            <a:off x="1783080" y="3831336"/>
+            <a:ext cx="9692640" cy="932688"/>
+          </a:xfrm>
+          <a:prstGeom prst="rect">
+            <a:avLst/>
+          </a:prstGeom>
+          <a:noFill/>
+          <a:ln/>
+        </p:spPr>
+        <p:txBody>
+          <a:bodyPr wrap="square" lIns="0" tIns="0" rIns="0" bIns="0" rtlCol="0" anchor="t"/>
+          <a:lstStyle/>
+          <a:p>
+            <a:pPr indent="0" marL="0">
+              <a:lnSpc>
+                <a:spcPts val="2100"/>
+              </a:lnSpc>
+              <a:buNone/>
+            </a:pPr>
+            <a:r>
+              <a:rPr lang="en-US" sz="1400" dirty="0">
+                <a:solidFill>
+                  <a:srgbClr val="16191D"/>
+                </a:solidFill>
+                <a:latin typeface="Yu Gothic" pitchFamily="34" charset="0"/>
+                <a:ea typeface="Yu Gothic" pitchFamily="34" charset="-122"/>
+                <a:cs typeface="Yu Gothic" pitchFamily="34" charset="-120"/>
+              </a:rPr>
+              <a:t>仮想記憶がもたらす利点を3つ挙げ、それぞれ「なかったら何が困るか」を述べよ。</a:t>
+            </a:r>
+            <a:endParaRPr lang="en-US" sz="1400" dirty="0"/>
+          </a:p>
+        </p:txBody>
+      </p:sp>
+      <p:sp>
+        <p:nvSpPr>
+          <p:cNvPr id="14" name="Shape 12"/>
+          <p:cNvSpPr/>
+          <p:nvPr/>
+        </p:nvSpPr>
+        <p:spPr>
+          <a:xfrm>
+            <a:off x="685800" y="4928616"/>
+            <a:ext cx="868680" cy="402336"/>
+          </a:xfrm>
+          <a:prstGeom prst="roundRect">
+            <a:avLst>
+              <a:gd name="adj" fmla="val 18182"/>
+            </a:avLst>
+          </a:prstGeom>
+          <a:solidFill>
+            <a:srgbClr val="D9E6F4"/>
+          </a:solidFill>
+          <a:ln w="12700">
+            <a:solidFill>
+              <a:srgbClr val="0B5CAD"/>
+            </a:solidFill>
+            <a:prstDash val="solid"/>
+          </a:ln>
+        </p:spPr>
+      </p:sp>
+      <p:sp>
+        <p:nvSpPr>
+          <p:cNvPr id="15" name="Text 13"/>
+          <p:cNvSpPr/>
+          <p:nvPr/>
+        </p:nvSpPr>
+        <p:spPr>
+          <a:xfrm>
+            <a:off x="685800" y="4928616"/>
+            <a:ext cx="868680" cy="402336"/>
+          </a:xfrm>
+          <a:prstGeom prst="rect">
+            <a:avLst/>
+          </a:prstGeom>
+          <a:noFill/>
+          <a:ln/>
+        </p:spPr>
+        <p:txBody>
+          <a:bodyPr wrap="square" lIns="0" tIns="0" rIns="0" bIns="0" rtlCol="0" anchor="ctr"/>
+          <a:lstStyle/>
+          <a:p>
+            <a:pPr algn="ctr" indent="0" marL="0">
+              <a:buNone/>
+            </a:pPr>
+            <a:r>
+              <a:rPr lang="en-US" sz="1300" b="1" dirty="0">
+                <a:solidFill>
+                  <a:srgbClr val="0B5CAD"/>
+                </a:solidFill>
+                <a:latin typeface="Courier New" pitchFamily="34" charset="0"/>
+                <a:ea typeface="Courier New" pitchFamily="34" charset="-122"/>
+                <a:cs typeface="Courier New" pitchFamily="34" charset="-120"/>
+              </a:rPr>
+              <a:t>5-4</a:t>
+            </a:r>
+            <a:endParaRPr lang="en-US" sz="1300" dirty="0"/>
+          </a:p>
+        </p:txBody>
+      </p:sp>
+      <p:sp>
+        <p:nvSpPr>
+          <p:cNvPr id="16" name="Text 14"/>
+          <p:cNvSpPr/>
+          <p:nvPr/>
+        </p:nvSpPr>
+        <p:spPr>
+          <a:xfrm>
+            <a:off x="1783080" y="4910328"/>
+            <a:ext cx="9692640" cy="932688"/>
+          </a:xfrm>
+          <a:prstGeom prst="rect">
+            <a:avLst/>
+          </a:prstGeom>
+          <a:noFill/>
+          <a:ln/>
+        </p:spPr>
+        <p:txBody>
+          <a:bodyPr wrap="square" lIns="0" tIns="0" rIns="0" bIns="0" rtlCol="0" anchor="t"/>
+          <a:lstStyle/>
+          <a:p>
+            <a:pPr indent="0" marL="0">
+              <a:lnSpc>
+                <a:spcPts val="2100"/>
+              </a:lnSpc>
+              <a:buNone/>
+            </a:pPr>
+            <a:r>
+              <a:rPr lang="en-US" sz="1400" dirty="0">
+                <a:solidFill>
+                  <a:srgbClr val="16191D"/>
+                </a:solidFill>
+                <a:latin typeface="Yu Gothic" pitchFamily="34" charset="0"/>
+                <a:ea typeface="Yu Gothic" pitchFamily="34" charset="-122"/>
+                <a:cs typeface="Yu Gothic" pitchFamily="34" charset="-120"/>
+              </a:rPr>
+              <a:t>実行時間の 80% は並列化でき、20% は逐次実行しかできない。(a) 4コアでの高速化率は何倍か (b) コア数を無限にしたときの上限は何倍か。</a:t>
+            </a:r>
+            <a:endParaRPr lang="en-US" sz="1400" dirty="0"/>
+          </a:p>
+        </p:txBody>
+      </p:sp>
+    </p:spTree>
+  </p:cSld>
+  <p:clrMapOvr>
+    <a:masterClrMapping/>
+  </p:clrMapOvr>
+</p:sld>
+</file>
+
+<file path=ppt/slides/slide25.xml><?xml version="1.0" encoding="utf-8"?>
+<p:sld xmlns:a="http://schemas.openxmlformats.org/drawingml/2006/main" xmlns:r="http://schemas.openxmlformats.org/officeDocument/2006/relationships" xmlns:p="http://schemas.openxmlformats.org/presentationml/2006/main">
+  <p:cSld name="Slide 25">
     <p:bg>
       <p:bgPr>
         <a:solidFill>

--- a/slides/第05回_記憶階層とプロセッサの並列性.pptx
+++ b/slides/第05回_記憶階層とプロセッサの並列性.pptx
@@ -13150,7 +13150,7 @@
                 <a:ea typeface="Courier New" pitchFamily="34" charset="-122"/>
                 <a:cs typeface="Courier New" pitchFamily="34" charset="-120"/>
               </a:rPr>
-              <a:t>5-1</a:t>
+              <a:t>5-2</a:t>
             </a:r>
             <a:endParaRPr lang="en-US" sz="1300" dirty="0"/>
           </a:p>
@@ -13258,7 +13258,7 @@
                 <a:ea typeface="Courier New" pitchFamily="34" charset="-122"/>
                 <a:cs typeface="Courier New" pitchFamily="34" charset="-120"/>
               </a:rPr>
-              <a:t>5-2</a:t>
+              <a:t>5-3</a:t>
             </a:r>
             <a:endParaRPr lang="en-US" sz="1300" dirty="0"/>
           </a:p>
@@ -13366,7 +13366,7 @@
                 <a:ea typeface="Courier New" pitchFamily="34" charset="-122"/>
                 <a:cs typeface="Courier New" pitchFamily="34" charset="-120"/>
               </a:rPr>
-              <a:t>5-3</a:t>
+              <a:t>5-4</a:t>
             </a:r>
             <a:endParaRPr lang="en-US" sz="1300" dirty="0"/>
           </a:p>
@@ -13474,7 +13474,7 @@
                 <a:ea typeface="Courier New" pitchFamily="34" charset="-122"/>
                 <a:cs typeface="Courier New" pitchFamily="34" charset="-120"/>
               </a:rPr>
-              <a:t>5-4</a:t>
+              <a:t>5-5</a:t>
             </a:r>
             <a:endParaRPr lang="en-US" sz="1300" dirty="0"/>
           </a:p>
